--- a/함수정리.pptx
+++ b/함수정리.pptx
@@ -23,23 +23,27 @@
     <p:sldId id="284" r:id="rId17"/>
     <p:sldId id="285" r:id="rId18"/>
     <p:sldId id="286" r:id="rId19"/>
-    <p:sldId id="287" r:id="rId20"/>
-    <p:sldId id="256" r:id="rId21"/>
-    <p:sldId id="260" r:id="rId22"/>
-    <p:sldId id="257" r:id="rId23"/>
-    <p:sldId id="263" r:id="rId24"/>
-    <p:sldId id="261" r:id="rId25"/>
-    <p:sldId id="258" r:id="rId26"/>
-    <p:sldId id="259" r:id="rId27"/>
-    <p:sldId id="288" r:id="rId28"/>
-    <p:sldId id="289" r:id="rId29"/>
-    <p:sldId id="291" r:id="rId30"/>
-    <p:sldId id="292" r:id="rId31"/>
-    <p:sldId id="293" r:id="rId32"/>
-    <p:sldId id="290" r:id="rId33"/>
-    <p:sldId id="294" r:id="rId34"/>
-    <p:sldId id="295" r:id="rId35"/>
-    <p:sldId id="296" r:id="rId36"/>
+    <p:sldId id="288" r:id="rId20"/>
+    <p:sldId id="287" r:id="rId21"/>
+    <p:sldId id="297" r:id="rId22"/>
+    <p:sldId id="298" r:id="rId23"/>
+    <p:sldId id="299" r:id="rId24"/>
+    <p:sldId id="300" r:id="rId25"/>
+    <p:sldId id="256" r:id="rId26"/>
+    <p:sldId id="260" r:id="rId27"/>
+    <p:sldId id="257" r:id="rId28"/>
+    <p:sldId id="263" r:id="rId29"/>
+    <p:sldId id="261" r:id="rId30"/>
+    <p:sldId id="258" r:id="rId31"/>
+    <p:sldId id="259" r:id="rId32"/>
+    <p:sldId id="289" r:id="rId33"/>
+    <p:sldId id="291" r:id="rId34"/>
+    <p:sldId id="292" r:id="rId35"/>
+    <p:sldId id="293" r:id="rId36"/>
+    <p:sldId id="290" r:id="rId37"/>
+    <p:sldId id="294" r:id="rId38"/>
+    <p:sldId id="295" r:id="rId39"/>
+    <p:sldId id="296" r:id="rId40"/>
   </p:sldIdLst>
   <p:sldSz cx="12192000" cy="6858000"/>
   <p:notesSz cx="6858000" cy="9144000"/>
@@ -601,7 +605,7 @@
           <a:p>
             <a:fld id="{32C060AA-3801-45AD-AD9D-ABE64BFA33CD}" type="datetimeFigureOut">
               <a:rPr lang="ko-KR" altLang="en-US" smtClean="0"/>
-              <a:t>2026-04-04</a:t>
+              <a:t>2026-04-05</a:t>
             </a:fld>
             <a:endParaRPr lang="ko-KR" altLang="en-US"/>
           </a:p>
@@ -799,7 +803,7 @@
           <a:p>
             <a:fld id="{32C060AA-3801-45AD-AD9D-ABE64BFA33CD}" type="datetimeFigureOut">
               <a:rPr lang="ko-KR" altLang="en-US" smtClean="0"/>
-              <a:t>2026-04-04</a:t>
+              <a:t>2026-04-05</a:t>
             </a:fld>
             <a:endParaRPr lang="ko-KR" altLang="en-US"/>
           </a:p>
@@ -1007,7 +1011,7 @@
           <a:p>
             <a:fld id="{32C060AA-3801-45AD-AD9D-ABE64BFA33CD}" type="datetimeFigureOut">
               <a:rPr lang="ko-KR" altLang="en-US" smtClean="0"/>
-              <a:t>2026-04-04</a:t>
+              <a:t>2026-04-05</a:t>
             </a:fld>
             <a:endParaRPr lang="ko-KR" altLang="en-US"/>
           </a:p>
@@ -1205,7 +1209,7 @@
           <a:p>
             <a:fld id="{32C060AA-3801-45AD-AD9D-ABE64BFA33CD}" type="datetimeFigureOut">
               <a:rPr lang="ko-KR" altLang="en-US" smtClean="0"/>
-              <a:t>2026-04-04</a:t>
+              <a:t>2026-04-05</a:t>
             </a:fld>
             <a:endParaRPr lang="ko-KR" altLang="en-US"/>
           </a:p>
@@ -1480,7 +1484,7 @@
           <a:p>
             <a:fld id="{32C060AA-3801-45AD-AD9D-ABE64BFA33CD}" type="datetimeFigureOut">
               <a:rPr lang="ko-KR" altLang="en-US" smtClean="0"/>
-              <a:t>2026-04-04</a:t>
+              <a:t>2026-04-05</a:t>
             </a:fld>
             <a:endParaRPr lang="ko-KR" altLang="en-US"/>
           </a:p>
@@ -1745,7 +1749,7 @@
           <a:p>
             <a:fld id="{32C060AA-3801-45AD-AD9D-ABE64BFA33CD}" type="datetimeFigureOut">
               <a:rPr lang="ko-KR" altLang="en-US" smtClean="0"/>
-              <a:t>2026-04-04</a:t>
+              <a:t>2026-04-05</a:t>
             </a:fld>
             <a:endParaRPr lang="ko-KR" altLang="en-US"/>
           </a:p>
@@ -2157,7 +2161,7 @@
           <a:p>
             <a:fld id="{32C060AA-3801-45AD-AD9D-ABE64BFA33CD}" type="datetimeFigureOut">
               <a:rPr lang="ko-KR" altLang="en-US" smtClean="0"/>
-              <a:t>2026-04-04</a:t>
+              <a:t>2026-04-05</a:t>
             </a:fld>
             <a:endParaRPr lang="ko-KR" altLang="en-US"/>
           </a:p>
@@ -2298,7 +2302,7 @@
           <a:p>
             <a:fld id="{32C060AA-3801-45AD-AD9D-ABE64BFA33CD}" type="datetimeFigureOut">
               <a:rPr lang="ko-KR" altLang="en-US" smtClean="0"/>
-              <a:t>2026-04-04</a:t>
+              <a:t>2026-04-05</a:t>
             </a:fld>
             <a:endParaRPr lang="ko-KR" altLang="en-US"/>
           </a:p>
@@ -2411,7 +2415,7 @@
           <a:p>
             <a:fld id="{32C060AA-3801-45AD-AD9D-ABE64BFA33CD}" type="datetimeFigureOut">
               <a:rPr lang="ko-KR" altLang="en-US" smtClean="0"/>
-              <a:t>2026-04-04</a:t>
+              <a:t>2026-04-05</a:t>
             </a:fld>
             <a:endParaRPr lang="ko-KR" altLang="en-US"/>
           </a:p>
@@ -2722,7 +2726,7 @@
           <a:p>
             <a:fld id="{32C060AA-3801-45AD-AD9D-ABE64BFA33CD}" type="datetimeFigureOut">
               <a:rPr lang="ko-KR" altLang="en-US" smtClean="0"/>
-              <a:t>2026-04-04</a:t>
+              <a:t>2026-04-05</a:t>
             </a:fld>
             <a:endParaRPr lang="ko-KR" altLang="en-US"/>
           </a:p>
@@ -3010,7 +3014,7 @@
           <a:p>
             <a:fld id="{32C060AA-3801-45AD-AD9D-ABE64BFA33CD}" type="datetimeFigureOut">
               <a:rPr lang="ko-KR" altLang="en-US" smtClean="0"/>
-              <a:t>2026-04-04</a:t>
+              <a:t>2026-04-05</a:t>
             </a:fld>
             <a:endParaRPr lang="ko-KR" altLang="en-US"/>
           </a:p>
@@ -3251,7 +3255,7 @@
           <a:p>
             <a:fld id="{32C060AA-3801-45AD-AD9D-ABE64BFA33CD}" type="datetimeFigureOut">
               <a:rPr lang="ko-KR" altLang="en-US" smtClean="0"/>
-              <a:t>2026-04-04</a:t>
+              <a:t>2026-04-05</a:t>
             </a:fld>
             <a:endParaRPr lang="ko-KR" altLang="en-US"/>
           </a:p>
@@ -4447,516 +4451,6 @@
           <a:chExt cx="0" cy="0"/>
         </a:xfrm>
       </p:grpSpPr>
-    </p:spTree>
-    <p:extLst>
-      <p:ext uri="{BB962C8B-B14F-4D97-AF65-F5344CB8AC3E}">
-        <p14:creationId xmlns:p14="http://schemas.microsoft.com/office/powerpoint/2010/main" val="2178760692"/>
-      </p:ext>
-    </p:extLst>
-  </p:cSld>
-  <p:clrMapOvr>
-    <a:masterClrMapping/>
-  </p:clrMapOvr>
-</p:sld>
-</file>
-
-<file path=ppt/slides/slide2.xml><?xml version="1.0" encoding="utf-8"?>
-<p:sld xmlns:a="http://schemas.openxmlformats.org/drawingml/2006/main" xmlns:r="http://schemas.openxmlformats.org/officeDocument/2006/relationships" xmlns:p="http://schemas.openxmlformats.org/presentationml/2006/main">
-  <p:cSld>
-    <p:spTree>
-      <p:nvGrpSpPr>
-        <p:cNvPr id="1" name=""/>
-        <p:cNvGrpSpPr/>
-        <p:nvPr/>
-      </p:nvGrpSpPr>
-      <p:grpSpPr>
-        <a:xfrm>
-          <a:off x="0" y="0"/>
-          <a:ext cx="0" cy="0"/>
-          <a:chOff x="0" y="0"/>
-          <a:chExt cx="0" cy="0"/>
-        </a:xfrm>
-      </p:grpSpPr>
-      <p:pic>
-        <p:nvPicPr>
-          <p:cNvPr id="3" name="그림 2">
-            <a:extLst>
-              <a:ext uri="{FF2B5EF4-FFF2-40B4-BE49-F238E27FC236}">
-                <a16:creationId xmlns:a16="http://schemas.microsoft.com/office/drawing/2014/main" id="{3E5BE6C2-6C77-5673-5AE8-EE21A4D962A7}"/>
-              </a:ext>
-            </a:extLst>
-          </p:cNvPr>
-          <p:cNvPicPr>
-            <a:picLocks noChangeAspect="1"/>
-          </p:cNvPicPr>
-          <p:nvPr/>
-        </p:nvPicPr>
-        <p:blipFill>
-          <a:blip r:embed="rId2"/>
-          <a:stretch>
-            <a:fillRect/>
-          </a:stretch>
-        </p:blipFill>
-        <p:spPr>
-          <a:xfrm>
-            <a:off x="2943225" y="828675"/>
-            <a:ext cx="6305550" cy="5200650"/>
-          </a:xfrm>
-          <a:prstGeom prst="rect">
-            <a:avLst/>
-          </a:prstGeom>
-        </p:spPr>
-      </p:pic>
-    </p:spTree>
-    <p:extLst>
-      <p:ext uri="{BB962C8B-B14F-4D97-AF65-F5344CB8AC3E}">
-        <p14:creationId xmlns:p14="http://schemas.microsoft.com/office/powerpoint/2010/main" val="33066365"/>
-      </p:ext>
-    </p:extLst>
-  </p:cSld>
-  <p:clrMapOvr>
-    <a:masterClrMapping/>
-  </p:clrMapOvr>
-</p:sld>
-</file>
-
-<file path=ppt/slides/slide20.xml><?xml version="1.0" encoding="utf-8"?>
-<p:sld xmlns:a="http://schemas.openxmlformats.org/drawingml/2006/main" xmlns:r="http://schemas.openxmlformats.org/officeDocument/2006/relationships" xmlns:p="http://schemas.openxmlformats.org/presentationml/2006/main">
-  <p:cSld>
-    <p:spTree>
-      <p:nvGrpSpPr>
-        <p:cNvPr id="1" name=""/>
-        <p:cNvGrpSpPr/>
-        <p:nvPr/>
-      </p:nvGrpSpPr>
-      <p:grpSpPr>
-        <a:xfrm>
-          <a:off x="0" y="0"/>
-          <a:ext cx="0" cy="0"/>
-          <a:chOff x="0" y="0"/>
-          <a:chExt cx="0" cy="0"/>
-        </a:xfrm>
-      </p:grpSpPr>
-      <p:pic>
-        <p:nvPicPr>
-          <p:cNvPr id="5" name="그림 4">
-            <a:extLst>
-              <a:ext uri="{FF2B5EF4-FFF2-40B4-BE49-F238E27FC236}">
-                <a16:creationId xmlns:a16="http://schemas.microsoft.com/office/drawing/2014/main" id="{8091A294-A7FA-C11A-3AA7-E84F9D541FB7}"/>
-              </a:ext>
-            </a:extLst>
-          </p:cNvPr>
-          <p:cNvPicPr>
-            <a:picLocks noChangeAspect="1"/>
-          </p:cNvPicPr>
-          <p:nvPr/>
-        </p:nvPicPr>
-        <p:blipFill>
-          <a:blip r:embed="rId2"/>
-          <a:stretch>
-            <a:fillRect/>
-          </a:stretch>
-        </p:blipFill>
-        <p:spPr>
-          <a:xfrm>
-            <a:off x="2362200" y="1123950"/>
-            <a:ext cx="7467600" cy="4610100"/>
-          </a:xfrm>
-          <a:prstGeom prst="rect">
-            <a:avLst/>
-          </a:prstGeom>
-        </p:spPr>
-      </p:pic>
-    </p:spTree>
-    <p:extLst>
-      <p:ext uri="{BB962C8B-B14F-4D97-AF65-F5344CB8AC3E}">
-        <p14:creationId xmlns:p14="http://schemas.microsoft.com/office/powerpoint/2010/main" val="431007319"/>
-      </p:ext>
-    </p:extLst>
-  </p:cSld>
-  <p:clrMapOvr>
-    <a:masterClrMapping/>
-  </p:clrMapOvr>
-</p:sld>
-</file>
-
-<file path=ppt/slides/slide21.xml><?xml version="1.0" encoding="utf-8"?>
-<p:sld xmlns:a="http://schemas.openxmlformats.org/drawingml/2006/main" xmlns:r="http://schemas.openxmlformats.org/officeDocument/2006/relationships" xmlns:p="http://schemas.openxmlformats.org/presentationml/2006/main">
-  <p:cSld>
-    <p:spTree>
-      <p:nvGrpSpPr>
-        <p:cNvPr id="1" name=""/>
-        <p:cNvGrpSpPr/>
-        <p:nvPr/>
-      </p:nvGrpSpPr>
-      <p:grpSpPr>
-        <a:xfrm>
-          <a:off x="0" y="0"/>
-          <a:ext cx="0" cy="0"/>
-          <a:chOff x="0" y="0"/>
-          <a:chExt cx="0" cy="0"/>
-        </a:xfrm>
-      </p:grpSpPr>
-      <p:pic>
-        <p:nvPicPr>
-          <p:cNvPr id="3" name="그림 2">
-            <a:extLst>
-              <a:ext uri="{FF2B5EF4-FFF2-40B4-BE49-F238E27FC236}">
-                <a16:creationId xmlns:a16="http://schemas.microsoft.com/office/drawing/2014/main" id="{722B99A1-04D2-7ADF-98FE-CF7216AB4E2E}"/>
-              </a:ext>
-            </a:extLst>
-          </p:cNvPr>
-          <p:cNvPicPr>
-            <a:picLocks noChangeAspect="1"/>
-          </p:cNvPicPr>
-          <p:nvPr/>
-        </p:nvPicPr>
-        <p:blipFill>
-          <a:blip r:embed="rId2"/>
-          <a:stretch>
-            <a:fillRect/>
-          </a:stretch>
-        </p:blipFill>
-        <p:spPr>
-          <a:xfrm>
-            <a:off x="2595562" y="990600"/>
-            <a:ext cx="7000875" cy="4876800"/>
-          </a:xfrm>
-          <a:prstGeom prst="rect">
-            <a:avLst/>
-          </a:prstGeom>
-        </p:spPr>
-      </p:pic>
-    </p:spTree>
-    <p:extLst>
-      <p:ext uri="{BB962C8B-B14F-4D97-AF65-F5344CB8AC3E}">
-        <p14:creationId xmlns:p14="http://schemas.microsoft.com/office/powerpoint/2010/main" val="2555125669"/>
-      </p:ext>
-    </p:extLst>
-  </p:cSld>
-  <p:clrMapOvr>
-    <a:masterClrMapping/>
-  </p:clrMapOvr>
-</p:sld>
-</file>
-
-<file path=ppt/slides/slide22.xml><?xml version="1.0" encoding="utf-8"?>
-<p:sld xmlns:a="http://schemas.openxmlformats.org/drawingml/2006/main" xmlns:r="http://schemas.openxmlformats.org/officeDocument/2006/relationships" xmlns:p="http://schemas.openxmlformats.org/presentationml/2006/main">
-  <p:cSld>
-    <p:spTree>
-      <p:nvGrpSpPr>
-        <p:cNvPr id="1" name=""/>
-        <p:cNvGrpSpPr/>
-        <p:nvPr/>
-      </p:nvGrpSpPr>
-      <p:grpSpPr>
-        <a:xfrm>
-          <a:off x="0" y="0"/>
-          <a:ext cx="0" cy="0"/>
-          <a:chOff x="0" y="0"/>
-          <a:chExt cx="0" cy="0"/>
-        </a:xfrm>
-      </p:grpSpPr>
-      <p:pic>
-        <p:nvPicPr>
-          <p:cNvPr id="3" name="그림 2">
-            <a:extLst>
-              <a:ext uri="{FF2B5EF4-FFF2-40B4-BE49-F238E27FC236}">
-                <a16:creationId xmlns:a16="http://schemas.microsoft.com/office/drawing/2014/main" id="{DB2752E3-431D-74D0-9B3B-5B6928688B21}"/>
-              </a:ext>
-            </a:extLst>
-          </p:cNvPr>
-          <p:cNvPicPr>
-            <a:picLocks noChangeAspect="1"/>
-          </p:cNvPicPr>
-          <p:nvPr/>
-        </p:nvPicPr>
-        <p:blipFill>
-          <a:blip r:embed="rId2"/>
-          <a:stretch>
-            <a:fillRect/>
-          </a:stretch>
-        </p:blipFill>
-        <p:spPr>
-          <a:xfrm>
-            <a:off x="2786062" y="828675"/>
-            <a:ext cx="6619875" cy="5200650"/>
-          </a:xfrm>
-          <a:prstGeom prst="rect">
-            <a:avLst/>
-          </a:prstGeom>
-        </p:spPr>
-      </p:pic>
-    </p:spTree>
-    <p:extLst>
-      <p:ext uri="{BB962C8B-B14F-4D97-AF65-F5344CB8AC3E}">
-        <p14:creationId xmlns:p14="http://schemas.microsoft.com/office/powerpoint/2010/main" val="362157702"/>
-      </p:ext>
-    </p:extLst>
-  </p:cSld>
-  <p:clrMapOvr>
-    <a:masterClrMapping/>
-  </p:clrMapOvr>
-</p:sld>
-</file>
-
-<file path=ppt/slides/slide23.xml><?xml version="1.0" encoding="utf-8"?>
-<p:sld xmlns:a="http://schemas.openxmlformats.org/drawingml/2006/main" xmlns:r="http://schemas.openxmlformats.org/officeDocument/2006/relationships" xmlns:p="http://schemas.openxmlformats.org/presentationml/2006/main">
-  <p:cSld>
-    <p:spTree>
-      <p:nvGrpSpPr>
-        <p:cNvPr id="1" name=""/>
-        <p:cNvGrpSpPr/>
-        <p:nvPr/>
-      </p:nvGrpSpPr>
-      <p:grpSpPr>
-        <a:xfrm>
-          <a:off x="0" y="0"/>
-          <a:ext cx="0" cy="0"/>
-          <a:chOff x="0" y="0"/>
-          <a:chExt cx="0" cy="0"/>
-        </a:xfrm>
-      </p:grpSpPr>
-      <p:pic>
-        <p:nvPicPr>
-          <p:cNvPr id="3" name="그림 2">
-            <a:extLst>
-              <a:ext uri="{FF2B5EF4-FFF2-40B4-BE49-F238E27FC236}">
-                <a16:creationId xmlns:a16="http://schemas.microsoft.com/office/drawing/2014/main" id="{63F07927-45B8-4E70-9B39-5562BE7FB8A8}"/>
-              </a:ext>
-            </a:extLst>
-          </p:cNvPr>
-          <p:cNvPicPr>
-            <a:picLocks noChangeAspect="1"/>
-          </p:cNvPicPr>
-          <p:nvPr/>
-        </p:nvPicPr>
-        <p:blipFill>
-          <a:blip r:embed="rId2"/>
-          <a:stretch>
-            <a:fillRect/>
-          </a:stretch>
-        </p:blipFill>
-        <p:spPr>
-          <a:xfrm>
-            <a:off x="3133725" y="1090612"/>
-            <a:ext cx="5924550" cy="4676775"/>
-          </a:xfrm>
-          <a:prstGeom prst="rect">
-            <a:avLst/>
-          </a:prstGeom>
-        </p:spPr>
-      </p:pic>
-    </p:spTree>
-    <p:extLst>
-      <p:ext uri="{BB962C8B-B14F-4D97-AF65-F5344CB8AC3E}">
-        <p14:creationId xmlns:p14="http://schemas.microsoft.com/office/powerpoint/2010/main" val="171160837"/>
-      </p:ext>
-    </p:extLst>
-  </p:cSld>
-  <p:clrMapOvr>
-    <a:masterClrMapping/>
-  </p:clrMapOvr>
-</p:sld>
-</file>
-
-<file path=ppt/slides/slide24.xml><?xml version="1.0" encoding="utf-8"?>
-<p:sld xmlns:a="http://schemas.openxmlformats.org/drawingml/2006/main" xmlns:r="http://schemas.openxmlformats.org/officeDocument/2006/relationships" xmlns:p="http://schemas.openxmlformats.org/presentationml/2006/main">
-  <p:cSld>
-    <p:spTree>
-      <p:nvGrpSpPr>
-        <p:cNvPr id="1" name=""/>
-        <p:cNvGrpSpPr/>
-        <p:nvPr/>
-      </p:nvGrpSpPr>
-      <p:grpSpPr>
-        <a:xfrm>
-          <a:off x="0" y="0"/>
-          <a:ext cx="0" cy="0"/>
-          <a:chOff x="0" y="0"/>
-          <a:chExt cx="0" cy="0"/>
-        </a:xfrm>
-      </p:grpSpPr>
-      <p:pic>
-        <p:nvPicPr>
-          <p:cNvPr id="3" name="그림 2">
-            <a:extLst>
-              <a:ext uri="{FF2B5EF4-FFF2-40B4-BE49-F238E27FC236}">
-                <a16:creationId xmlns:a16="http://schemas.microsoft.com/office/drawing/2014/main" id="{E76B9057-EEC8-0B57-BA02-37BF17E3D690}"/>
-              </a:ext>
-            </a:extLst>
-          </p:cNvPr>
-          <p:cNvPicPr>
-            <a:picLocks noChangeAspect="1"/>
-          </p:cNvPicPr>
-          <p:nvPr/>
-        </p:nvPicPr>
-        <p:blipFill>
-          <a:blip r:embed="rId2"/>
-          <a:stretch>
-            <a:fillRect/>
-          </a:stretch>
-        </p:blipFill>
-        <p:spPr>
-          <a:xfrm>
-            <a:off x="2543175" y="990600"/>
-            <a:ext cx="7105650" cy="4876800"/>
-          </a:xfrm>
-          <a:prstGeom prst="rect">
-            <a:avLst/>
-          </a:prstGeom>
-        </p:spPr>
-      </p:pic>
-    </p:spTree>
-    <p:extLst>
-      <p:ext uri="{BB962C8B-B14F-4D97-AF65-F5344CB8AC3E}">
-        <p14:creationId xmlns:p14="http://schemas.microsoft.com/office/powerpoint/2010/main" val="614989378"/>
-      </p:ext>
-    </p:extLst>
-  </p:cSld>
-  <p:clrMapOvr>
-    <a:masterClrMapping/>
-  </p:clrMapOvr>
-</p:sld>
-</file>
-
-<file path=ppt/slides/slide25.xml><?xml version="1.0" encoding="utf-8"?>
-<p:sld xmlns:a="http://schemas.openxmlformats.org/drawingml/2006/main" xmlns:r="http://schemas.openxmlformats.org/officeDocument/2006/relationships" xmlns:p="http://schemas.openxmlformats.org/presentationml/2006/main">
-  <p:cSld>
-    <p:spTree>
-      <p:nvGrpSpPr>
-        <p:cNvPr id="1" name=""/>
-        <p:cNvGrpSpPr/>
-        <p:nvPr/>
-      </p:nvGrpSpPr>
-      <p:grpSpPr>
-        <a:xfrm>
-          <a:off x="0" y="0"/>
-          <a:ext cx="0" cy="0"/>
-          <a:chOff x="0" y="0"/>
-          <a:chExt cx="0" cy="0"/>
-        </a:xfrm>
-      </p:grpSpPr>
-      <p:pic>
-        <p:nvPicPr>
-          <p:cNvPr id="3" name="그림 2">
-            <a:extLst>
-              <a:ext uri="{FF2B5EF4-FFF2-40B4-BE49-F238E27FC236}">
-                <a16:creationId xmlns:a16="http://schemas.microsoft.com/office/drawing/2014/main" id="{D62B99F0-A5A1-1AE6-FA56-7AE59E48A157}"/>
-              </a:ext>
-            </a:extLst>
-          </p:cNvPr>
-          <p:cNvPicPr>
-            <a:picLocks noChangeAspect="1"/>
-          </p:cNvPicPr>
-          <p:nvPr/>
-        </p:nvPicPr>
-        <p:blipFill>
-          <a:blip r:embed="rId2"/>
-          <a:stretch>
-            <a:fillRect/>
-          </a:stretch>
-        </p:blipFill>
-        <p:spPr>
-          <a:xfrm>
-            <a:off x="2695575" y="1000125"/>
-            <a:ext cx="6800850" cy="4857750"/>
-          </a:xfrm>
-          <a:prstGeom prst="rect">
-            <a:avLst/>
-          </a:prstGeom>
-        </p:spPr>
-      </p:pic>
-    </p:spTree>
-    <p:extLst>
-      <p:ext uri="{BB962C8B-B14F-4D97-AF65-F5344CB8AC3E}">
-        <p14:creationId xmlns:p14="http://schemas.microsoft.com/office/powerpoint/2010/main" val="3985065081"/>
-      </p:ext>
-    </p:extLst>
-  </p:cSld>
-  <p:clrMapOvr>
-    <a:masterClrMapping/>
-  </p:clrMapOvr>
-</p:sld>
-</file>
-
-<file path=ppt/slides/slide26.xml><?xml version="1.0" encoding="utf-8"?>
-<p:sld xmlns:a="http://schemas.openxmlformats.org/drawingml/2006/main" xmlns:r="http://schemas.openxmlformats.org/officeDocument/2006/relationships" xmlns:p="http://schemas.openxmlformats.org/presentationml/2006/main">
-  <p:cSld>
-    <p:spTree>
-      <p:nvGrpSpPr>
-        <p:cNvPr id="1" name=""/>
-        <p:cNvGrpSpPr/>
-        <p:nvPr/>
-      </p:nvGrpSpPr>
-      <p:grpSpPr>
-        <a:xfrm>
-          <a:off x="0" y="0"/>
-          <a:ext cx="0" cy="0"/>
-          <a:chOff x="0" y="0"/>
-          <a:chExt cx="0" cy="0"/>
-        </a:xfrm>
-      </p:grpSpPr>
-      <p:pic>
-        <p:nvPicPr>
-          <p:cNvPr id="3" name="그림 2">
-            <a:extLst>
-              <a:ext uri="{FF2B5EF4-FFF2-40B4-BE49-F238E27FC236}">
-                <a16:creationId xmlns:a16="http://schemas.microsoft.com/office/drawing/2014/main" id="{4DF74AC7-B380-84F9-44AA-8D31FDE49848}"/>
-              </a:ext>
-            </a:extLst>
-          </p:cNvPr>
-          <p:cNvPicPr>
-            <a:picLocks noChangeAspect="1"/>
-          </p:cNvPicPr>
-          <p:nvPr/>
-        </p:nvPicPr>
-        <p:blipFill>
-          <a:blip r:embed="rId2"/>
-          <a:stretch>
-            <a:fillRect/>
-          </a:stretch>
-        </p:blipFill>
-        <p:spPr>
-          <a:xfrm>
-            <a:off x="2481262" y="852487"/>
-            <a:ext cx="7229475" cy="5153025"/>
-          </a:xfrm>
-          <a:prstGeom prst="rect">
-            <a:avLst/>
-          </a:prstGeom>
-        </p:spPr>
-      </p:pic>
-    </p:spTree>
-    <p:extLst>
-      <p:ext uri="{BB962C8B-B14F-4D97-AF65-F5344CB8AC3E}">
-        <p14:creationId xmlns:p14="http://schemas.microsoft.com/office/powerpoint/2010/main" val="126600485"/>
-      </p:ext>
-    </p:extLst>
-  </p:cSld>
-  <p:clrMapOvr>
-    <a:masterClrMapping/>
-  </p:clrMapOvr>
-</p:sld>
-</file>
-
-<file path=ppt/slides/slide27.xml><?xml version="1.0" encoding="utf-8"?>
-<p:sld xmlns:a="http://schemas.openxmlformats.org/drawingml/2006/main" xmlns:r="http://schemas.openxmlformats.org/officeDocument/2006/relationships" xmlns:p="http://schemas.openxmlformats.org/presentationml/2006/main">
-  <p:cSld>
-    <p:spTree>
-      <p:nvGrpSpPr>
-        <p:cNvPr id="1" name=""/>
-        <p:cNvGrpSpPr/>
-        <p:nvPr/>
-      </p:nvGrpSpPr>
-      <p:grpSpPr>
-        <a:xfrm>
-          <a:off x="0" y="0"/>
-          <a:ext cx="0" cy="0"/>
-          <a:chOff x="0" y="0"/>
-          <a:chExt cx="0" cy="0"/>
-        </a:xfrm>
-      </p:grpSpPr>
       <mc:AlternateContent xmlns:mc="http://schemas.openxmlformats.org/markup-compatibility/2006" xmlns:p14="http://schemas.microsoft.com/office/powerpoint/2010/main">
         <mc:Choice Requires="p14">
           <p:contentPart p14:bwMode="auto" r:id="rId2">
@@ -5021,7 +4515,307 @@
 </p:sld>
 </file>
 
-<file path=ppt/slides/slide28.xml><?xml version="1.0" encoding="utf-8"?>
+<file path=ppt/slides/slide2.xml><?xml version="1.0" encoding="utf-8"?>
+<p:sld xmlns:a="http://schemas.openxmlformats.org/drawingml/2006/main" xmlns:r="http://schemas.openxmlformats.org/officeDocument/2006/relationships" xmlns:p="http://schemas.openxmlformats.org/presentationml/2006/main">
+  <p:cSld>
+    <p:spTree>
+      <p:nvGrpSpPr>
+        <p:cNvPr id="1" name=""/>
+        <p:cNvGrpSpPr/>
+        <p:nvPr/>
+      </p:nvGrpSpPr>
+      <p:grpSpPr>
+        <a:xfrm>
+          <a:off x="0" y="0"/>
+          <a:ext cx="0" cy="0"/>
+          <a:chOff x="0" y="0"/>
+          <a:chExt cx="0" cy="0"/>
+        </a:xfrm>
+      </p:grpSpPr>
+      <p:pic>
+        <p:nvPicPr>
+          <p:cNvPr id="3" name="그림 2">
+            <a:extLst>
+              <a:ext uri="{FF2B5EF4-FFF2-40B4-BE49-F238E27FC236}">
+                <a16:creationId xmlns:a16="http://schemas.microsoft.com/office/drawing/2014/main" id="{3E5BE6C2-6C77-5673-5AE8-EE21A4D962A7}"/>
+              </a:ext>
+            </a:extLst>
+          </p:cNvPr>
+          <p:cNvPicPr>
+            <a:picLocks noChangeAspect="1"/>
+          </p:cNvPicPr>
+          <p:nvPr/>
+        </p:nvPicPr>
+        <p:blipFill>
+          <a:blip r:embed="rId2"/>
+          <a:stretch>
+            <a:fillRect/>
+          </a:stretch>
+        </p:blipFill>
+        <p:spPr>
+          <a:xfrm>
+            <a:off x="2943225" y="828675"/>
+            <a:ext cx="6305550" cy="5200650"/>
+          </a:xfrm>
+          <a:prstGeom prst="rect">
+            <a:avLst/>
+          </a:prstGeom>
+        </p:spPr>
+      </p:pic>
+    </p:spTree>
+    <p:extLst>
+      <p:ext uri="{BB962C8B-B14F-4D97-AF65-F5344CB8AC3E}">
+        <p14:creationId xmlns:p14="http://schemas.microsoft.com/office/powerpoint/2010/main" val="33066365"/>
+      </p:ext>
+    </p:extLst>
+  </p:cSld>
+  <p:clrMapOvr>
+    <a:masterClrMapping/>
+  </p:clrMapOvr>
+</p:sld>
+</file>
+
+<file path=ppt/slides/slide20.xml><?xml version="1.0" encoding="utf-8"?>
+<p:sld xmlns:a="http://schemas.openxmlformats.org/drawingml/2006/main" xmlns:r="http://schemas.openxmlformats.org/officeDocument/2006/relationships" xmlns:p="http://schemas.openxmlformats.org/presentationml/2006/main">
+  <p:cSld>
+    <p:spTree>
+      <p:nvGrpSpPr>
+        <p:cNvPr id="1" name=""/>
+        <p:cNvGrpSpPr/>
+        <p:nvPr/>
+      </p:nvGrpSpPr>
+      <p:grpSpPr>
+        <a:xfrm>
+          <a:off x="0" y="0"/>
+          <a:ext cx="0" cy="0"/>
+          <a:chOff x="0" y="0"/>
+          <a:chExt cx="0" cy="0"/>
+        </a:xfrm>
+      </p:grpSpPr>
+      <p:pic>
+        <p:nvPicPr>
+          <p:cNvPr id="3" name="그림 2">
+            <a:extLst>
+              <a:ext uri="{FF2B5EF4-FFF2-40B4-BE49-F238E27FC236}">
+                <a16:creationId xmlns:a16="http://schemas.microsoft.com/office/drawing/2014/main" id="{90A57725-B9FC-0B8C-BAA2-D6F7D2981612}"/>
+              </a:ext>
+            </a:extLst>
+          </p:cNvPr>
+          <p:cNvPicPr>
+            <a:picLocks noChangeAspect="1"/>
+          </p:cNvPicPr>
+          <p:nvPr/>
+        </p:nvPicPr>
+        <p:blipFill>
+          <a:blip r:embed="rId2"/>
+          <a:stretch>
+            <a:fillRect/>
+          </a:stretch>
+        </p:blipFill>
+        <p:spPr>
+          <a:xfrm>
+            <a:off x="2862262" y="1476375"/>
+            <a:ext cx="6467475" cy="3905250"/>
+          </a:xfrm>
+          <a:prstGeom prst="rect">
+            <a:avLst/>
+          </a:prstGeom>
+        </p:spPr>
+      </p:pic>
+    </p:spTree>
+    <p:extLst>
+      <p:ext uri="{BB962C8B-B14F-4D97-AF65-F5344CB8AC3E}">
+        <p14:creationId xmlns:p14="http://schemas.microsoft.com/office/powerpoint/2010/main" val="2178760692"/>
+      </p:ext>
+    </p:extLst>
+  </p:cSld>
+  <p:clrMapOvr>
+    <a:masterClrMapping/>
+  </p:clrMapOvr>
+</p:sld>
+</file>
+
+<file path=ppt/slides/slide21.xml><?xml version="1.0" encoding="utf-8"?>
+<p:sld xmlns:a="http://schemas.openxmlformats.org/drawingml/2006/main" xmlns:r="http://schemas.openxmlformats.org/officeDocument/2006/relationships" xmlns:p="http://schemas.openxmlformats.org/presentationml/2006/main">
+  <p:cSld>
+    <p:spTree>
+      <p:nvGrpSpPr>
+        <p:cNvPr id="1" name=""/>
+        <p:cNvGrpSpPr/>
+        <p:nvPr/>
+      </p:nvGrpSpPr>
+      <p:grpSpPr>
+        <a:xfrm>
+          <a:off x="0" y="0"/>
+          <a:ext cx="0" cy="0"/>
+          <a:chOff x="0" y="0"/>
+          <a:chExt cx="0" cy="0"/>
+        </a:xfrm>
+      </p:grpSpPr>
+      <p:pic>
+        <p:nvPicPr>
+          <p:cNvPr id="3" name="그림 2">
+            <a:extLst>
+              <a:ext uri="{FF2B5EF4-FFF2-40B4-BE49-F238E27FC236}">
+                <a16:creationId xmlns:a16="http://schemas.microsoft.com/office/drawing/2014/main" id="{272C8BE5-A674-FC7C-93B9-612D29933A35}"/>
+              </a:ext>
+            </a:extLst>
+          </p:cNvPr>
+          <p:cNvPicPr>
+            <a:picLocks noChangeAspect="1"/>
+          </p:cNvPicPr>
+          <p:nvPr/>
+        </p:nvPicPr>
+        <p:blipFill>
+          <a:blip r:embed="rId2"/>
+          <a:stretch>
+            <a:fillRect/>
+          </a:stretch>
+        </p:blipFill>
+        <p:spPr>
+          <a:xfrm>
+            <a:off x="532720" y="1062037"/>
+            <a:ext cx="5248275" cy="4733925"/>
+          </a:xfrm>
+          <a:prstGeom prst="rect">
+            <a:avLst/>
+          </a:prstGeom>
+        </p:spPr>
+      </p:pic>
+      <p:pic>
+        <p:nvPicPr>
+          <p:cNvPr id="5" name="그림 4">
+            <a:extLst>
+              <a:ext uri="{FF2B5EF4-FFF2-40B4-BE49-F238E27FC236}">
+                <a16:creationId xmlns:a16="http://schemas.microsoft.com/office/drawing/2014/main" id="{2981A104-E2C3-837B-A02F-9D6EC376BD4C}"/>
+              </a:ext>
+            </a:extLst>
+          </p:cNvPr>
+          <p:cNvPicPr>
+            <a:picLocks noChangeAspect="1"/>
+          </p:cNvPicPr>
+          <p:nvPr/>
+        </p:nvPicPr>
+        <p:blipFill>
+          <a:blip r:embed="rId3"/>
+          <a:stretch>
+            <a:fillRect/>
+          </a:stretch>
+        </p:blipFill>
+        <p:spPr>
+          <a:xfrm>
+            <a:off x="6096000" y="1062037"/>
+            <a:ext cx="5153025" cy="4057650"/>
+          </a:xfrm>
+          <a:prstGeom prst="rect">
+            <a:avLst/>
+          </a:prstGeom>
+        </p:spPr>
+      </p:pic>
+    </p:spTree>
+    <p:extLst>
+      <p:ext uri="{BB962C8B-B14F-4D97-AF65-F5344CB8AC3E}">
+        <p14:creationId xmlns:p14="http://schemas.microsoft.com/office/powerpoint/2010/main" val="3494483411"/>
+      </p:ext>
+    </p:extLst>
+  </p:cSld>
+  <p:clrMapOvr>
+    <a:masterClrMapping/>
+  </p:clrMapOvr>
+</p:sld>
+</file>
+
+<file path=ppt/slides/slide22.xml><?xml version="1.0" encoding="utf-8"?>
+<p:sld xmlns:a="http://schemas.openxmlformats.org/drawingml/2006/main" xmlns:r="http://schemas.openxmlformats.org/officeDocument/2006/relationships" xmlns:p="http://schemas.openxmlformats.org/presentationml/2006/main">
+  <p:cSld>
+    <p:spTree>
+      <p:nvGrpSpPr>
+        <p:cNvPr id="1" name=""/>
+        <p:cNvGrpSpPr/>
+        <p:nvPr/>
+      </p:nvGrpSpPr>
+      <p:grpSpPr>
+        <a:xfrm>
+          <a:off x="0" y="0"/>
+          <a:ext cx="0" cy="0"/>
+          <a:chOff x="0" y="0"/>
+          <a:chExt cx="0" cy="0"/>
+        </a:xfrm>
+      </p:grpSpPr>
+      <p:pic>
+        <p:nvPicPr>
+          <p:cNvPr id="3" name="그림 2">
+            <a:extLst>
+              <a:ext uri="{FF2B5EF4-FFF2-40B4-BE49-F238E27FC236}">
+                <a16:creationId xmlns:a16="http://schemas.microsoft.com/office/drawing/2014/main" id="{F5582293-D0C6-89B3-A2A5-7F64528B3B2A}"/>
+              </a:ext>
+            </a:extLst>
+          </p:cNvPr>
+          <p:cNvPicPr>
+            <a:picLocks noChangeAspect="1"/>
+          </p:cNvPicPr>
+          <p:nvPr/>
+        </p:nvPicPr>
+        <p:blipFill>
+          <a:blip r:embed="rId2"/>
+          <a:stretch>
+            <a:fillRect/>
+          </a:stretch>
+        </p:blipFill>
+        <p:spPr>
+          <a:xfrm>
+            <a:off x="212272" y="873579"/>
+            <a:ext cx="5295900" cy="4686300"/>
+          </a:xfrm>
+          <a:prstGeom prst="rect">
+            <a:avLst/>
+          </a:prstGeom>
+        </p:spPr>
+      </p:pic>
+      <p:pic>
+        <p:nvPicPr>
+          <p:cNvPr id="5" name="그림 4">
+            <a:extLst>
+              <a:ext uri="{FF2B5EF4-FFF2-40B4-BE49-F238E27FC236}">
+                <a16:creationId xmlns:a16="http://schemas.microsoft.com/office/drawing/2014/main" id="{078ACE2F-1487-6BD4-6192-3D6E025CC04C}"/>
+              </a:ext>
+            </a:extLst>
+          </p:cNvPr>
+          <p:cNvPicPr>
+            <a:picLocks noChangeAspect="1"/>
+          </p:cNvPicPr>
+          <p:nvPr/>
+        </p:nvPicPr>
+        <p:blipFill>
+          <a:blip r:embed="rId3"/>
+          <a:stretch>
+            <a:fillRect/>
+          </a:stretch>
+        </p:blipFill>
+        <p:spPr>
+          <a:xfrm>
+            <a:off x="5508172" y="873579"/>
+            <a:ext cx="5905500" cy="4610100"/>
+          </a:xfrm>
+          <a:prstGeom prst="rect">
+            <a:avLst/>
+          </a:prstGeom>
+        </p:spPr>
+      </p:pic>
+    </p:spTree>
+    <p:extLst>
+      <p:ext uri="{BB962C8B-B14F-4D97-AF65-F5344CB8AC3E}">
+        <p14:creationId xmlns:p14="http://schemas.microsoft.com/office/powerpoint/2010/main" val="1143562275"/>
+      </p:ext>
+    </p:extLst>
+  </p:cSld>
+  <p:clrMapOvr>
+    <a:masterClrMapping/>
+  </p:clrMapOvr>
+</p:sld>
+</file>
+
+<file path=ppt/slides/slide23.xml><?xml version="1.0" encoding="utf-8"?>
 <p:sld xmlns:a="http://schemas.openxmlformats.org/drawingml/2006/main" xmlns:r="http://schemas.openxmlformats.org/officeDocument/2006/relationships" xmlns:p="http://schemas.openxmlformats.org/presentationml/2006/main">
   <p:cSld>
     <p:spTree>
@@ -5041,7 +4835,277 @@
     </p:spTree>
     <p:extLst>
       <p:ext uri="{BB962C8B-B14F-4D97-AF65-F5344CB8AC3E}">
-        <p14:creationId xmlns:p14="http://schemas.microsoft.com/office/powerpoint/2010/main" val="1603570604"/>
+        <p14:creationId xmlns:p14="http://schemas.microsoft.com/office/powerpoint/2010/main" val="605378593"/>
+      </p:ext>
+    </p:extLst>
+  </p:cSld>
+  <p:clrMapOvr>
+    <a:masterClrMapping/>
+  </p:clrMapOvr>
+</p:sld>
+</file>
+
+<file path=ppt/slides/slide24.xml><?xml version="1.0" encoding="utf-8"?>
+<p:sld xmlns:a="http://schemas.openxmlformats.org/drawingml/2006/main" xmlns:r="http://schemas.openxmlformats.org/officeDocument/2006/relationships" xmlns:p="http://schemas.openxmlformats.org/presentationml/2006/main">
+  <p:cSld>
+    <p:spTree>
+      <p:nvGrpSpPr>
+        <p:cNvPr id="1" name=""/>
+        <p:cNvGrpSpPr/>
+        <p:nvPr/>
+      </p:nvGrpSpPr>
+      <p:grpSpPr>
+        <a:xfrm>
+          <a:off x="0" y="0"/>
+          <a:ext cx="0" cy="0"/>
+          <a:chOff x="0" y="0"/>
+          <a:chExt cx="0" cy="0"/>
+        </a:xfrm>
+      </p:grpSpPr>
+    </p:spTree>
+    <p:extLst>
+      <p:ext uri="{BB962C8B-B14F-4D97-AF65-F5344CB8AC3E}">
+        <p14:creationId xmlns:p14="http://schemas.microsoft.com/office/powerpoint/2010/main" val="689541781"/>
+      </p:ext>
+    </p:extLst>
+  </p:cSld>
+  <p:clrMapOvr>
+    <a:masterClrMapping/>
+  </p:clrMapOvr>
+</p:sld>
+</file>
+
+<file path=ppt/slides/slide25.xml><?xml version="1.0" encoding="utf-8"?>
+<p:sld xmlns:a="http://schemas.openxmlformats.org/drawingml/2006/main" xmlns:r="http://schemas.openxmlformats.org/officeDocument/2006/relationships" xmlns:p="http://schemas.openxmlformats.org/presentationml/2006/main">
+  <p:cSld>
+    <p:spTree>
+      <p:nvGrpSpPr>
+        <p:cNvPr id="1" name=""/>
+        <p:cNvGrpSpPr/>
+        <p:nvPr/>
+      </p:nvGrpSpPr>
+      <p:grpSpPr>
+        <a:xfrm>
+          <a:off x="0" y="0"/>
+          <a:ext cx="0" cy="0"/>
+          <a:chOff x="0" y="0"/>
+          <a:chExt cx="0" cy="0"/>
+        </a:xfrm>
+      </p:grpSpPr>
+      <p:pic>
+        <p:nvPicPr>
+          <p:cNvPr id="5" name="그림 4">
+            <a:extLst>
+              <a:ext uri="{FF2B5EF4-FFF2-40B4-BE49-F238E27FC236}">
+                <a16:creationId xmlns:a16="http://schemas.microsoft.com/office/drawing/2014/main" id="{8091A294-A7FA-C11A-3AA7-E84F9D541FB7}"/>
+              </a:ext>
+            </a:extLst>
+          </p:cNvPr>
+          <p:cNvPicPr>
+            <a:picLocks noChangeAspect="1"/>
+          </p:cNvPicPr>
+          <p:nvPr/>
+        </p:nvPicPr>
+        <p:blipFill>
+          <a:blip r:embed="rId2"/>
+          <a:stretch>
+            <a:fillRect/>
+          </a:stretch>
+        </p:blipFill>
+        <p:spPr>
+          <a:xfrm>
+            <a:off x="2362200" y="1123950"/>
+            <a:ext cx="7467600" cy="4610100"/>
+          </a:xfrm>
+          <a:prstGeom prst="rect">
+            <a:avLst/>
+          </a:prstGeom>
+        </p:spPr>
+      </p:pic>
+    </p:spTree>
+    <p:extLst>
+      <p:ext uri="{BB962C8B-B14F-4D97-AF65-F5344CB8AC3E}">
+        <p14:creationId xmlns:p14="http://schemas.microsoft.com/office/powerpoint/2010/main" val="431007319"/>
+      </p:ext>
+    </p:extLst>
+  </p:cSld>
+  <p:clrMapOvr>
+    <a:masterClrMapping/>
+  </p:clrMapOvr>
+</p:sld>
+</file>
+
+<file path=ppt/slides/slide26.xml><?xml version="1.0" encoding="utf-8"?>
+<p:sld xmlns:a="http://schemas.openxmlformats.org/drawingml/2006/main" xmlns:r="http://schemas.openxmlformats.org/officeDocument/2006/relationships" xmlns:p="http://schemas.openxmlformats.org/presentationml/2006/main">
+  <p:cSld>
+    <p:spTree>
+      <p:nvGrpSpPr>
+        <p:cNvPr id="1" name=""/>
+        <p:cNvGrpSpPr/>
+        <p:nvPr/>
+      </p:nvGrpSpPr>
+      <p:grpSpPr>
+        <a:xfrm>
+          <a:off x="0" y="0"/>
+          <a:ext cx="0" cy="0"/>
+          <a:chOff x="0" y="0"/>
+          <a:chExt cx="0" cy="0"/>
+        </a:xfrm>
+      </p:grpSpPr>
+      <p:pic>
+        <p:nvPicPr>
+          <p:cNvPr id="3" name="그림 2">
+            <a:extLst>
+              <a:ext uri="{FF2B5EF4-FFF2-40B4-BE49-F238E27FC236}">
+                <a16:creationId xmlns:a16="http://schemas.microsoft.com/office/drawing/2014/main" id="{722B99A1-04D2-7ADF-98FE-CF7216AB4E2E}"/>
+              </a:ext>
+            </a:extLst>
+          </p:cNvPr>
+          <p:cNvPicPr>
+            <a:picLocks noChangeAspect="1"/>
+          </p:cNvPicPr>
+          <p:nvPr/>
+        </p:nvPicPr>
+        <p:blipFill>
+          <a:blip r:embed="rId2"/>
+          <a:stretch>
+            <a:fillRect/>
+          </a:stretch>
+        </p:blipFill>
+        <p:spPr>
+          <a:xfrm>
+            <a:off x="2595562" y="990600"/>
+            <a:ext cx="7000875" cy="4876800"/>
+          </a:xfrm>
+          <a:prstGeom prst="rect">
+            <a:avLst/>
+          </a:prstGeom>
+        </p:spPr>
+      </p:pic>
+    </p:spTree>
+    <p:extLst>
+      <p:ext uri="{BB962C8B-B14F-4D97-AF65-F5344CB8AC3E}">
+        <p14:creationId xmlns:p14="http://schemas.microsoft.com/office/powerpoint/2010/main" val="2555125669"/>
+      </p:ext>
+    </p:extLst>
+  </p:cSld>
+  <p:clrMapOvr>
+    <a:masterClrMapping/>
+  </p:clrMapOvr>
+</p:sld>
+</file>
+
+<file path=ppt/slides/slide27.xml><?xml version="1.0" encoding="utf-8"?>
+<p:sld xmlns:a="http://schemas.openxmlformats.org/drawingml/2006/main" xmlns:r="http://schemas.openxmlformats.org/officeDocument/2006/relationships" xmlns:p="http://schemas.openxmlformats.org/presentationml/2006/main">
+  <p:cSld>
+    <p:spTree>
+      <p:nvGrpSpPr>
+        <p:cNvPr id="1" name=""/>
+        <p:cNvGrpSpPr/>
+        <p:nvPr/>
+      </p:nvGrpSpPr>
+      <p:grpSpPr>
+        <a:xfrm>
+          <a:off x="0" y="0"/>
+          <a:ext cx="0" cy="0"/>
+          <a:chOff x="0" y="0"/>
+          <a:chExt cx="0" cy="0"/>
+        </a:xfrm>
+      </p:grpSpPr>
+      <p:pic>
+        <p:nvPicPr>
+          <p:cNvPr id="3" name="그림 2">
+            <a:extLst>
+              <a:ext uri="{FF2B5EF4-FFF2-40B4-BE49-F238E27FC236}">
+                <a16:creationId xmlns:a16="http://schemas.microsoft.com/office/drawing/2014/main" id="{DB2752E3-431D-74D0-9B3B-5B6928688B21}"/>
+              </a:ext>
+            </a:extLst>
+          </p:cNvPr>
+          <p:cNvPicPr>
+            <a:picLocks noChangeAspect="1"/>
+          </p:cNvPicPr>
+          <p:nvPr/>
+        </p:nvPicPr>
+        <p:blipFill>
+          <a:blip r:embed="rId2"/>
+          <a:stretch>
+            <a:fillRect/>
+          </a:stretch>
+        </p:blipFill>
+        <p:spPr>
+          <a:xfrm>
+            <a:off x="2786062" y="828675"/>
+            <a:ext cx="6619875" cy="5200650"/>
+          </a:xfrm>
+          <a:prstGeom prst="rect">
+            <a:avLst/>
+          </a:prstGeom>
+        </p:spPr>
+      </p:pic>
+    </p:spTree>
+    <p:extLst>
+      <p:ext uri="{BB962C8B-B14F-4D97-AF65-F5344CB8AC3E}">
+        <p14:creationId xmlns:p14="http://schemas.microsoft.com/office/powerpoint/2010/main" val="362157702"/>
+      </p:ext>
+    </p:extLst>
+  </p:cSld>
+  <p:clrMapOvr>
+    <a:masterClrMapping/>
+  </p:clrMapOvr>
+</p:sld>
+</file>
+
+<file path=ppt/slides/slide28.xml><?xml version="1.0" encoding="utf-8"?>
+<p:sld xmlns:a="http://schemas.openxmlformats.org/drawingml/2006/main" xmlns:r="http://schemas.openxmlformats.org/officeDocument/2006/relationships" xmlns:p="http://schemas.openxmlformats.org/presentationml/2006/main">
+  <p:cSld>
+    <p:spTree>
+      <p:nvGrpSpPr>
+        <p:cNvPr id="1" name=""/>
+        <p:cNvGrpSpPr/>
+        <p:nvPr/>
+      </p:nvGrpSpPr>
+      <p:grpSpPr>
+        <a:xfrm>
+          <a:off x="0" y="0"/>
+          <a:ext cx="0" cy="0"/>
+          <a:chOff x="0" y="0"/>
+          <a:chExt cx="0" cy="0"/>
+        </a:xfrm>
+      </p:grpSpPr>
+      <p:pic>
+        <p:nvPicPr>
+          <p:cNvPr id="3" name="그림 2">
+            <a:extLst>
+              <a:ext uri="{FF2B5EF4-FFF2-40B4-BE49-F238E27FC236}">
+                <a16:creationId xmlns:a16="http://schemas.microsoft.com/office/drawing/2014/main" id="{63F07927-45B8-4E70-9B39-5562BE7FB8A8}"/>
+              </a:ext>
+            </a:extLst>
+          </p:cNvPr>
+          <p:cNvPicPr>
+            <a:picLocks noChangeAspect="1"/>
+          </p:cNvPicPr>
+          <p:nvPr/>
+        </p:nvPicPr>
+        <p:blipFill>
+          <a:blip r:embed="rId2"/>
+          <a:stretch>
+            <a:fillRect/>
+          </a:stretch>
+        </p:blipFill>
+        <p:spPr>
+          <a:xfrm>
+            <a:off x="3133725" y="1090612"/>
+            <a:ext cx="5924550" cy="4676775"/>
+          </a:xfrm>
+          <a:prstGeom prst="rect">
+            <a:avLst/>
+          </a:prstGeom>
+        </p:spPr>
+      </p:pic>
+    </p:spTree>
+    <p:extLst>
+      <p:ext uri="{BB962C8B-B14F-4D97-AF65-F5344CB8AC3E}">
+        <p14:creationId xmlns:p14="http://schemas.microsoft.com/office/powerpoint/2010/main" val="171160837"/>
       </p:ext>
     </p:extLst>
   </p:cSld>
@@ -5068,490 +5132,40 @@
           <a:chExt cx="0" cy="0"/>
         </a:xfrm>
       </p:grpSpPr>
-      <p:grpSp>
-        <p:nvGrpSpPr>
-          <p:cNvPr id="13" name="그룹 12">
-            <a:extLst>
-              <a:ext uri="{FF2B5EF4-FFF2-40B4-BE49-F238E27FC236}">
-                <a16:creationId xmlns:a16="http://schemas.microsoft.com/office/drawing/2014/main" id="{0AE9BBBB-8385-F969-BF13-BF84B7042698}"/>
-              </a:ext>
-            </a:extLst>
-          </p:cNvPr>
-          <p:cNvGrpSpPr/>
+      <p:pic>
+        <p:nvPicPr>
+          <p:cNvPr id="3" name="그림 2">
+            <a:extLst>
+              <a:ext uri="{FF2B5EF4-FFF2-40B4-BE49-F238E27FC236}">
+                <a16:creationId xmlns:a16="http://schemas.microsoft.com/office/drawing/2014/main" id="{E76B9057-EEC8-0B57-BA02-37BF17E3D690}"/>
+              </a:ext>
+            </a:extLst>
+          </p:cNvPr>
+          <p:cNvPicPr>
+            <a:picLocks noChangeAspect="1"/>
+          </p:cNvPicPr>
           <p:nvPr/>
-        </p:nvGrpSpPr>
-        <p:grpSpPr>
+        </p:nvPicPr>
+        <p:blipFill>
+          <a:blip r:embed="rId2"/>
+          <a:stretch>
+            <a:fillRect/>
+          </a:stretch>
+        </p:blipFill>
+        <p:spPr>
           <a:xfrm>
-            <a:off x="1291937" y="1108851"/>
-            <a:ext cx="9290160" cy="2640240"/>
-            <a:chOff x="1291937" y="1108851"/>
-            <a:chExt cx="9290160" cy="2640240"/>
+            <a:off x="2543175" y="990600"/>
+            <a:ext cx="7105650" cy="4876800"/>
           </a:xfrm>
-        </p:grpSpPr>
-        <mc:AlternateContent xmlns:mc="http://schemas.openxmlformats.org/markup-compatibility/2006">
-          <mc:Choice xmlns:p14="http://schemas.microsoft.com/office/powerpoint/2010/main" Requires="p14">
-            <p:contentPart p14:bwMode="auto" r:id="rId2">
-              <p14:nvContentPartPr>
-                <p14:cNvPr id="3" name="잉크 2">
-                  <a:extLst>
-                    <a:ext uri="{FF2B5EF4-FFF2-40B4-BE49-F238E27FC236}">
-                      <a16:creationId xmlns:a16="http://schemas.microsoft.com/office/drawing/2014/main" id="{8736A125-3799-F82F-A2D5-3D894FFA6F0B}"/>
-                    </a:ext>
-                  </a:extLst>
-                </p14:cNvPr>
-                <p14:cNvContentPartPr/>
-                <p14:nvPr/>
-              </p14:nvContentPartPr>
-              <p14:xfrm>
-                <a:off x="1291937" y="1108851"/>
-                <a:ext cx="2638800" cy="2640240"/>
-              </p14:xfrm>
-            </p:contentPart>
-          </mc:Choice>
-          <mc:Fallback>
-            <p:pic>
-              <p:nvPicPr>
-                <p:cNvPr id="3" name="잉크 2">
-                  <a:extLst>
-                    <a:ext uri="{FF2B5EF4-FFF2-40B4-BE49-F238E27FC236}">
-                      <a16:creationId xmlns:a16="http://schemas.microsoft.com/office/drawing/2014/main" id="{8736A125-3799-F82F-A2D5-3D894FFA6F0B}"/>
-                    </a:ext>
-                  </a:extLst>
-                </p:cNvPr>
-                <p:cNvPicPr/>
-                <p:nvPr/>
-              </p:nvPicPr>
-              <p:blipFill>
-                <a:blip r:embed="rId3"/>
-                <a:stretch>
-                  <a:fillRect/>
-                </a:stretch>
-              </p:blipFill>
-              <p:spPr>
-                <a:xfrm>
-                  <a:off x="1285817" y="1102731"/>
-                  <a:ext cx="2651040" cy="2652480"/>
-                </a:xfrm>
-                <a:prstGeom prst="rect">
-                  <a:avLst/>
-                </a:prstGeom>
-              </p:spPr>
-            </p:pic>
-          </mc:Fallback>
-        </mc:AlternateContent>
-        <mc:AlternateContent xmlns:mc="http://schemas.openxmlformats.org/markup-compatibility/2006">
-          <mc:Choice xmlns:p14="http://schemas.microsoft.com/office/powerpoint/2010/main" Requires="p14">
-            <p:contentPart p14:bwMode="auto" r:id="rId4">
-              <p14:nvContentPartPr>
-                <p14:cNvPr id="4" name="잉크 3">
-                  <a:extLst>
-                    <a:ext uri="{FF2B5EF4-FFF2-40B4-BE49-F238E27FC236}">
-                      <a16:creationId xmlns:a16="http://schemas.microsoft.com/office/drawing/2014/main" id="{DC953EFE-B106-15FF-70A0-24FDFEF4F1F6}"/>
-                    </a:ext>
-                  </a:extLst>
-                </p14:cNvPr>
-                <p14:cNvContentPartPr/>
-                <p14:nvPr/>
-              </p14:nvContentPartPr>
-              <p14:xfrm>
-                <a:off x="5600057" y="1724451"/>
-                <a:ext cx="906840" cy="1157400"/>
-              </p14:xfrm>
-            </p:contentPart>
-          </mc:Choice>
-          <mc:Fallback>
-            <p:pic>
-              <p:nvPicPr>
-                <p:cNvPr id="4" name="잉크 3">
-                  <a:extLst>
-                    <a:ext uri="{FF2B5EF4-FFF2-40B4-BE49-F238E27FC236}">
-                      <a16:creationId xmlns:a16="http://schemas.microsoft.com/office/drawing/2014/main" id="{DC953EFE-B106-15FF-70A0-24FDFEF4F1F6}"/>
-                    </a:ext>
-                  </a:extLst>
-                </p:cNvPr>
-                <p:cNvPicPr/>
-                <p:nvPr/>
-              </p:nvPicPr>
-              <p:blipFill>
-                <a:blip r:embed="rId5"/>
-                <a:stretch>
-                  <a:fillRect/>
-                </a:stretch>
-              </p:blipFill>
-              <p:spPr>
-                <a:xfrm>
-                  <a:off x="5593937" y="1718331"/>
-                  <a:ext cx="919080" cy="1169640"/>
-                </a:xfrm>
-                <a:prstGeom prst="rect">
-                  <a:avLst/>
-                </a:prstGeom>
-              </p:spPr>
-            </p:pic>
-          </mc:Fallback>
-        </mc:AlternateContent>
-        <mc:AlternateContent xmlns:mc="http://schemas.openxmlformats.org/markup-compatibility/2006">
-          <mc:Choice xmlns:p14="http://schemas.microsoft.com/office/powerpoint/2010/main" Requires="p14">
-            <p:contentPart p14:bwMode="auto" r:id="rId6">
-              <p14:nvContentPartPr>
-                <p14:cNvPr id="5" name="잉크 4">
-                  <a:extLst>
-                    <a:ext uri="{FF2B5EF4-FFF2-40B4-BE49-F238E27FC236}">
-                      <a16:creationId xmlns:a16="http://schemas.microsoft.com/office/drawing/2014/main" id="{745B7714-4277-1632-7C80-FFFF159E8F0A}"/>
-                    </a:ext>
-                  </a:extLst>
-                </p14:cNvPr>
-                <p14:cNvContentPartPr/>
-                <p14:nvPr/>
-              </p14:nvContentPartPr>
-              <p14:xfrm>
-                <a:off x="6171377" y="2335731"/>
-                <a:ext cx="757440" cy="162000"/>
-              </p14:xfrm>
-            </p:contentPart>
-          </mc:Choice>
-          <mc:Fallback>
-            <p:pic>
-              <p:nvPicPr>
-                <p:cNvPr id="5" name="잉크 4">
-                  <a:extLst>
-                    <a:ext uri="{FF2B5EF4-FFF2-40B4-BE49-F238E27FC236}">
-                      <a16:creationId xmlns:a16="http://schemas.microsoft.com/office/drawing/2014/main" id="{745B7714-4277-1632-7C80-FFFF159E8F0A}"/>
-                    </a:ext>
-                  </a:extLst>
-                </p:cNvPr>
-                <p:cNvPicPr/>
-                <p:nvPr/>
-              </p:nvPicPr>
-              <p:blipFill>
-                <a:blip r:embed="rId7"/>
-                <a:stretch>
-                  <a:fillRect/>
-                </a:stretch>
-              </p:blipFill>
-              <p:spPr>
-                <a:xfrm>
-                  <a:off x="6165257" y="2329611"/>
-                  <a:ext cx="769680" cy="174240"/>
-                </a:xfrm>
-                <a:prstGeom prst="rect">
-                  <a:avLst/>
-                </a:prstGeom>
-              </p:spPr>
-            </p:pic>
-          </mc:Fallback>
-        </mc:AlternateContent>
-        <mc:AlternateContent xmlns:mc="http://schemas.openxmlformats.org/markup-compatibility/2006">
-          <mc:Choice xmlns:p14="http://schemas.microsoft.com/office/powerpoint/2010/main" Requires="p14">
-            <p:contentPart p14:bwMode="auto" r:id="rId8">
-              <p14:nvContentPartPr>
-                <p14:cNvPr id="6" name="잉크 5">
-                  <a:extLst>
-                    <a:ext uri="{FF2B5EF4-FFF2-40B4-BE49-F238E27FC236}">
-                      <a16:creationId xmlns:a16="http://schemas.microsoft.com/office/drawing/2014/main" id="{C7D12407-7BC0-27F6-AA6D-247463BF24F8}"/>
-                    </a:ext>
-                  </a:extLst>
-                </p14:cNvPr>
-                <p14:cNvContentPartPr/>
-                <p14:nvPr/>
-              </p14:nvContentPartPr>
-              <p14:xfrm>
-                <a:off x="5894177" y="3116211"/>
-                <a:ext cx="1332720" cy="529560"/>
-              </p14:xfrm>
-            </p:contentPart>
-          </mc:Choice>
-          <mc:Fallback>
-            <p:pic>
-              <p:nvPicPr>
-                <p:cNvPr id="6" name="잉크 5">
-                  <a:extLst>
-                    <a:ext uri="{FF2B5EF4-FFF2-40B4-BE49-F238E27FC236}">
-                      <a16:creationId xmlns:a16="http://schemas.microsoft.com/office/drawing/2014/main" id="{C7D12407-7BC0-27F6-AA6D-247463BF24F8}"/>
-                    </a:ext>
-                  </a:extLst>
-                </p:cNvPr>
-                <p:cNvPicPr/>
-                <p:nvPr/>
-              </p:nvPicPr>
-              <p:blipFill>
-                <a:blip r:embed="rId9"/>
-                <a:stretch>
-                  <a:fillRect/>
-                </a:stretch>
-              </p:blipFill>
-              <p:spPr>
-                <a:xfrm>
-                  <a:off x="5888057" y="3110091"/>
-                  <a:ext cx="1344960" cy="541800"/>
-                </a:xfrm>
-                <a:prstGeom prst="rect">
-                  <a:avLst/>
-                </a:prstGeom>
-              </p:spPr>
-            </p:pic>
-          </mc:Fallback>
-        </mc:AlternateContent>
-        <mc:AlternateContent xmlns:mc="http://schemas.openxmlformats.org/markup-compatibility/2006">
-          <mc:Choice xmlns:p14="http://schemas.microsoft.com/office/powerpoint/2010/main" Requires="p14">
-            <p:contentPart p14:bwMode="auto" r:id="rId10">
-              <p14:nvContentPartPr>
-                <p14:cNvPr id="7" name="잉크 6">
-                  <a:extLst>
-                    <a:ext uri="{FF2B5EF4-FFF2-40B4-BE49-F238E27FC236}">
-                      <a16:creationId xmlns:a16="http://schemas.microsoft.com/office/drawing/2014/main" id="{5FA6D897-A688-A225-CD0E-4248031150B3}"/>
-                    </a:ext>
-                  </a:extLst>
-                </p14:cNvPr>
-                <p14:cNvContentPartPr/>
-                <p14:nvPr/>
-              </p14:nvContentPartPr>
-              <p14:xfrm>
-                <a:off x="5829017" y="2875011"/>
-                <a:ext cx="1041840" cy="178200"/>
-              </p14:xfrm>
-            </p:contentPart>
-          </mc:Choice>
-          <mc:Fallback>
-            <p:pic>
-              <p:nvPicPr>
-                <p:cNvPr id="7" name="잉크 6">
-                  <a:extLst>
-                    <a:ext uri="{FF2B5EF4-FFF2-40B4-BE49-F238E27FC236}">
-                      <a16:creationId xmlns:a16="http://schemas.microsoft.com/office/drawing/2014/main" id="{5FA6D897-A688-A225-CD0E-4248031150B3}"/>
-                    </a:ext>
-                  </a:extLst>
-                </p:cNvPr>
-                <p:cNvPicPr/>
-                <p:nvPr/>
-              </p:nvPicPr>
-              <p:blipFill>
-                <a:blip r:embed="rId11"/>
-                <a:stretch>
-                  <a:fillRect/>
-                </a:stretch>
-              </p:blipFill>
-              <p:spPr>
-                <a:xfrm>
-                  <a:off x="5822897" y="2868891"/>
-                  <a:ext cx="1054080" cy="190440"/>
-                </a:xfrm>
-                <a:prstGeom prst="rect">
-                  <a:avLst/>
-                </a:prstGeom>
-              </p:spPr>
-            </p:pic>
-          </mc:Fallback>
-        </mc:AlternateContent>
-        <mc:AlternateContent xmlns:mc="http://schemas.openxmlformats.org/markup-compatibility/2006">
-          <mc:Choice xmlns:p14="http://schemas.microsoft.com/office/powerpoint/2010/main" Requires="p14">
-            <p:contentPart p14:bwMode="auto" r:id="rId12">
-              <p14:nvContentPartPr>
-                <p14:cNvPr id="8" name="잉크 7">
-                  <a:extLst>
-                    <a:ext uri="{FF2B5EF4-FFF2-40B4-BE49-F238E27FC236}">
-                      <a16:creationId xmlns:a16="http://schemas.microsoft.com/office/drawing/2014/main" id="{2199A884-5C5D-CB5B-7C24-9923C783A7AD}"/>
-                    </a:ext>
-                  </a:extLst>
-                </p14:cNvPr>
-                <p14:cNvContentPartPr/>
-                <p14:nvPr/>
-              </p14:nvContentPartPr>
-              <p14:xfrm>
-                <a:off x="7254977" y="2007051"/>
-                <a:ext cx="1618920" cy="1202400"/>
-              </p14:xfrm>
-            </p:contentPart>
-          </mc:Choice>
-          <mc:Fallback>
-            <p:pic>
-              <p:nvPicPr>
-                <p:cNvPr id="8" name="잉크 7">
-                  <a:extLst>
-                    <a:ext uri="{FF2B5EF4-FFF2-40B4-BE49-F238E27FC236}">
-                      <a16:creationId xmlns:a16="http://schemas.microsoft.com/office/drawing/2014/main" id="{2199A884-5C5D-CB5B-7C24-9923C783A7AD}"/>
-                    </a:ext>
-                  </a:extLst>
-                </p:cNvPr>
-                <p:cNvPicPr/>
-                <p:nvPr/>
-              </p:nvPicPr>
-              <p:blipFill>
-                <a:blip r:embed="rId13"/>
-                <a:stretch>
-                  <a:fillRect/>
-                </a:stretch>
-              </p:blipFill>
-              <p:spPr>
-                <a:xfrm>
-                  <a:off x="7248857" y="2000931"/>
-                  <a:ext cx="1631160" cy="1214640"/>
-                </a:xfrm>
-                <a:prstGeom prst="rect">
-                  <a:avLst/>
-                </a:prstGeom>
-              </p:spPr>
-            </p:pic>
-          </mc:Fallback>
-        </mc:AlternateContent>
-        <mc:AlternateContent xmlns:mc="http://schemas.openxmlformats.org/markup-compatibility/2006">
-          <mc:Choice xmlns:p14="http://schemas.microsoft.com/office/powerpoint/2010/main" Requires="p14">
-            <p:contentPart p14:bwMode="auto" r:id="rId14">
-              <p14:nvContentPartPr>
-                <p14:cNvPr id="9" name="잉크 8">
-                  <a:extLst>
-                    <a:ext uri="{FF2B5EF4-FFF2-40B4-BE49-F238E27FC236}">
-                      <a16:creationId xmlns:a16="http://schemas.microsoft.com/office/drawing/2014/main" id="{79DE26ED-DD48-4A79-BFCE-28101EB38771}"/>
-                    </a:ext>
-                  </a:extLst>
-                </p14:cNvPr>
-                <p14:cNvContentPartPr/>
-                <p14:nvPr/>
-              </p14:nvContentPartPr>
-              <p14:xfrm>
-                <a:off x="7412657" y="2049171"/>
-                <a:ext cx="407880" cy="89640"/>
-              </p14:xfrm>
-            </p:contentPart>
-          </mc:Choice>
-          <mc:Fallback>
-            <p:pic>
-              <p:nvPicPr>
-                <p:cNvPr id="9" name="잉크 8">
-                  <a:extLst>
-                    <a:ext uri="{FF2B5EF4-FFF2-40B4-BE49-F238E27FC236}">
-                      <a16:creationId xmlns:a16="http://schemas.microsoft.com/office/drawing/2014/main" id="{79DE26ED-DD48-4A79-BFCE-28101EB38771}"/>
-                    </a:ext>
-                  </a:extLst>
-                </p:cNvPr>
-                <p:cNvPicPr/>
-                <p:nvPr/>
-              </p:nvPicPr>
-              <p:blipFill>
-                <a:blip r:embed="rId15"/>
-                <a:stretch>
-                  <a:fillRect/>
-                </a:stretch>
-              </p:blipFill>
-              <p:spPr>
-                <a:xfrm>
-                  <a:off x="7406537" y="2043051"/>
-                  <a:ext cx="420120" cy="101880"/>
-                </a:xfrm>
-                <a:prstGeom prst="rect">
-                  <a:avLst/>
-                </a:prstGeom>
-              </p:spPr>
-            </p:pic>
-          </mc:Fallback>
-        </mc:AlternateContent>
-        <mc:AlternateContent xmlns:mc="http://schemas.openxmlformats.org/markup-compatibility/2006">
-          <mc:Choice xmlns:p14="http://schemas.microsoft.com/office/powerpoint/2010/main" Requires="p14">
-            <p:contentPart p14:bwMode="auto" r:id="rId16">
-              <p14:nvContentPartPr>
-                <p14:cNvPr id="10" name="잉크 9">
-                  <a:extLst>
-                    <a:ext uri="{FF2B5EF4-FFF2-40B4-BE49-F238E27FC236}">
-                      <a16:creationId xmlns:a16="http://schemas.microsoft.com/office/drawing/2014/main" id="{9F5A7807-4916-6AA0-2A52-4B9BBC468B0D}"/>
-                    </a:ext>
-                  </a:extLst>
-                </p14:cNvPr>
-                <p14:cNvContentPartPr/>
-                <p14:nvPr/>
-              </p14:nvContentPartPr>
-              <p14:xfrm>
-                <a:off x="9539537" y="2057091"/>
-                <a:ext cx="176040" cy="821880"/>
-              </p14:xfrm>
-            </p:contentPart>
-          </mc:Choice>
-          <mc:Fallback>
-            <p:pic>
-              <p:nvPicPr>
-                <p:cNvPr id="10" name="잉크 9">
-                  <a:extLst>
-                    <a:ext uri="{FF2B5EF4-FFF2-40B4-BE49-F238E27FC236}">
-                      <a16:creationId xmlns:a16="http://schemas.microsoft.com/office/drawing/2014/main" id="{9F5A7807-4916-6AA0-2A52-4B9BBC468B0D}"/>
-                    </a:ext>
-                  </a:extLst>
-                </p:cNvPr>
-                <p:cNvPicPr/>
-                <p:nvPr/>
-              </p:nvPicPr>
-              <p:blipFill>
-                <a:blip r:embed="rId17"/>
-                <a:stretch>
-                  <a:fillRect/>
-                </a:stretch>
-              </p:blipFill>
-              <p:spPr>
-                <a:xfrm>
-                  <a:off x="9533417" y="2050971"/>
-                  <a:ext cx="188280" cy="834120"/>
-                </a:xfrm>
-                <a:prstGeom prst="rect">
-                  <a:avLst/>
-                </a:prstGeom>
-              </p:spPr>
-            </p:pic>
-          </mc:Fallback>
-        </mc:AlternateContent>
-        <mc:AlternateContent xmlns:mc="http://schemas.openxmlformats.org/markup-compatibility/2006">
-          <mc:Choice xmlns:p14="http://schemas.microsoft.com/office/powerpoint/2010/main" Requires="p14">
-            <p:contentPart p14:bwMode="auto" r:id="rId18">
-              <p14:nvContentPartPr>
-                <p14:cNvPr id="11" name="잉크 10">
-                  <a:extLst>
-                    <a:ext uri="{FF2B5EF4-FFF2-40B4-BE49-F238E27FC236}">
-                      <a16:creationId xmlns:a16="http://schemas.microsoft.com/office/drawing/2014/main" id="{E8397041-FC7F-E9B3-4C69-B5DF81177AE0}"/>
-                    </a:ext>
-                  </a:extLst>
-                </p14:cNvPr>
-                <p14:cNvContentPartPr/>
-                <p14:nvPr/>
-              </p14:nvContentPartPr>
-              <p14:xfrm>
-                <a:off x="9159377" y="2187771"/>
-                <a:ext cx="1422720" cy="1011240"/>
-              </p14:xfrm>
-            </p:contentPart>
-          </mc:Choice>
-          <mc:Fallback>
-            <p:pic>
-              <p:nvPicPr>
-                <p:cNvPr id="11" name="잉크 10">
-                  <a:extLst>
-                    <a:ext uri="{FF2B5EF4-FFF2-40B4-BE49-F238E27FC236}">
-                      <a16:creationId xmlns:a16="http://schemas.microsoft.com/office/drawing/2014/main" id="{E8397041-FC7F-E9B3-4C69-B5DF81177AE0}"/>
-                    </a:ext>
-                  </a:extLst>
-                </p:cNvPr>
-                <p:cNvPicPr/>
-                <p:nvPr/>
-              </p:nvPicPr>
-              <p:blipFill>
-                <a:blip r:embed="rId19"/>
-                <a:stretch>
-                  <a:fillRect/>
-                </a:stretch>
-              </p:blipFill>
-              <p:spPr>
-                <a:xfrm>
-                  <a:off x="9153257" y="2181651"/>
-                  <a:ext cx="1434960" cy="1023480"/>
-                </a:xfrm>
-                <a:prstGeom prst="rect">
-                  <a:avLst/>
-                </a:prstGeom>
-              </p:spPr>
-            </p:pic>
-          </mc:Fallback>
-        </mc:AlternateContent>
-      </p:grpSp>
+          <a:prstGeom prst="rect">
+            <a:avLst/>
+          </a:prstGeom>
+        </p:spPr>
+      </p:pic>
     </p:spTree>
     <p:extLst>
       <p:ext uri="{BB962C8B-B14F-4D97-AF65-F5344CB8AC3E}">
-        <p14:creationId xmlns:p14="http://schemas.microsoft.com/office/powerpoint/2010/main" val="4234085007"/>
+        <p14:creationId xmlns:p14="http://schemas.microsoft.com/office/powerpoint/2010/main" val="614989378"/>
       </p:ext>
     </p:extLst>
   </p:cSld>
@@ -5873,6 +5487,666 @@
           <p:cNvPr id="3" name="그림 2">
             <a:extLst>
               <a:ext uri="{FF2B5EF4-FFF2-40B4-BE49-F238E27FC236}">
+                <a16:creationId xmlns:a16="http://schemas.microsoft.com/office/drawing/2014/main" id="{D62B99F0-A5A1-1AE6-FA56-7AE59E48A157}"/>
+              </a:ext>
+            </a:extLst>
+          </p:cNvPr>
+          <p:cNvPicPr>
+            <a:picLocks noChangeAspect="1"/>
+          </p:cNvPicPr>
+          <p:nvPr/>
+        </p:nvPicPr>
+        <p:blipFill>
+          <a:blip r:embed="rId2"/>
+          <a:stretch>
+            <a:fillRect/>
+          </a:stretch>
+        </p:blipFill>
+        <p:spPr>
+          <a:xfrm>
+            <a:off x="2695575" y="1000125"/>
+            <a:ext cx="6800850" cy="4857750"/>
+          </a:xfrm>
+          <a:prstGeom prst="rect">
+            <a:avLst/>
+          </a:prstGeom>
+        </p:spPr>
+      </p:pic>
+    </p:spTree>
+    <p:extLst>
+      <p:ext uri="{BB962C8B-B14F-4D97-AF65-F5344CB8AC3E}">
+        <p14:creationId xmlns:p14="http://schemas.microsoft.com/office/powerpoint/2010/main" val="3985065081"/>
+      </p:ext>
+    </p:extLst>
+  </p:cSld>
+  <p:clrMapOvr>
+    <a:masterClrMapping/>
+  </p:clrMapOvr>
+</p:sld>
+</file>
+
+<file path=ppt/slides/slide31.xml><?xml version="1.0" encoding="utf-8"?>
+<p:sld xmlns:a="http://schemas.openxmlformats.org/drawingml/2006/main" xmlns:r="http://schemas.openxmlformats.org/officeDocument/2006/relationships" xmlns:p="http://schemas.openxmlformats.org/presentationml/2006/main">
+  <p:cSld>
+    <p:spTree>
+      <p:nvGrpSpPr>
+        <p:cNvPr id="1" name=""/>
+        <p:cNvGrpSpPr/>
+        <p:nvPr/>
+      </p:nvGrpSpPr>
+      <p:grpSpPr>
+        <a:xfrm>
+          <a:off x="0" y="0"/>
+          <a:ext cx="0" cy="0"/>
+          <a:chOff x="0" y="0"/>
+          <a:chExt cx="0" cy="0"/>
+        </a:xfrm>
+      </p:grpSpPr>
+      <p:pic>
+        <p:nvPicPr>
+          <p:cNvPr id="3" name="그림 2">
+            <a:extLst>
+              <a:ext uri="{FF2B5EF4-FFF2-40B4-BE49-F238E27FC236}">
+                <a16:creationId xmlns:a16="http://schemas.microsoft.com/office/drawing/2014/main" id="{4DF74AC7-B380-84F9-44AA-8D31FDE49848}"/>
+              </a:ext>
+            </a:extLst>
+          </p:cNvPr>
+          <p:cNvPicPr>
+            <a:picLocks noChangeAspect="1"/>
+          </p:cNvPicPr>
+          <p:nvPr/>
+        </p:nvPicPr>
+        <p:blipFill>
+          <a:blip r:embed="rId2"/>
+          <a:stretch>
+            <a:fillRect/>
+          </a:stretch>
+        </p:blipFill>
+        <p:spPr>
+          <a:xfrm>
+            <a:off x="2481262" y="852487"/>
+            <a:ext cx="7229475" cy="5153025"/>
+          </a:xfrm>
+          <a:prstGeom prst="rect">
+            <a:avLst/>
+          </a:prstGeom>
+        </p:spPr>
+      </p:pic>
+    </p:spTree>
+    <p:extLst>
+      <p:ext uri="{BB962C8B-B14F-4D97-AF65-F5344CB8AC3E}">
+        <p14:creationId xmlns:p14="http://schemas.microsoft.com/office/powerpoint/2010/main" val="126600485"/>
+      </p:ext>
+    </p:extLst>
+  </p:cSld>
+  <p:clrMapOvr>
+    <a:masterClrMapping/>
+  </p:clrMapOvr>
+</p:sld>
+</file>
+
+<file path=ppt/slides/slide32.xml><?xml version="1.0" encoding="utf-8"?>
+<p:sld xmlns:a="http://schemas.openxmlformats.org/drawingml/2006/main" xmlns:r="http://schemas.openxmlformats.org/officeDocument/2006/relationships" xmlns:p="http://schemas.openxmlformats.org/presentationml/2006/main">
+  <p:cSld>
+    <p:spTree>
+      <p:nvGrpSpPr>
+        <p:cNvPr id="1" name=""/>
+        <p:cNvGrpSpPr/>
+        <p:nvPr/>
+      </p:nvGrpSpPr>
+      <p:grpSpPr>
+        <a:xfrm>
+          <a:off x="0" y="0"/>
+          <a:ext cx="0" cy="0"/>
+          <a:chOff x="0" y="0"/>
+          <a:chExt cx="0" cy="0"/>
+        </a:xfrm>
+      </p:grpSpPr>
+    </p:spTree>
+    <p:extLst>
+      <p:ext uri="{BB962C8B-B14F-4D97-AF65-F5344CB8AC3E}">
+        <p14:creationId xmlns:p14="http://schemas.microsoft.com/office/powerpoint/2010/main" val="1603570604"/>
+      </p:ext>
+    </p:extLst>
+  </p:cSld>
+  <p:clrMapOvr>
+    <a:masterClrMapping/>
+  </p:clrMapOvr>
+</p:sld>
+</file>
+
+<file path=ppt/slides/slide33.xml><?xml version="1.0" encoding="utf-8"?>
+<p:sld xmlns:a="http://schemas.openxmlformats.org/drawingml/2006/main" xmlns:r="http://schemas.openxmlformats.org/officeDocument/2006/relationships" xmlns:p="http://schemas.openxmlformats.org/presentationml/2006/main">
+  <p:cSld>
+    <p:spTree>
+      <p:nvGrpSpPr>
+        <p:cNvPr id="1" name=""/>
+        <p:cNvGrpSpPr/>
+        <p:nvPr/>
+      </p:nvGrpSpPr>
+      <p:grpSpPr>
+        <a:xfrm>
+          <a:off x="0" y="0"/>
+          <a:ext cx="0" cy="0"/>
+          <a:chOff x="0" y="0"/>
+          <a:chExt cx="0" cy="0"/>
+        </a:xfrm>
+      </p:grpSpPr>
+      <p:grpSp>
+        <p:nvGrpSpPr>
+          <p:cNvPr id="13" name="그룹 12">
+            <a:extLst>
+              <a:ext uri="{FF2B5EF4-FFF2-40B4-BE49-F238E27FC236}">
+                <a16:creationId xmlns:a16="http://schemas.microsoft.com/office/drawing/2014/main" id="{0AE9BBBB-8385-F969-BF13-BF84B7042698}"/>
+              </a:ext>
+            </a:extLst>
+          </p:cNvPr>
+          <p:cNvGrpSpPr/>
+          <p:nvPr/>
+        </p:nvGrpSpPr>
+        <p:grpSpPr>
+          <a:xfrm>
+            <a:off x="1291937" y="1108851"/>
+            <a:ext cx="9290160" cy="2640240"/>
+            <a:chOff x="1291937" y="1108851"/>
+            <a:chExt cx="9290160" cy="2640240"/>
+          </a:xfrm>
+        </p:grpSpPr>
+        <mc:AlternateContent xmlns:mc="http://schemas.openxmlformats.org/markup-compatibility/2006" xmlns:p14="http://schemas.microsoft.com/office/powerpoint/2010/main">
+          <mc:Choice Requires="p14">
+            <p:contentPart p14:bwMode="auto" r:id="rId2">
+              <p14:nvContentPartPr>
+                <p14:cNvPr id="3" name="잉크 2">
+                  <a:extLst>
+                    <a:ext uri="{FF2B5EF4-FFF2-40B4-BE49-F238E27FC236}">
+                      <a16:creationId xmlns:a16="http://schemas.microsoft.com/office/drawing/2014/main" id="{8736A125-3799-F82F-A2D5-3D894FFA6F0B}"/>
+                    </a:ext>
+                  </a:extLst>
+                </p14:cNvPr>
+                <p14:cNvContentPartPr/>
+                <p14:nvPr/>
+              </p14:nvContentPartPr>
+              <p14:xfrm>
+                <a:off x="1291937" y="1108851"/>
+                <a:ext cx="2638800" cy="2640240"/>
+              </p14:xfrm>
+            </p:contentPart>
+          </mc:Choice>
+          <mc:Fallback xmlns="">
+            <p:pic>
+              <p:nvPicPr>
+                <p:cNvPr id="3" name="잉크 2">
+                  <a:extLst>
+                    <a:ext uri="{FF2B5EF4-FFF2-40B4-BE49-F238E27FC236}">
+                      <a16:creationId xmlns:a16="http://schemas.microsoft.com/office/drawing/2014/main" id="{8736A125-3799-F82F-A2D5-3D894FFA6F0B}"/>
+                    </a:ext>
+                  </a:extLst>
+                </p:cNvPr>
+                <p:cNvPicPr/>
+                <p:nvPr/>
+              </p:nvPicPr>
+              <p:blipFill>
+                <a:blip r:embed="rId3"/>
+                <a:stretch>
+                  <a:fillRect/>
+                </a:stretch>
+              </p:blipFill>
+              <p:spPr>
+                <a:xfrm>
+                  <a:off x="1285817" y="1102731"/>
+                  <a:ext cx="2651040" cy="2652480"/>
+                </a:xfrm>
+                <a:prstGeom prst="rect">
+                  <a:avLst/>
+                </a:prstGeom>
+              </p:spPr>
+            </p:pic>
+          </mc:Fallback>
+        </mc:AlternateContent>
+        <mc:AlternateContent xmlns:mc="http://schemas.openxmlformats.org/markup-compatibility/2006" xmlns:p14="http://schemas.microsoft.com/office/powerpoint/2010/main">
+          <mc:Choice Requires="p14">
+            <p:contentPart p14:bwMode="auto" r:id="rId4">
+              <p14:nvContentPartPr>
+                <p14:cNvPr id="4" name="잉크 3">
+                  <a:extLst>
+                    <a:ext uri="{FF2B5EF4-FFF2-40B4-BE49-F238E27FC236}">
+                      <a16:creationId xmlns:a16="http://schemas.microsoft.com/office/drawing/2014/main" id="{DC953EFE-B106-15FF-70A0-24FDFEF4F1F6}"/>
+                    </a:ext>
+                  </a:extLst>
+                </p14:cNvPr>
+                <p14:cNvContentPartPr/>
+                <p14:nvPr/>
+              </p14:nvContentPartPr>
+              <p14:xfrm>
+                <a:off x="5600057" y="1724451"/>
+                <a:ext cx="906840" cy="1157400"/>
+              </p14:xfrm>
+            </p:contentPart>
+          </mc:Choice>
+          <mc:Fallback xmlns="">
+            <p:pic>
+              <p:nvPicPr>
+                <p:cNvPr id="4" name="잉크 3">
+                  <a:extLst>
+                    <a:ext uri="{FF2B5EF4-FFF2-40B4-BE49-F238E27FC236}">
+                      <a16:creationId xmlns:a16="http://schemas.microsoft.com/office/drawing/2014/main" id="{DC953EFE-B106-15FF-70A0-24FDFEF4F1F6}"/>
+                    </a:ext>
+                  </a:extLst>
+                </p:cNvPr>
+                <p:cNvPicPr/>
+                <p:nvPr/>
+              </p:nvPicPr>
+              <p:blipFill>
+                <a:blip r:embed="rId5"/>
+                <a:stretch>
+                  <a:fillRect/>
+                </a:stretch>
+              </p:blipFill>
+              <p:spPr>
+                <a:xfrm>
+                  <a:off x="5593937" y="1718331"/>
+                  <a:ext cx="919080" cy="1169640"/>
+                </a:xfrm>
+                <a:prstGeom prst="rect">
+                  <a:avLst/>
+                </a:prstGeom>
+              </p:spPr>
+            </p:pic>
+          </mc:Fallback>
+        </mc:AlternateContent>
+        <mc:AlternateContent xmlns:mc="http://schemas.openxmlformats.org/markup-compatibility/2006" xmlns:p14="http://schemas.microsoft.com/office/powerpoint/2010/main">
+          <mc:Choice Requires="p14">
+            <p:contentPart p14:bwMode="auto" r:id="rId6">
+              <p14:nvContentPartPr>
+                <p14:cNvPr id="5" name="잉크 4">
+                  <a:extLst>
+                    <a:ext uri="{FF2B5EF4-FFF2-40B4-BE49-F238E27FC236}">
+                      <a16:creationId xmlns:a16="http://schemas.microsoft.com/office/drawing/2014/main" id="{745B7714-4277-1632-7C80-FFFF159E8F0A}"/>
+                    </a:ext>
+                  </a:extLst>
+                </p14:cNvPr>
+                <p14:cNvContentPartPr/>
+                <p14:nvPr/>
+              </p14:nvContentPartPr>
+              <p14:xfrm>
+                <a:off x="6171377" y="2335731"/>
+                <a:ext cx="757440" cy="162000"/>
+              </p14:xfrm>
+            </p:contentPart>
+          </mc:Choice>
+          <mc:Fallback xmlns="">
+            <p:pic>
+              <p:nvPicPr>
+                <p:cNvPr id="5" name="잉크 4">
+                  <a:extLst>
+                    <a:ext uri="{FF2B5EF4-FFF2-40B4-BE49-F238E27FC236}">
+                      <a16:creationId xmlns:a16="http://schemas.microsoft.com/office/drawing/2014/main" id="{745B7714-4277-1632-7C80-FFFF159E8F0A}"/>
+                    </a:ext>
+                  </a:extLst>
+                </p:cNvPr>
+                <p:cNvPicPr/>
+                <p:nvPr/>
+              </p:nvPicPr>
+              <p:blipFill>
+                <a:blip r:embed="rId7"/>
+                <a:stretch>
+                  <a:fillRect/>
+                </a:stretch>
+              </p:blipFill>
+              <p:spPr>
+                <a:xfrm>
+                  <a:off x="6165257" y="2329611"/>
+                  <a:ext cx="769680" cy="174240"/>
+                </a:xfrm>
+                <a:prstGeom prst="rect">
+                  <a:avLst/>
+                </a:prstGeom>
+              </p:spPr>
+            </p:pic>
+          </mc:Fallback>
+        </mc:AlternateContent>
+        <mc:AlternateContent xmlns:mc="http://schemas.openxmlformats.org/markup-compatibility/2006" xmlns:p14="http://schemas.microsoft.com/office/powerpoint/2010/main">
+          <mc:Choice Requires="p14">
+            <p:contentPart p14:bwMode="auto" r:id="rId8">
+              <p14:nvContentPartPr>
+                <p14:cNvPr id="6" name="잉크 5">
+                  <a:extLst>
+                    <a:ext uri="{FF2B5EF4-FFF2-40B4-BE49-F238E27FC236}">
+                      <a16:creationId xmlns:a16="http://schemas.microsoft.com/office/drawing/2014/main" id="{C7D12407-7BC0-27F6-AA6D-247463BF24F8}"/>
+                    </a:ext>
+                  </a:extLst>
+                </p14:cNvPr>
+                <p14:cNvContentPartPr/>
+                <p14:nvPr/>
+              </p14:nvContentPartPr>
+              <p14:xfrm>
+                <a:off x="5894177" y="3116211"/>
+                <a:ext cx="1332720" cy="529560"/>
+              </p14:xfrm>
+            </p:contentPart>
+          </mc:Choice>
+          <mc:Fallback xmlns="">
+            <p:pic>
+              <p:nvPicPr>
+                <p:cNvPr id="6" name="잉크 5">
+                  <a:extLst>
+                    <a:ext uri="{FF2B5EF4-FFF2-40B4-BE49-F238E27FC236}">
+                      <a16:creationId xmlns:a16="http://schemas.microsoft.com/office/drawing/2014/main" id="{C7D12407-7BC0-27F6-AA6D-247463BF24F8}"/>
+                    </a:ext>
+                  </a:extLst>
+                </p:cNvPr>
+                <p:cNvPicPr/>
+                <p:nvPr/>
+              </p:nvPicPr>
+              <p:blipFill>
+                <a:blip r:embed="rId9"/>
+                <a:stretch>
+                  <a:fillRect/>
+                </a:stretch>
+              </p:blipFill>
+              <p:spPr>
+                <a:xfrm>
+                  <a:off x="5888057" y="3110091"/>
+                  <a:ext cx="1344960" cy="541800"/>
+                </a:xfrm>
+                <a:prstGeom prst="rect">
+                  <a:avLst/>
+                </a:prstGeom>
+              </p:spPr>
+            </p:pic>
+          </mc:Fallback>
+        </mc:AlternateContent>
+        <mc:AlternateContent xmlns:mc="http://schemas.openxmlformats.org/markup-compatibility/2006" xmlns:p14="http://schemas.microsoft.com/office/powerpoint/2010/main">
+          <mc:Choice Requires="p14">
+            <p:contentPart p14:bwMode="auto" r:id="rId10">
+              <p14:nvContentPartPr>
+                <p14:cNvPr id="7" name="잉크 6">
+                  <a:extLst>
+                    <a:ext uri="{FF2B5EF4-FFF2-40B4-BE49-F238E27FC236}">
+                      <a16:creationId xmlns:a16="http://schemas.microsoft.com/office/drawing/2014/main" id="{5FA6D897-A688-A225-CD0E-4248031150B3}"/>
+                    </a:ext>
+                  </a:extLst>
+                </p14:cNvPr>
+                <p14:cNvContentPartPr/>
+                <p14:nvPr/>
+              </p14:nvContentPartPr>
+              <p14:xfrm>
+                <a:off x="5829017" y="2875011"/>
+                <a:ext cx="1041840" cy="178200"/>
+              </p14:xfrm>
+            </p:contentPart>
+          </mc:Choice>
+          <mc:Fallback xmlns="">
+            <p:pic>
+              <p:nvPicPr>
+                <p:cNvPr id="7" name="잉크 6">
+                  <a:extLst>
+                    <a:ext uri="{FF2B5EF4-FFF2-40B4-BE49-F238E27FC236}">
+                      <a16:creationId xmlns:a16="http://schemas.microsoft.com/office/drawing/2014/main" id="{5FA6D897-A688-A225-CD0E-4248031150B3}"/>
+                    </a:ext>
+                  </a:extLst>
+                </p:cNvPr>
+                <p:cNvPicPr/>
+                <p:nvPr/>
+              </p:nvPicPr>
+              <p:blipFill>
+                <a:blip r:embed="rId11"/>
+                <a:stretch>
+                  <a:fillRect/>
+                </a:stretch>
+              </p:blipFill>
+              <p:spPr>
+                <a:xfrm>
+                  <a:off x="5822897" y="2868891"/>
+                  <a:ext cx="1054080" cy="190440"/>
+                </a:xfrm>
+                <a:prstGeom prst="rect">
+                  <a:avLst/>
+                </a:prstGeom>
+              </p:spPr>
+            </p:pic>
+          </mc:Fallback>
+        </mc:AlternateContent>
+        <mc:AlternateContent xmlns:mc="http://schemas.openxmlformats.org/markup-compatibility/2006" xmlns:p14="http://schemas.microsoft.com/office/powerpoint/2010/main">
+          <mc:Choice Requires="p14">
+            <p:contentPart p14:bwMode="auto" r:id="rId12">
+              <p14:nvContentPartPr>
+                <p14:cNvPr id="8" name="잉크 7">
+                  <a:extLst>
+                    <a:ext uri="{FF2B5EF4-FFF2-40B4-BE49-F238E27FC236}">
+                      <a16:creationId xmlns:a16="http://schemas.microsoft.com/office/drawing/2014/main" id="{2199A884-5C5D-CB5B-7C24-9923C783A7AD}"/>
+                    </a:ext>
+                  </a:extLst>
+                </p14:cNvPr>
+                <p14:cNvContentPartPr/>
+                <p14:nvPr/>
+              </p14:nvContentPartPr>
+              <p14:xfrm>
+                <a:off x="7254977" y="2007051"/>
+                <a:ext cx="1618920" cy="1202400"/>
+              </p14:xfrm>
+            </p:contentPart>
+          </mc:Choice>
+          <mc:Fallback xmlns="">
+            <p:pic>
+              <p:nvPicPr>
+                <p:cNvPr id="8" name="잉크 7">
+                  <a:extLst>
+                    <a:ext uri="{FF2B5EF4-FFF2-40B4-BE49-F238E27FC236}">
+                      <a16:creationId xmlns:a16="http://schemas.microsoft.com/office/drawing/2014/main" id="{2199A884-5C5D-CB5B-7C24-9923C783A7AD}"/>
+                    </a:ext>
+                  </a:extLst>
+                </p:cNvPr>
+                <p:cNvPicPr/>
+                <p:nvPr/>
+              </p:nvPicPr>
+              <p:blipFill>
+                <a:blip r:embed="rId13"/>
+                <a:stretch>
+                  <a:fillRect/>
+                </a:stretch>
+              </p:blipFill>
+              <p:spPr>
+                <a:xfrm>
+                  <a:off x="7248857" y="2000931"/>
+                  <a:ext cx="1631160" cy="1214640"/>
+                </a:xfrm>
+                <a:prstGeom prst="rect">
+                  <a:avLst/>
+                </a:prstGeom>
+              </p:spPr>
+            </p:pic>
+          </mc:Fallback>
+        </mc:AlternateContent>
+        <mc:AlternateContent xmlns:mc="http://schemas.openxmlformats.org/markup-compatibility/2006" xmlns:p14="http://schemas.microsoft.com/office/powerpoint/2010/main">
+          <mc:Choice Requires="p14">
+            <p:contentPart p14:bwMode="auto" r:id="rId14">
+              <p14:nvContentPartPr>
+                <p14:cNvPr id="9" name="잉크 8">
+                  <a:extLst>
+                    <a:ext uri="{FF2B5EF4-FFF2-40B4-BE49-F238E27FC236}">
+                      <a16:creationId xmlns:a16="http://schemas.microsoft.com/office/drawing/2014/main" id="{79DE26ED-DD48-4A79-BFCE-28101EB38771}"/>
+                    </a:ext>
+                  </a:extLst>
+                </p14:cNvPr>
+                <p14:cNvContentPartPr/>
+                <p14:nvPr/>
+              </p14:nvContentPartPr>
+              <p14:xfrm>
+                <a:off x="7412657" y="2049171"/>
+                <a:ext cx="407880" cy="89640"/>
+              </p14:xfrm>
+            </p:contentPart>
+          </mc:Choice>
+          <mc:Fallback xmlns="">
+            <p:pic>
+              <p:nvPicPr>
+                <p:cNvPr id="9" name="잉크 8">
+                  <a:extLst>
+                    <a:ext uri="{FF2B5EF4-FFF2-40B4-BE49-F238E27FC236}">
+                      <a16:creationId xmlns:a16="http://schemas.microsoft.com/office/drawing/2014/main" id="{79DE26ED-DD48-4A79-BFCE-28101EB38771}"/>
+                    </a:ext>
+                  </a:extLst>
+                </p:cNvPr>
+                <p:cNvPicPr/>
+                <p:nvPr/>
+              </p:nvPicPr>
+              <p:blipFill>
+                <a:blip r:embed="rId15"/>
+                <a:stretch>
+                  <a:fillRect/>
+                </a:stretch>
+              </p:blipFill>
+              <p:spPr>
+                <a:xfrm>
+                  <a:off x="7406537" y="2043051"/>
+                  <a:ext cx="420120" cy="101880"/>
+                </a:xfrm>
+                <a:prstGeom prst="rect">
+                  <a:avLst/>
+                </a:prstGeom>
+              </p:spPr>
+            </p:pic>
+          </mc:Fallback>
+        </mc:AlternateContent>
+        <mc:AlternateContent xmlns:mc="http://schemas.openxmlformats.org/markup-compatibility/2006" xmlns:p14="http://schemas.microsoft.com/office/powerpoint/2010/main">
+          <mc:Choice Requires="p14">
+            <p:contentPart p14:bwMode="auto" r:id="rId16">
+              <p14:nvContentPartPr>
+                <p14:cNvPr id="10" name="잉크 9">
+                  <a:extLst>
+                    <a:ext uri="{FF2B5EF4-FFF2-40B4-BE49-F238E27FC236}">
+                      <a16:creationId xmlns:a16="http://schemas.microsoft.com/office/drawing/2014/main" id="{9F5A7807-4916-6AA0-2A52-4B9BBC468B0D}"/>
+                    </a:ext>
+                  </a:extLst>
+                </p14:cNvPr>
+                <p14:cNvContentPartPr/>
+                <p14:nvPr/>
+              </p14:nvContentPartPr>
+              <p14:xfrm>
+                <a:off x="9539537" y="2057091"/>
+                <a:ext cx="176040" cy="821880"/>
+              </p14:xfrm>
+            </p:contentPart>
+          </mc:Choice>
+          <mc:Fallback xmlns="">
+            <p:pic>
+              <p:nvPicPr>
+                <p:cNvPr id="10" name="잉크 9">
+                  <a:extLst>
+                    <a:ext uri="{FF2B5EF4-FFF2-40B4-BE49-F238E27FC236}">
+                      <a16:creationId xmlns:a16="http://schemas.microsoft.com/office/drawing/2014/main" id="{9F5A7807-4916-6AA0-2A52-4B9BBC468B0D}"/>
+                    </a:ext>
+                  </a:extLst>
+                </p:cNvPr>
+                <p:cNvPicPr/>
+                <p:nvPr/>
+              </p:nvPicPr>
+              <p:blipFill>
+                <a:blip r:embed="rId17"/>
+                <a:stretch>
+                  <a:fillRect/>
+                </a:stretch>
+              </p:blipFill>
+              <p:spPr>
+                <a:xfrm>
+                  <a:off x="9533417" y="2050971"/>
+                  <a:ext cx="188280" cy="834120"/>
+                </a:xfrm>
+                <a:prstGeom prst="rect">
+                  <a:avLst/>
+                </a:prstGeom>
+              </p:spPr>
+            </p:pic>
+          </mc:Fallback>
+        </mc:AlternateContent>
+        <mc:AlternateContent xmlns:mc="http://schemas.openxmlformats.org/markup-compatibility/2006" xmlns:p14="http://schemas.microsoft.com/office/powerpoint/2010/main">
+          <mc:Choice Requires="p14">
+            <p:contentPart p14:bwMode="auto" r:id="rId18">
+              <p14:nvContentPartPr>
+                <p14:cNvPr id="11" name="잉크 10">
+                  <a:extLst>
+                    <a:ext uri="{FF2B5EF4-FFF2-40B4-BE49-F238E27FC236}">
+                      <a16:creationId xmlns:a16="http://schemas.microsoft.com/office/drawing/2014/main" id="{E8397041-FC7F-E9B3-4C69-B5DF81177AE0}"/>
+                    </a:ext>
+                  </a:extLst>
+                </p14:cNvPr>
+                <p14:cNvContentPartPr/>
+                <p14:nvPr/>
+              </p14:nvContentPartPr>
+              <p14:xfrm>
+                <a:off x="9159377" y="2187771"/>
+                <a:ext cx="1422720" cy="1011240"/>
+              </p14:xfrm>
+            </p:contentPart>
+          </mc:Choice>
+          <mc:Fallback xmlns="">
+            <p:pic>
+              <p:nvPicPr>
+                <p:cNvPr id="11" name="잉크 10">
+                  <a:extLst>
+                    <a:ext uri="{FF2B5EF4-FFF2-40B4-BE49-F238E27FC236}">
+                      <a16:creationId xmlns:a16="http://schemas.microsoft.com/office/drawing/2014/main" id="{E8397041-FC7F-E9B3-4C69-B5DF81177AE0}"/>
+                    </a:ext>
+                  </a:extLst>
+                </p:cNvPr>
+                <p:cNvPicPr/>
+                <p:nvPr/>
+              </p:nvPicPr>
+              <p:blipFill>
+                <a:blip r:embed="rId19"/>
+                <a:stretch>
+                  <a:fillRect/>
+                </a:stretch>
+              </p:blipFill>
+              <p:spPr>
+                <a:xfrm>
+                  <a:off x="9153257" y="2181651"/>
+                  <a:ext cx="1434960" cy="1023480"/>
+                </a:xfrm>
+                <a:prstGeom prst="rect">
+                  <a:avLst/>
+                </a:prstGeom>
+              </p:spPr>
+            </p:pic>
+          </mc:Fallback>
+        </mc:AlternateContent>
+      </p:grpSp>
+    </p:spTree>
+    <p:extLst>
+      <p:ext uri="{BB962C8B-B14F-4D97-AF65-F5344CB8AC3E}">
+        <p14:creationId xmlns:p14="http://schemas.microsoft.com/office/powerpoint/2010/main" val="4234085007"/>
+      </p:ext>
+    </p:extLst>
+  </p:cSld>
+  <p:clrMapOvr>
+    <a:masterClrMapping/>
+  </p:clrMapOvr>
+</p:sld>
+</file>
+
+<file path=ppt/slides/slide34.xml><?xml version="1.0" encoding="utf-8"?>
+<p:sld xmlns:a="http://schemas.openxmlformats.org/drawingml/2006/main" xmlns:r="http://schemas.openxmlformats.org/officeDocument/2006/relationships" xmlns:p="http://schemas.openxmlformats.org/presentationml/2006/main">
+  <p:cSld>
+    <p:spTree>
+      <p:nvGrpSpPr>
+        <p:cNvPr id="1" name=""/>
+        <p:cNvGrpSpPr/>
+        <p:nvPr/>
+      </p:nvGrpSpPr>
+      <p:grpSpPr>
+        <a:xfrm>
+          <a:off x="0" y="0"/>
+          <a:ext cx="0" cy="0"/>
+          <a:chOff x="0" y="0"/>
+          <a:chExt cx="0" cy="0"/>
+        </a:xfrm>
+      </p:grpSpPr>
+      <p:pic>
+        <p:nvPicPr>
+          <p:cNvPr id="3" name="그림 2">
+            <a:extLst>
+              <a:ext uri="{FF2B5EF4-FFF2-40B4-BE49-F238E27FC236}">
                 <a16:creationId xmlns:a16="http://schemas.microsoft.com/office/drawing/2014/main" id="{1BC62E7C-9917-0DDB-9570-69CA20B210CC}"/>
               </a:ext>
             </a:extLst>
@@ -5898,8 +6172,8 @@
           </a:prstGeom>
         </p:spPr>
       </p:pic>
-      <mc:AlternateContent xmlns:mc="http://schemas.openxmlformats.org/markup-compatibility/2006">
-        <mc:Choice xmlns:p14="http://schemas.microsoft.com/office/powerpoint/2010/main" Requires="p14">
+      <mc:AlternateContent xmlns:mc="http://schemas.openxmlformats.org/markup-compatibility/2006" xmlns:p14="http://schemas.microsoft.com/office/powerpoint/2010/main">
+        <mc:Choice Requires="p14">
           <p:contentPart p14:bwMode="auto" r:id="rId3">
             <p14:nvContentPartPr>
               <p14:cNvPr id="7" name="잉크 6">
@@ -5918,7 +6192,7 @@
             </p14:xfrm>
           </p:contentPart>
         </mc:Choice>
-        <mc:Fallback>
+        <mc:Fallback xmlns="">
           <p:pic>
             <p:nvPicPr>
               <p:cNvPr id="7" name="잉크 6">
@@ -5962,7 +6236,7 @@
 </p:sld>
 </file>
 
-<file path=ppt/slides/slide31.xml><?xml version="1.0" encoding="utf-8"?>
+<file path=ppt/slides/slide35.xml><?xml version="1.0" encoding="utf-8"?>
 <p:sld xmlns:a="http://schemas.openxmlformats.org/drawingml/2006/main" xmlns:r="http://schemas.openxmlformats.org/officeDocument/2006/relationships" xmlns:p="http://schemas.openxmlformats.org/presentationml/2006/main">
   <p:cSld>
     <p:spTree>
@@ -6022,7 +6296,7 @@
 </p:sld>
 </file>
 
-<file path=ppt/slides/slide32.xml><?xml version="1.0" encoding="utf-8"?>
+<file path=ppt/slides/slide36.xml><?xml version="1.0" encoding="utf-8"?>
 <p:sld xmlns:a="http://schemas.openxmlformats.org/drawingml/2006/main" xmlns:r="http://schemas.openxmlformats.org/officeDocument/2006/relationships" xmlns:p="http://schemas.openxmlformats.org/presentationml/2006/main">
   <p:cSld>
     <p:spTree>
@@ -6052,7 +6326,7 @@
 </p:sld>
 </file>
 
-<file path=ppt/slides/slide33.xml><?xml version="1.0" encoding="utf-8"?>
+<file path=ppt/slides/slide37.xml><?xml version="1.0" encoding="utf-8"?>
 <p:sld xmlns:a="http://schemas.openxmlformats.org/drawingml/2006/main" xmlns:r="http://schemas.openxmlformats.org/officeDocument/2006/relationships" xmlns:p="http://schemas.openxmlformats.org/presentationml/2006/main">
   <p:cSld>
     <p:spTree>
@@ -6082,7 +6356,7 @@
 </p:sld>
 </file>
 
-<file path=ppt/slides/slide34.xml><?xml version="1.0" encoding="utf-8"?>
+<file path=ppt/slides/slide38.xml><?xml version="1.0" encoding="utf-8"?>
 <p:sld xmlns:a="http://schemas.openxmlformats.org/drawingml/2006/main" xmlns:r="http://schemas.openxmlformats.org/officeDocument/2006/relationships" xmlns:p="http://schemas.openxmlformats.org/presentationml/2006/main">
   <p:cSld>
     <p:spTree>
@@ -6112,7 +6386,7 @@
 </p:sld>
 </file>
 
-<file path=ppt/slides/slide35.xml><?xml version="1.0" encoding="utf-8"?>
+<file path=ppt/slides/slide39.xml><?xml version="1.0" encoding="utf-8"?>
 <p:sld xmlns:a="http://schemas.openxmlformats.org/drawingml/2006/main" xmlns:r="http://schemas.openxmlformats.org/officeDocument/2006/relationships" xmlns:p="http://schemas.openxmlformats.org/presentationml/2006/main">
   <p:cSld>
     <p:spTree>

--- a/함수정리.pptx
+++ b/함수정리.pptx
@@ -23,27 +23,43 @@
     <p:sldId id="284" r:id="rId17"/>
     <p:sldId id="285" r:id="rId18"/>
     <p:sldId id="286" r:id="rId19"/>
-    <p:sldId id="288" r:id="rId20"/>
-    <p:sldId id="287" r:id="rId21"/>
-    <p:sldId id="297" r:id="rId22"/>
-    <p:sldId id="298" r:id="rId23"/>
-    <p:sldId id="299" r:id="rId24"/>
-    <p:sldId id="300" r:id="rId25"/>
-    <p:sldId id="256" r:id="rId26"/>
-    <p:sldId id="260" r:id="rId27"/>
-    <p:sldId id="257" r:id="rId28"/>
-    <p:sldId id="263" r:id="rId29"/>
-    <p:sldId id="261" r:id="rId30"/>
-    <p:sldId id="258" r:id="rId31"/>
-    <p:sldId id="259" r:id="rId32"/>
-    <p:sldId id="289" r:id="rId33"/>
-    <p:sldId id="291" r:id="rId34"/>
-    <p:sldId id="292" r:id="rId35"/>
-    <p:sldId id="293" r:id="rId36"/>
-    <p:sldId id="290" r:id="rId37"/>
-    <p:sldId id="294" r:id="rId38"/>
-    <p:sldId id="295" r:id="rId39"/>
-    <p:sldId id="296" r:id="rId40"/>
+    <p:sldId id="287" r:id="rId20"/>
+    <p:sldId id="297" r:id="rId21"/>
+    <p:sldId id="298" r:id="rId22"/>
+    <p:sldId id="299" r:id="rId23"/>
+    <p:sldId id="300" r:id="rId24"/>
+    <p:sldId id="301" r:id="rId25"/>
+    <p:sldId id="302" r:id="rId26"/>
+    <p:sldId id="303" r:id="rId27"/>
+    <p:sldId id="304" r:id="rId28"/>
+    <p:sldId id="305" r:id="rId29"/>
+    <p:sldId id="306" r:id="rId30"/>
+    <p:sldId id="307" r:id="rId31"/>
+    <p:sldId id="308" r:id="rId32"/>
+    <p:sldId id="309" r:id="rId33"/>
+    <p:sldId id="310" r:id="rId34"/>
+    <p:sldId id="311" r:id="rId35"/>
+    <p:sldId id="312" r:id="rId36"/>
+    <p:sldId id="314" r:id="rId37"/>
+    <p:sldId id="256" r:id="rId38"/>
+    <p:sldId id="260" r:id="rId39"/>
+    <p:sldId id="257" r:id="rId40"/>
+    <p:sldId id="263" r:id="rId41"/>
+    <p:sldId id="261" r:id="rId42"/>
+    <p:sldId id="258" r:id="rId43"/>
+    <p:sldId id="259" r:id="rId44"/>
+    <p:sldId id="292" r:id="rId45"/>
+    <p:sldId id="293" r:id="rId46"/>
+    <p:sldId id="290" r:id="rId47"/>
+    <p:sldId id="294" r:id="rId48"/>
+    <p:sldId id="295" r:id="rId49"/>
+    <p:sldId id="296" r:id="rId50"/>
+    <p:sldId id="289" r:id="rId51"/>
+    <p:sldId id="315" r:id="rId52"/>
+    <p:sldId id="316" r:id="rId53"/>
+    <p:sldId id="317" r:id="rId54"/>
+    <p:sldId id="318" r:id="rId55"/>
+    <p:sldId id="319" r:id="rId56"/>
   </p:sldIdLst>
   <p:sldSz cx="12192000" cy="6858000"/>
   <p:notesSz cx="6858000" cy="9144000"/>
@@ -166,62 +182,6 @@
           <inkml:channelProperty channel="F" name="resolution" value="0" units="1/dev"/>
         </inkml:channelProperties>
       </inkml:inkSource>
-      <inkml:timestamp xml:id="ts0" timeString="2026-04-04T01:01:03.727"/>
-    </inkml:context>
-    <inkml:brush xml:id="br0">
-      <inkml:brushProperty name="width" value="0.035" units="cm"/>
-      <inkml:brushProperty name="height" value="0.035" units="cm"/>
-      <inkml:brushProperty name="color" value="#E71224"/>
-    </inkml:brush>
-  </inkml:definitions>
-  <inkml:trace contextRef="#ctx0" brushRef="#br0">2599 622 24575,'74'-73'0,"4"4"0,105-74 0,-130 108 0,1 3 0,1 1 0,1 4 0,2 2 0,62-19 0,24 5-284,1 6 1,245-22-1,-160 39-571,236 16-1,-275 12 742,-1 7 0,287 68 0,-327-48 121,-2 7 0,-2 6 0,219 111 0,-290-122-108,-1 2-1,-2 4 1,-2 3 0,-2 3 0,79 80 0,-109-93 68,-2 2 1,-2 1-1,-1 2 1,-3 1-1,-2 1 1,-1 2-1,-3 0 1,-2 2-1,21 73 0,-28-60 36,-2 0 0,-4 1-1,-2 0 1,-2 1-1,-4-1 1,-3 1-1,-2-1 1,-20 100-1,-1-53-59,-4-1 0,-6-2-1,-4-1 1,-56 110 0,38-106-31,-4-3 0,-4-3 0,-5-3 0,-5-3 0,-4-3 0,-4-4 0,-4-3 0,-4-4 0,-4-5 0,-3-3 1,-3-5-1,-3-5 0,-4-4 0,-201 87 0,160-95 206,-3-7 1,-2-6-1,-1-8 0,-2-6 1,-2-7-1,1-6 1,-2-8-1,0-7 0,-262-32 1,398 28-61,-139-24 499,148 23-459,0 0 0,0-2 0,0 1 0,1-2 0,0 0 0,0 0 0,1-2 0,-15-10 0,24 15 26,-1 0 0,1-1-1,0 1 1,0-1 0,0 0 0,1 0 0,-1 0 0,1-1 0,0 1 0,-3-11 0,5 13-85,0 1 1,1-1 0,-1 1-1,1-1 1,-1 0 0,1 1-1,0-1 1,0 1 0,1-1-1,-1 1 1,0-1 0,1 0-1,0 1 1,-1 0 0,1-1-1,0 1 1,0-1 0,0 1-1,1 0 1,-1 0 0,0-1-1,1 1 1,0 0 0,-1 0-1,1 1 1,0-1 0,0 0-1,3-1 1,4-2-28,0 0 1,1 1-1,-1 1 0,1-1 1,0 2-1,0-1 0,0 1 1,1 1-1,-1 0 0,0 0 1,1 1-1,-1 1 0,0 0 1,0 0-1,14 3 0,16 4-12,0 2 0,-1 2 0,0 1 0,-1 1 0,57 32 0,-8 5 0,95 72 0,-53-23-356,-5 6 0,-4 5 0,111 135 0,282 410-1874,-28 97 1818,-359-523 369,136 344 0,-227-481-198,43 173 0,-71-229 233,-1 0-1,-2 1 1,-1-1-1,-2 1 1,-2 0-1,-1 0 1,-12 60-1,10-80 28,-1 0 0,0 0 0,-2-1-1,0 1 1,-1-2 0,-1 1 0,0-1 0,-1 0-1,-1-1 1,-1 0 0,-15 15 0,9-13 43,-1 0 0,-1-2 0,-1 0 0,0-2 0,0 0 0,-1-1 0,-35 13 0,9-8 104,0-2-1,-97 16 0,-95-4 61,-148-11-411,0-18-1,-518-67 1,-752-200-371,698 71 380,12-57-801,820 214-1691</inkml:trace>
-</inkml:ink>
-</file>
-
-<file path=ppt/ink/ink10.xml><?xml version="1.0" encoding="utf-8"?>
-<inkml:ink xmlns:inkml="http://www.w3.org/2003/InkML">
-  <inkml:definitions>
-    <inkml:context xml:id="ctx0">
-      <inkml:inkSource xml:id="inkSrc0">
-        <inkml:traceFormat>
-          <inkml:channel name="X" type="integer" min="-2.14748E9" max="2.14748E9" units="cm"/>
-          <inkml:channel name="Y" type="integer" min="-2.14748E9" max="2.14748E9" units="cm"/>
-          <inkml:channel name="F" type="integer" max="32767" units="dev"/>
-        </inkml:traceFormat>
-        <inkml:channelProperties>
-          <inkml:channelProperty channel="X" name="resolution" value="1000" units="1/cm"/>
-          <inkml:channelProperty channel="Y" name="resolution" value="1000" units="1/cm"/>
-          <inkml:channelProperty channel="F" name="resolution" value="0" units="1/dev"/>
-        </inkml:channelProperties>
-      </inkml:inkSource>
-      <inkml:timestamp xml:id="ts0" timeString="2026-04-04T02:04:08.847"/>
-    </inkml:context>
-    <inkml:brush xml:id="br0">
-      <inkml:brushProperty name="width" value="0.035" units="cm"/>
-      <inkml:brushProperty name="height" value="0.035" units="cm"/>
-      <inkml:brushProperty name="color" value="#E71224"/>
-    </inkml:brush>
-  </inkml:definitions>
-  <inkml:trace contextRef="#ctx0" brushRef="#br0">1817 1 24575,'177'276'21,"34"50"-432,265 295-1641,-319-442 2164,229 201 0,-254-263 388,-124-110-475,1 1 0,0 0 0,-1 1 0,0 0 0,0 0 0,9 16 0,-16-23-16,0 1 0,0-1 0,0 0-1,0 1 1,0-1 0,-1 1 0,1-1-1,-1 1 1,0 0 0,1-1 0,-1 1-1,-1-1 1,1 1 0,0 0 0,0-1-1,-1 1 1,0-1 0,1 1 0,-1-1-1,0 1 1,0-1 0,0 0 0,-1 1-1,1-1 1,0 0 0,-1 0 0,0 0 0,1 0-1,-1 0 1,-2 2 0,-8 5 0,0 0 0,-1 0 0,0-1 1,0-1-1,0 0 0,-22 7 0,-117 38-108,-162 33-1,289-78 48,-2570 515-2098,2442-498 2150,94-19-16,59-5 16,0 0 1,1 0 0,-1 0-1,0 0 1,0 0 0,0 0 0,0-1-1,0 1 1,0 0 0,0 0-1,0 0 1,1 0 0,-1 0-1,0 0 1,0 0 0,0 0-1,0 0 1,0-1 0,0 1-1,0 0 1,0 0 0,0 0-1,0 0 1,0 0 0,0 0-1,0-1 1,0 1 0,0 0-1,0 0 1,0 0 0,0 0-1,0 0 1,0 0 0,0-1-1,0 1 1,0 0 0,0 0 0,0 0-1,0 0 1,0 0 0,0 0-1,0 0 1,0-1 0,0 1-1,0 0 1,0 0 0,-1 0-1,1 0 1,0 0 0,0 0-1,0 0 1,0 0 0,0 0-1,0 0 1,0 0 0,-1-1-1,1 1 1,0 0 0,33-13 214,72-20 230,2 5 0,145-19 1,242-6 257,679 0-1635,0 55-246,-959 0 1292,102 2-981,-232-3-3131</inkml:trace>
-</inkml:ink>
-</file>
-
-<file path=ppt/ink/ink11.xml><?xml version="1.0" encoding="utf-8"?>
-<inkml:ink xmlns:inkml="http://www.w3.org/2003/InkML">
-  <inkml:definitions>
-    <inkml:context xml:id="ctx0">
-      <inkml:inkSource xml:id="inkSrc0">
-        <inkml:traceFormat>
-          <inkml:channel name="X" type="integer" min="-2.14748E9" max="2.14748E9" units="cm"/>
-          <inkml:channel name="Y" type="integer" min="-2.14748E9" max="2.14748E9" units="cm"/>
-          <inkml:channel name="F" type="integer" max="32767" units="dev"/>
-        </inkml:traceFormat>
-        <inkml:channelProperties>
-          <inkml:channelProperty channel="X" name="resolution" value="1000" units="1/cm"/>
-          <inkml:channelProperty channel="Y" name="resolution" value="1000" units="1/cm"/>
-          <inkml:channelProperty channel="F" name="resolution" value="0" units="1/dev"/>
-        </inkml:channelProperties>
-      </inkml:inkSource>
       <inkml:timestamp xml:id="ts0" timeString="2026-04-04T02:10:25.233"/>
     </inkml:context>
     <inkml:brush xml:id="br0">
@@ -231,230 +191,6 @@
     </inkml:brush>
   </inkml:definitions>
   <inkml:trace contextRef="#ctx0" brushRef="#br0">0 1 24575,'0'0'-8191</inkml:trace>
-</inkml:ink>
-</file>
-
-<file path=ppt/ink/ink2.xml><?xml version="1.0" encoding="utf-8"?>
-<inkml:ink xmlns:inkml="http://www.w3.org/2003/InkML">
-  <inkml:definitions>
-    <inkml:context xml:id="ctx0">
-      <inkml:inkSource xml:id="inkSrc0">
-        <inkml:traceFormat>
-          <inkml:channel name="X" type="integer" min="-2.14748E9" max="2.14748E9" units="cm"/>
-          <inkml:channel name="Y" type="integer" min="-2.14748E9" max="2.14748E9" units="cm"/>
-          <inkml:channel name="F" type="integer" max="32767" units="dev"/>
-        </inkml:traceFormat>
-        <inkml:channelProperties>
-          <inkml:channelProperty channel="X" name="resolution" value="1000" units="1/cm"/>
-          <inkml:channelProperty channel="Y" name="resolution" value="1000" units="1/cm"/>
-          <inkml:channelProperty channel="F" name="resolution" value="0" units="1/dev"/>
-        </inkml:channelProperties>
-      </inkml:inkSource>
-      <inkml:timestamp xml:id="ts0" timeString="2026-04-04T02:04:02.166"/>
-    </inkml:context>
-    <inkml:brush xml:id="br0">
-      <inkml:brushProperty name="width" value="0.035" units="cm"/>
-      <inkml:brushProperty name="height" value="0.035" units="cm"/>
-      <inkml:brushProperty name="color" value="#E71224"/>
-    </inkml:brush>
-  </inkml:definitions>
-  <inkml:trace contextRef="#ctx0" brushRef="#br0">2580 94 24575,'65'-14'0,"126"-8"0,-100 15 0,822-42 0,0 48 0,-793 2 0,-86-1 0,-44 0 0,-61 1 0,-214-3 0,-263 4 0,5 35 0,354-6 0,162-25 0,1 2 0,0 0 0,1 2 0,-45 25 0,59-28 0,1 0 0,0 1 0,0 0 0,1 0 0,0 1 0,1 0 0,0 1 0,0 0 0,1 0 0,0 1 0,1 0 0,-6 15 0,-4 13 0,2 2 0,-11 52 0,19-71 0,-45 203 0,10 2 0,10 1 0,-3 305 0,36 33 0,1-393 0,-3-149 0,-1-13 0,1 1 0,0-1 0,1 0 0,5 22 0,-5-30 0,0 1 0,1-1 0,-1 0 0,1 0 0,0 1 0,-1-1 0,1 0 0,1 0 0,-1-1 0,0 1 0,1 0 0,0-1 0,-1 0 0,1 1 0,0-1 0,0 0 0,0 0 0,1-1 0,5 3 0,15 4 0,1-2 0,0-1 0,0-1 0,0-1 0,0-1 0,27-2 0,3 2 0,235 13-627,-1 13-1,482 109 1,132 142-540,-638-175 852,330 181 1,-205-46 201,-304-177 30,-3 4 0,100 103 0,-137-120 33,-2 2 0,-2 1 0,-3 3 1,56 102-1,-72-110 34,-1 2 0,-3 0-1,-2 1 1,-3 1 0,-1 0 0,10 94 0,-19-69 19,-3-1 0,-4 1 0,-2-1 0,-4 0 0,-4 0 0,-2-1 1,-4-1-1,-3 0 0,-48 107 0,21-75-227,-5-3 1,-4-2-1,-4-3 0,-5-2 1,-125 136-1,110-146 179,-3-4-1,-4-4 1,-3-4 0,-4-4-1,-182 101 1,154-108 17,-3-6 0,-2-5 0,-2-6 0,-223 46 1,124-51-216,-327 15 1,-240-58-19,560-12 279,1-11 1,0-9-1,3-11 0,-249-84 1,336 79 9,3-7 1,-227-126-1,266 121-7,2-5 1,4-3-1,-172-164 0,184 144-16,5-3 0,3-3 0,5-4 0,4-2 0,5-4 0,-64-145 0,72 119 44,5-2 0,7-2 0,5-3 0,7-1 0,-16-156 0,39 210 317,3-132 0,12 127-3010</inkml:trace>
-</inkml:ink>
-</file>
-
-<file path=ppt/ink/ink3.xml><?xml version="1.0" encoding="utf-8"?>
-<inkml:ink xmlns:inkml="http://www.w3.org/2003/InkML">
-  <inkml:definitions>
-    <inkml:context xml:id="ctx0">
-      <inkml:inkSource xml:id="inkSrc0">
-        <inkml:traceFormat>
-          <inkml:channel name="X" type="integer" min="-2.14748E9" max="2.14748E9" units="cm"/>
-          <inkml:channel name="Y" type="integer" min="-2.14748E9" max="2.14748E9" units="cm"/>
-          <inkml:channel name="F" type="integer" max="32767" units="dev"/>
-        </inkml:traceFormat>
-        <inkml:channelProperties>
-          <inkml:channelProperty channel="X" name="resolution" value="1000" units="1/cm"/>
-          <inkml:channelProperty channel="Y" name="resolution" value="1000" units="1/cm"/>
-          <inkml:channelProperty channel="F" name="resolution" value="0" units="1/dev"/>
-        </inkml:channelProperties>
-      </inkml:inkSource>
-      <inkml:timestamp xml:id="ts0" timeString="2026-04-04T02:04:03.148"/>
-    </inkml:context>
-    <inkml:brush xml:id="br0">
-      <inkml:brushProperty name="width" value="0.035" units="cm"/>
-      <inkml:brushProperty name="height" value="0.035" units="cm"/>
-      <inkml:brushProperty name="color" value="#E71224"/>
-    </inkml:brush>
-  </inkml:definitions>
-  <inkml:trace contextRef="#ctx0" brushRef="#br0">0 789 24575,'199'-106'0,"90"-44"0,-32 35-638,301-90-1,-343 142 607,426-67-1,-474 113 260,-153 16-217,-1 0 0,0 1 1,0 0-1,0 2 0,0-1 0,14 4 0,-22-3-11,-1 0 1,0 0-1,0 0 0,0 0 1,0 0-1,0 1 0,0 0 1,-1 0-1,1 0 0,-1 0 1,0 0-1,0 1 0,0-1 1,0 1-1,0 0 0,-1 0 1,0 0-1,0 0 0,0 0 1,2 9-1,1 8 1,-1-1 0,0 1 0,-2 0 0,-1 0 0,-2 39 0,-24 206 0,-170 1033-1634,148-1005 1472,-16 75 143,-43 319-51,101-636-5178</inkml:trace>
-</inkml:ink>
-</file>
-
-<file path=ppt/ink/ink4.xml><?xml version="1.0" encoding="utf-8"?>
-<inkml:ink xmlns:inkml="http://www.w3.org/2003/InkML">
-  <inkml:definitions>
-    <inkml:context xml:id="ctx0">
-      <inkml:inkSource xml:id="inkSrc0">
-        <inkml:traceFormat>
-          <inkml:channel name="X" type="integer" min="-2.14748E9" max="2.14748E9" units="cm"/>
-          <inkml:channel name="Y" type="integer" min="-2.14748E9" max="2.14748E9" units="cm"/>
-          <inkml:channel name="F" type="integer" max="32767" units="dev"/>
-        </inkml:traceFormat>
-        <inkml:channelProperties>
-          <inkml:channelProperty channel="X" name="resolution" value="1000" units="1/cm"/>
-          <inkml:channelProperty channel="Y" name="resolution" value="1000" units="1/cm"/>
-          <inkml:channelProperty channel="F" name="resolution" value="0" units="1/dev"/>
-        </inkml:channelProperties>
-      </inkml:inkSource>
-      <inkml:timestamp xml:id="ts0" timeString="2026-04-04T02:04:03.557"/>
-    </inkml:context>
-    <inkml:brush xml:id="br0">
-      <inkml:brushProperty name="width" value="0.035" units="cm"/>
-      <inkml:brushProperty name="height" value="0.035" units="cm"/>
-      <inkml:brushProperty name="color" value="#E71224"/>
-    </inkml:brush>
-  </inkml:definitions>
-  <inkml:trace contextRef="#ctx0" brushRef="#br0">1 450 24575,'61'-15'0,"83"-21"0,86-19 0,66-9 0,36 0-2304,-7 2 2304,-36 5 0,-44 3 0,-64 12-5887</inkml:trace>
-</inkml:ink>
-</file>
-
-<file path=ppt/ink/ink5.xml><?xml version="1.0" encoding="utf-8"?>
-<inkml:ink xmlns:inkml="http://www.w3.org/2003/InkML">
-  <inkml:definitions>
-    <inkml:context xml:id="ctx0">
-      <inkml:inkSource xml:id="inkSrc0">
-        <inkml:traceFormat>
-          <inkml:channel name="X" type="integer" min="-2.14748E9" max="2.14748E9" units="cm"/>
-          <inkml:channel name="Y" type="integer" min="-2.14748E9" max="2.14748E9" units="cm"/>
-          <inkml:channel name="F" type="integer" max="32767" units="dev"/>
-        </inkml:traceFormat>
-        <inkml:channelProperties>
-          <inkml:channelProperty channel="X" name="resolution" value="1000" units="1/cm"/>
-          <inkml:channelProperty channel="Y" name="resolution" value="1000" units="1/cm"/>
-          <inkml:channelProperty channel="F" name="resolution" value="0" units="1/dev"/>
-        </inkml:channelProperties>
-      </inkml:inkSource>
-      <inkml:timestamp xml:id="ts0" timeString="2026-04-04T02:04:04.222"/>
-    </inkml:context>
-    <inkml:brush xml:id="br0">
-      <inkml:brushProperty name="width" value="0.035" units="cm"/>
-      <inkml:brushProperty name="height" value="0.035" units="cm"/>
-      <inkml:brushProperty name="color" value="#E71224"/>
-    </inkml:brush>
-  </inkml:definitions>
-  <inkml:trace contextRef="#ctx0" brushRef="#br0">1 506 24575,'134'-40'0,"202"-31"0,-221 50 0,514-106-280,206-38-148,-797 158 428,-11 1 0,0 1 0,1 1 0,-1 2 0,50 2 0,-75 0 0,0 0 0,1 0 0,-1 0 0,0 1 0,1 0 0,-1-1 0,0 1 0,0 0 0,1 0 0,-1 0 0,0 0 0,0 0 0,0 1 0,0-1 0,-1 1 0,1-1 0,0 1 0,0-1 0,-1 1 0,2 2 0,-2 0 0,1-1 0,-1 0 0,-1 0 0,1 1 0,0-1 0,-1 0 0,0 1 0,0-1 0,0 1 0,0-1 0,0 0 0,-1 1 0,-1 4 0,-9 33 65,-2-1 0,-1 0 1,-3-2-1,-1 0 0,-23 37 0,-8 18 134,-122 277-70,136-281-133,4 2 1,-24 117-1,51-188 4,-1-1 0,2 0 0,0 0 0,0 21 0,3-36 0,0-1 0,0 1 0,0 0 0,1 0 0,-1 0 0,1 0 0,0 0 0,0-1 0,0 1 0,1 0 0,-1-1 0,1 1 0,0-1 0,0 1 0,0-1 0,0 0 0,1 0 0,-1 0 0,1 0 0,0-1 0,4 4 0,-2-3 0,0 0 0,1-1 0,-1 0 0,1 0 0,-1 0 0,1 0 0,0-1 0,0 0 0,0 0 0,11-1 0,1 0 0,0-2 0,32-5 0,13-8 0,0-3 0,-2-3 0,0-2 0,60-33 0,224-140 0,89-98 0,-363 238 0,-2-4 0,-3-3 0,100-122 0,-150 164-91,0-1 0,-1-1 0,-1 0 0,-2-1 0,0-1 0,-2 0 0,0 0 0,-2-1 0,0 0 0,-2-1 0,-1 1 0,-2-1 0,0 0 0,-2-52 0,-6 31-6735</inkml:trace>
-</inkml:ink>
-</file>
-
-<file path=ppt/ink/ink6.xml><?xml version="1.0" encoding="utf-8"?>
-<inkml:ink xmlns:inkml="http://www.w3.org/2003/InkML">
-  <inkml:definitions>
-    <inkml:context xml:id="ctx0">
-      <inkml:inkSource xml:id="inkSrc0">
-        <inkml:traceFormat>
-          <inkml:channel name="X" type="integer" min="-2.14748E9" max="2.14748E9" units="cm"/>
-          <inkml:channel name="Y" type="integer" min="-2.14748E9" max="2.14748E9" units="cm"/>
-          <inkml:channel name="F" type="integer" max="32767" units="dev"/>
-        </inkml:traceFormat>
-        <inkml:channelProperties>
-          <inkml:channelProperty channel="X" name="resolution" value="1000" units="1/cm"/>
-          <inkml:channelProperty channel="Y" name="resolution" value="1000" units="1/cm"/>
-          <inkml:channelProperty channel="F" name="resolution" value="0" units="1/dev"/>
-        </inkml:channelProperties>
-      </inkml:inkSource>
-      <inkml:timestamp xml:id="ts0" timeString="2026-04-04T02:04:05.279"/>
-    </inkml:context>
-    <inkml:brush xml:id="br0">
-      <inkml:brushProperty name="width" value="0.035" units="cm"/>
-      <inkml:brushProperty name="height" value="0.035" units="cm"/>
-      <inkml:brushProperty name="color" value="#E71224"/>
-    </inkml:brush>
-  </inkml:definitions>
-  <inkml:trace contextRef="#ctx0" brushRef="#br0">0 495 24575,'31'-8'0,"41"-2"0,62-8 0,63-16 0,59-9 0,47-6 0,42-2-1660,17-7 1660,-23-3 0,-38 3 0,-55 10 0,-61 14 402,-63 12-7335</inkml:trace>
-</inkml:ink>
-</file>
-
-<file path=ppt/ink/ink7.xml><?xml version="1.0" encoding="utf-8"?>
-<inkml:ink xmlns:inkml="http://www.w3.org/2003/InkML">
-  <inkml:definitions>
-    <inkml:context xml:id="ctx0">
-      <inkml:inkSource xml:id="inkSrc0">
-        <inkml:traceFormat>
-          <inkml:channel name="X" type="integer" min="-2.14748E9" max="2.14748E9" units="cm"/>
-          <inkml:channel name="Y" type="integer" min="-2.14748E9" max="2.14748E9" units="cm"/>
-          <inkml:channel name="F" type="integer" max="32767" units="dev"/>
-        </inkml:traceFormat>
-        <inkml:channelProperties>
-          <inkml:channelProperty channel="X" name="resolution" value="1000" units="1/cm"/>
-          <inkml:channelProperty channel="Y" name="resolution" value="1000" units="1/cm"/>
-          <inkml:channelProperty channel="F" name="resolution" value="0" units="1/dev"/>
-        </inkml:channelProperties>
-      </inkml:inkSource>
-      <inkml:timestamp xml:id="ts0" timeString="2026-04-04T02:04:06.580"/>
-    </inkml:context>
-    <inkml:brush xml:id="br0">
-      <inkml:brushProperty name="width" value="0.035" units="cm"/>
-      <inkml:brushProperty name="height" value="0.035" units="cm"/>
-      <inkml:brushProperty name="color" value="#E71224"/>
-    </inkml:brush>
-  </inkml:definitions>
-  <inkml:trace contextRef="#ctx0" brushRef="#br0">1436 4 24575,'38'-2'0,"-19"1"0,0 0 0,0 2 0,30 3 0,-45-3 0,-1-1 0,1 1 0,0 0 0,0 0 0,-1 1 0,1-1 0,-1 1 0,1 0 0,-1 0 0,1 0 0,-1 0 0,0 0 0,0 1 0,0-1 0,-1 1 0,1 0 0,0 0 0,-1 0 0,0 0 0,0 1 0,0-1 0,3 8 0,-2-1 0,-1 1 0,0-1 0,0 1 0,-1 0 0,-1 0 0,0-1 0,0 1 0,-1 0 0,-3 16 0,-31 107 0,34-131 0,-42 123-63,-72 150-1,-87 117-903,45-114 912,-12-8 0,-13-7 1,-414 461-1,548-675 55,22-24 0,-43 54 0,68-79-1,-1 1 1,1-1-1,0 0 1,0 1-1,0-1 1,0 0-1,0 1 1,0-1-1,1 1 1,-1 0-1,0-1 1,1 1-1,-1 0 1,1-1-1,0 1 1,-1 0-1,1 0 1,0-1-1,0 1 1,0 0-1,0-1 1,0 1-1,1 0 1,-1 0-1,0-1 0,1 1 1,0 0-1,0 2 1,2-2 16,0 0-1,0 0 1,0-1-1,-1 1 1,2-1-1,-1 1 1,0-1 0,0 0-1,0 0 1,0-1-1,1 1 1,-1-1 0,0 1-1,7-1 1,131 1 496,270-34 0,-365 28-442,216-29-247,274-73 0,-363 61 59,-1-8 0,249-115 0,-355 137 118,-1-2 0,-1-4 0,-2-2 0,-2-3 0,75-70 0,-107 86 0,-1-1 0,-1-2 0,-2-1 0,-1-1 0,-1 0 0,-2-2 0,-2 0 0,0-2 0,-3 0 0,-1 0 0,16-68 0,-18 33 142,-4 0-1,-3-1 1,-2 0 0,-12-114-1,2 148-141,1 84 0,23 1194-964,60-545 964,-73-674 0,14 69 0,-16-83 0,0 1 0,0-1 0,1 0 0,1 0 0,-1 0 0,1 0 0,0-1 0,6 9 0,-9-14 0,1 0 0,-1 1 0,0-1 0,1 0 0,-1 0 0,1 0 0,-1 0 0,1 0 0,0 0 0,-1 0 0,1-1 0,0 1 0,0 0 0,-1-1 0,1 0 0,0 1 0,0-1 0,0 0 0,0 0 0,-1 0 0,1 0 0,0 0 0,0 0 0,0-1 0,0 1 0,-1 0 0,1-1 0,0 0 0,0 1 0,2-2 0,4-3 0,0 0 0,0-1 0,-1 1 0,14-14 0,11-13 118,-2-1 0,-1-2 0,36-55 0,64-129 374,-126 213-492,150-290-249,171-469-1,29-338-249,-285 872 499,-57 196 0,27-62 0,-37 96 0,0-1 0,0 1 0,0-1 0,0 1 0,0-1 0,0 1 0,0-1 0,0 1 0,0 0 0,1 0 0,-1-1 0,0 1 0,3-1 0,-3 2 0,-1 0 0,1 0 0,-1 0 0,1 0 0,-1 0 0,1 0 0,-1 0 0,1 0 0,0 1 0,-1-1 0,1 0 0,-1 0 0,0 1 0,1-1 0,-1 0 0,1 0 0,-1 1 0,1-1 0,-1 0 0,1 1 0,-1-1 0,0 1 0,1-1 0,-1 1 0,0-1 0,0 1 0,1-1 0,-1 1 0,0-1 0,0 1 0,0-1 0,1 2 0,3 14 0,0 0 0,-1 1 0,0-1 0,0 26 0,6 741-502,-11-251 226,8-114-794,-9-290-4275</inkml:trace>
-</inkml:ink>
-</file>
-
-<file path=ppt/ink/ink8.xml><?xml version="1.0" encoding="utf-8"?>
-<inkml:ink xmlns:inkml="http://www.w3.org/2003/InkML">
-  <inkml:definitions>
-    <inkml:context xml:id="ctx0">
-      <inkml:inkSource xml:id="inkSrc0">
-        <inkml:traceFormat>
-          <inkml:channel name="X" type="integer" min="-2.14748E9" max="2.14748E9" units="cm"/>
-          <inkml:channel name="Y" type="integer" min="-2.14748E9" max="2.14748E9" units="cm"/>
-          <inkml:channel name="F" type="integer" max="32767" units="dev"/>
-        </inkml:traceFormat>
-        <inkml:channelProperties>
-          <inkml:channelProperty channel="X" name="resolution" value="1000" units="1/cm"/>
-          <inkml:channelProperty channel="Y" name="resolution" value="1000" units="1/cm"/>
-          <inkml:channelProperty channel="F" name="resolution" value="0" units="1/dev"/>
-        </inkml:channelProperties>
-      </inkml:inkSource>
-      <inkml:timestamp xml:id="ts0" timeString="2026-04-04T02:04:07.351"/>
-    </inkml:context>
-    <inkml:brush xml:id="br0">
-      <inkml:brushProperty name="width" value="0.035" units="cm"/>
-      <inkml:brushProperty name="height" value="0.035" units="cm"/>
-      <inkml:brushProperty name="color" value="#E71224"/>
-    </inkml:brush>
-  </inkml:definitions>
-  <inkml:trace contextRef="#ctx0" brushRef="#br0">0 248 24575,'8'0'0,"18"0"0,27 0 0,21 0 0,20-7 0,3-3 0,7-8 0,2 0 0,5-5 0,-7-6 0,-15 1 0,-7-2 0,-9-3 0,-9 4 0,-16 7-8191</inkml:trace>
-</inkml:ink>
-</file>
-
-<file path=ppt/ink/ink9.xml><?xml version="1.0" encoding="utf-8"?>
-<inkml:ink xmlns:inkml="http://www.w3.org/2003/InkML">
-  <inkml:definitions>
-    <inkml:context xml:id="ctx0">
-      <inkml:inkSource xml:id="inkSrc0">
-        <inkml:traceFormat>
-          <inkml:channel name="X" type="integer" min="-2.14748E9" max="2.14748E9" units="cm"/>
-          <inkml:channel name="Y" type="integer" min="-2.14748E9" max="2.14748E9" units="cm"/>
-          <inkml:channel name="F" type="integer" max="32767" units="dev"/>
-        </inkml:traceFormat>
-        <inkml:channelProperties>
-          <inkml:channelProperty channel="X" name="resolution" value="1000" units="1/cm"/>
-          <inkml:channelProperty channel="Y" name="resolution" value="1000" units="1/cm"/>
-          <inkml:channelProperty channel="F" name="resolution" value="0" units="1/dev"/>
-        </inkml:channelProperties>
-      </inkml:inkSource>
-      <inkml:timestamp xml:id="ts0" timeString="2026-04-04T02:04:08.136"/>
-    </inkml:context>
-    <inkml:brush xml:id="br0">
-      <inkml:brushProperty name="width" value="0.035" units="cm"/>
-      <inkml:brushProperty name="height" value="0.035" units="cm"/>
-      <inkml:brushProperty name="color" value="#E71224"/>
-    </inkml:brush>
-  </inkml:definitions>
-  <inkml:trace contextRef="#ctx0" brushRef="#br0">488 0 24575,'-8'54'0,"-17"87"0,-29 81 0,-12 66 0,-2 36-2190,9 11 2190,0-30 0,3-43 0,10-58 703,13-87-703,20-87 361,12-87-361,14-64 0,13-50 0,9-43 0,15-31 0,13-20 0,-3 35-7065</inkml:trace>
 </inkml:ink>
 </file>
 
@@ -4451,61 +4187,40 @@
           <a:chExt cx="0" cy="0"/>
         </a:xfrm>
       </p:grpSpPr>
-      <mc:AlternateContent xmlns:mc="http://schemas.openxmlformats.org/markup-compatibility/2006" xmlns:p14="http://schemas.microsoft.com/office/powerpoint/2010/main">
-        <mc:Choice Requires="p14">
-          <p:contentPart p14:bwMode="auto" r:id="rId2">
-            <p14:nvContentPartPr>
-              <p14:cNvPr id="2" name="잉크 1">
-                <a:extLst>
-                  <a:ext uri="{FF2B5EF4-FFF2-40B4-BE49-F238E27FC236}">
-                    <a16:creationId xmlns:a16="http://schemas.microsoft.com/office/drawing/2014/main" id="{1DE45E18-B6C7-AFA6-D84E-DE750FA43D37}"/>
-                  </a:ext>
-                </a:extLst>
-              </p14:cNvPr>
-              <p14:cNvContentPartPr/>
-              <p14:nvPr/>
-            </p14:nvContentPartPr>
-            <p14:xfrm>
-              <a:off x="1807097" y="1719051"/>
-              <a:ext cx="2607480" cy="2976480"/>
-            </p14:xfrm>
-          </p:contentPart>
-        </mc:Choice>
-        <mc:Fallback xmlns="">
-          <p:pic>
-            <p:nvPicPr>
-              <p:cNvPr id="2" name="잉크 1">
-                <a:extLst>
-                  <a:ext uri="{FF2B5EF4-FFF2-40B4-BE49-F238E27FC236}">
-                    <a16:creationId xmlns:a16="http://schemas.microsoft.com/office/drawing/2014/main" id="{1DE45E18-B6C7-AFA6-D84E-DE750FA43D37}"/>
-                  </a:ext>
-                </a:extLst>
-              </p:cNvPr>
-              <p:cNvPicPr/>
-              <p:nvPr/>
-            </p:nvPicPr>
-            <p:blipFill>
-              <a:blip r:embed="rId3"/>
-              <a:stretch>
-                <a:fillRect/>
-              </a:stretch>
-            </p:blipFill>
-            <p:spPr>
-              <a:xfrm>
-                <a:off x="1800977" y="1712931"/>
-                <a:ext cx="2619720" cy="2988720"/>
-              </a:xfrm>
-              <a:prstGeom prst="rect">
-                <a:avLst/>
-              </a:prstGeom>
-            </p:spPr>
-          </p:pic>
-        </mc:Fallback>
-      </mc:AlternateContent>
+      <p:pic>
+        <p:nvPicPr>
+          <p:cNvPr id="3" name="그림 2">
+            <a:extLst>
+              <a:ext uri="{FF2B5EF4-FFF2-40B4-BE49-F238E27FC236}">
+                <a16:creationId xmlns:a16="http://schemas.microsoft.com/office/drawing/2014/main" id="{90A57725-B9FC-0B8C-BAA2-D6F7D2981612}"/>
+              </a:ext>
+            </a:extLst>
+          </p:cNvPr>
+          <p:cNvPicPr>
+            <a:picLocks noChangeAspect="1"/>
+          </p:cNvPicPr>
+          <p:nvPr/>
+        </p:nvPicPr>
+        <p:blipFill>
+          <a:blip r:embed="rId2"/>
+          <a:stretch>
+            <a:fillRect/>
+          </a:stretch>
+        </p:blipFill>
+        <p:spPr>
+          <a:xfrm>
+            <a:off x="2862262" y="1476375"/>
+            <a:ext cx="6467475" cy="3905250"/>
+          </a:xfrm>
+          <a:prstGeom prst="rect">
+            <a:avLst/>
+          </a:prstGeom>
+        </p:spPr>
+      </p:pic>
     </p:spTree>
     <p:extLst>
       <p:ext uri="{BB962C8B-B14F-4D97-AF65-F5344CB8AC3E}">
-        <p14:creationId xmlns:p14="http://schemas.microsoft.com/office/powerpoint/2010/main" val="3985870967"/>
+        <p14:creationId xmlns:p14="http://schemas.microsoft.com/office/powerpoint/2010/main" val="2178760692"/>
       </p:ext>
     </p:extLst>
   </p:cSld>
@@ -4597,7 +4312,7 @@
           <p:cNvPr id="3" name="그림 2">
             <a:extLst>
               <a:ext uri="{FF2B5EF4-FFF2-40B4-BE49-F238E27FC236}">
-                <a16:creationId xmlns:a16="http://schemas.microsoft.com/office/drawing/2014/main" id="{90A57725-B9FC-0B8C-BAA2-D6F7D2981612}"/>
+                <a16:creationId xmlns:a16="http://schemas.microsoft.com/office/drawing/2014/main" id="{272C8BE5-A674-FC7C-93B9-612D29933A35}"/>
               </a:ext>
             </a:extLst>
           </p:cNvPr>
@@ -4614,8 +4329,38 @@
         </p:blipFill>
         <p:spPr>
           <a:xfrm>
-            <a:off x="2862262" y="1476375"/>
-            <a:ext cx="6467475" cy="3905250"/>
+            <a:off x="532720" y="1062037"/>
+            <a:ext cx="5248275" cy="4733925"/>
+          </a:xfrm>
+          <a:prstGeom prst="rect">
+            <a:avLst/>
+          </a:prstGeom>
+        </p:spPr>
+      </p:pic>
+      <p:pic>
+        <p:nvPicPr>
+          <p:cNvPr id="5" name="그림 4">
+            <a:extLst>
+              <a:ext uri="{FF2B5EF4-FFF2-40B4-BE49-F238E27FC236}">
+                <a16:creationId xmlns:a16="http://schemas.microsoft.com/office/drawing/2014/main" id="{2981A104-E2C3-837B-A02F-9D6EC376BD4C}"/>
+              </a:ext>
+            </a:extLst>
+          </p:cNvPr>
+          <p:cNvPicPr>
+            <a:picLocks noChangeAspect="1"/>
+          </p:cNvPicPr>
+          <p:nvPr/>
+        </p:nvPicPr>
+        <p:blipFill>
+          <a:blip r:embed="rId3"/>
+          <a:stretch>
+            <a:fillRect/>
+          </a:stretch>
+        </p:blipFill>
+        <p:spPr>
+          <a:xfrm>
+            <a:off x="6096000" y="1062037"/>
+            <a:ext cx="5153025" cy="4057650"/>
           </a:xfrm>
           <a:prstGeom prst="rect">
             <a:avLst/>
@@ -4625,7 +4370,7 @@
     </p:spTree>
     <p:extLst>
       <p:ext uri="{BB962C8B-B14F-4D97-AF65-F5344CB8AC3E}">
-        <p14:creationId xmlns:p14="http://schemas.microsoft.com/office/powerpoint/2010/main" val="2178760692"/>
+        <p14:creationId xmlns:p14="http://schemas.microsoft.com/office/powerpoint/2010/main" val="3494483411"/>
       </p:ext>
     </p:extLst>
   </p:cSld>
@@ -4657,7 +4402,7 @@
           <p:cNvPr id="3" name="그림 2">
             <a:extLst>
               <a:ext uri="{FF2B5EF4-FFF2-40B4-BE49-F238E27FC236}">
-                <a16:creationId xmlns:a16="http://schemas.microsoft.com/office/drawing/2014/main" id="{272C8BE5-A674-FC7C-93B9-612D29933A35}"/>
+                <a16:creationId xmlns:a16="http://schemas.microsoft.com/office/drawing/2014/main" id="{F5582293-D0C6-89B3-A2A5-7F64528B3B2A}"/>
               </a:ext>
             </a:extLst>
           </p:cNvPr>
@@ -4674,8 +4419,8 @@
         </p:blipFill>
         <p:spPr>
           <a:xfrm>
-            <a:off x="532720" y="1062037"/>
-            <a:ext cx="5248275" cy="4733925"/>
+            <a:off x="212272" y="873579"/>
+            <a:ext cx="5295900" cy="4686300"/>
           </a:xfrm>
           <a:prstGeom prst="rect">
             <a:avLst/>
@@ -4687,7 +4432,7 @@
           <p:cNvPr id="5" name="그림 4">
             <a:extLst>
               <a:ext uri="{FF2B5EF4-FFF2-40B4-BE49-F238E27FC236}">
-                <a16:creationId xmlns:a16="http://schemas.microsoft.com/office/drawing/2014/main" id="{2981A104-E2C3-837B-A02F-9D6EC376BD4C}"/>
+                <a16:creationId xmlns:a16="http://schemas.microsoft.com/office/drawing/2014/main" id="{078ACE2F-1487-6BD4-6192-3D6E025CC04C}"/>
               </a:ext>
             </a:extLst>
           </p:cNvPr>
@@ -4704,8 +4449,8 @@
         </p:blipFill>
         <p:spPr>
           <a:xfrm>
-            <a:off x="6096000" y="1062037"/>
-            <a:ext cx="5153025" cy="4057650"/>
+            <a:off x="5508172" y="873579"/>
+            <a:ext cx="5905500" cy="4610100"/>
           </a:xfrm>
           <a:prstGeom prst="rect">
             <a:avLst/>
@@ -4715,7 +4460,7 @@
     </p:spTree>
     <p:extLst>
       <p:ext uri="{BB962C8B-B14F-4D97-AF65-F5344CB8AC3E}">
-        <p14:creationId xmlns:p14="http://schemas.microsoft.com/office/powerpoint/2010/main" val="3494483411"/>
+        <p14:creationId xmlns:p14="http://schemas.microsoft.com/office/powerpoint/2010/main" val="1143562275"/>
       </p:ext>
     </p:extLst>
   </p:cSld>
@@ -4747,7 +4492,7 @@
           <p:cNvPr id="3" name="그림 2">
             <a:extLst>
               <a:ext uri="{FF2B5EF4-FFF2-40B4-BE49-F238E27FC236}">
-                <a16:creationId xmlns:a16="http://schemas.microsoft.com/office/drawing/2014/main" id="{F5582293-D0C6-89B3-A2A5-7F64528B3B2A}"/>
+                <a16:creationId xmlns:a16="http://schemas.microsoft.com/office/drawing/2014/main" id="{429CC80C-183B-5889-7D73-7568B466C5DC}"/>
               </a:ext>
             </a:extLst>
           </p:cNvPr>
@@ -4764,8 +4509,8 @@
         </p:blipFill>
         <p:spPr>
           <a:xfrm>
-            <a:off x="212272" y="873579"/>
-            <a:ext cx="5295900" cy="4686300"/>
+            <a:off x="158894" y="933450"/>
+            <a:ext cx="5057775" cy="4991100"/>
           </a:xfrm>
           <a:prstGeom prst="rect">
             <a:avLst/>
@@ -4777,7 +4522,7 @@
           <p:cNvPr id="5" name="그림 4">
             <a:extLst>
               <a:ext uri="{FF2B5EF4-FFF2-40B4-BE49-F238E27FC236}">
-                <a16:creationId xmlns:a16="http://schemas.microsoft.com/office/drawing/2014/main" id="{078ACE2F-1487-6BD4-6192-3D6E025CC04C}"/>
+                <a16:creationId xmlns:a16="http://schemas.microsoft.com/office/drawing/2014/main" id="{52C03D28-2BC2-1EF9-F36C-EDC7A2B206F4}"/>
               </a:ext>
             </a:extLst>
           </p:cNvPr>
@@ -4794,8 +4539,8 @@
         </p:blipFill>
         <p:spPr>
           <a:xfrm>
-            <a:off x="5508172" y="873579"/>
-            <a:ext cx="5905500" cy="4610100"/>
+            <a:off x="5216669" y="933450"/>
+            <a:ext cx="5915025" cy="4819650"/>
           </a:xfrm>
           <a:prstGeom prst="rect">
             <a:avLst/>
@@ -4805,7 +4550,7 @@
     </p:spTree>
     <p:extLst>
       <p:ext uri="{BB962C8B-B14F-4D97-AF65-F5344CB8AC3E}">
-        <p14:creationId xmlns:p14="http://schemas.microsoft.com/office/powerpoint/2010/main" val="1143562275"/>
+        <p14:creationId xmlns:p14="http://schemas.microsoft.com/office/powerpoint/2010/main" val="605378593"/>
       </p:ext>
     </p:extLst>
   </p:cSld>
@@ -4832,10 +4577,70 @@
           <a:chExt cx="0" cy="0"/>
         </a:xfrm>
       </p:grpSpPr>
+      <p:pic>
+        <p:nvPicPr>
+          <p:cNvPr id="3" name="그림 2">
+            <a:extLst>
+              <a:ext uri="{FF2B5EF4-FFF2-40B4-BE49-F238E27FC236}">
+                <a16:creationId xmlns:a16="http://schemas.microsoft.com/office/drawing/2014/main" id="{191ACBE7-A3BF-D2CF-612E-1591C18CCE16}"/>
+              </a:ext>
+            </a:extLst>
+          </p:cNvPr>
+          <p:cNvPicPr>
+            <a:picLocks noChangeAspect="1"/>
+          </p:cNvPicPr>
+          <p:nvPr/>
+        </p:nvPicPr>
+        <p:blipFill>
+          <a:blip r:embed="rId2"/>
+          <a:stretch>
+            <a:fillRect/>
+          </a:stretch>
+        </p:blipFill>
+        <p:spPr>
+          <a:xfrm>
+            <a:off x="369681" y="855209"/>
+            <a:ext cx="5514975" cy="4886325"/>
+          </a:xfrm>
+          <a:prstGeom prst="rect">
+            <a:avLst/>
+          </a:prstGeom>
+        </p:spPr>
+      </p:pic>
+      <p:pic>
+        <p:nvPicPr>
+          <p:cNvPr id="5" name="그림 4">
+            <a:extLst>
+              <a:ext uri="{FF2B5EF4-FFF2-40B4-BE49-F238E27FC236}">
+                <a16:creationId xmlns:a16="http://schemas.microsoft.com/office/drawing/2014/main" id="{1F669488-5FBC-D1CF-EDB4-2293768E9841}"/>
+              </a:ext>
+            </a:extLst>
+          </p:cNvPr>
+          <p:cNvPicPr>
+            <a:picLocks noChangeAspect="1"/>
+          </p:cNvPicPr>
+          <p:nvPr/>
+        </p:nvPicPr>
+        <p:blipFill>
+          <a:blip r:embed="rId3"/>
+          <a:stretch>
+            <a:fillRect/>
+          </a:stretch>
+        </p:blipFill>
+        <p:spPr>
+          <a:xfrm>
+            <a:off x="5638800" y="855209"/>
+            <a:ext cx="6553200" cy="4133850"/>
+          </a:xfrm>
+          <a:prstGeom prst="rect">
+            <a:avLst/>
+          </a:prstGeom>
+        </p:spPr>
+      </p:pic>
     </p:spTree>
     <p:extLst>
       <p:ext uri="{BB962C8B-B14F-4D97-AF65-F5344CB8AC3E}">
-        <p14:creationId xmlns:p14="http://schemas.microsoft.com/office/powerpoint/2010/main" val="605378593"/>
+        <p14:creationId xmlns:p14="http://schemas.microsoft.com/office/powerpoint/2010/main" val="689541781"/>
       </p:ext>
     </p:extLst>
   </p:cSld>
@@ -4862,10 +4667,70 @@
           <a:chExt cx="0" cy="0"/>
         </a:xfrm>
       </p:grpSpPr>
+      <p:pic>
+        <p:nvPicPr>
+          <p:cNvPr id="3" name="그림 2">
+            <a:extLst>
+              <a:ext uri="{FF2B5EF4-FFF2-40B4-BE49-F238E27FC236}">
+                <a16:creationId xmlns:a16="http://schemas.microsoft.com/office/drawing/2014/main" id="{E6262401-269B-67EA-0E71-FFAFCED6A265}"/>
+              </a:ext>
+            </a:extLst>
+          </p:cNvPr>
+          <p:cNvPicPr>
+            <a:picLocks noChangeAspect="1"/>
+          </p:cNvPicPr>
+          <p:nvPr/>
+        </p:nvPicPr>
+        <p:blipFill>
+          <a:blip r:embed="rId2"/>
+          <a:stretch>
+            <a:fillRect/>
+          </a:stretch>
+        </p:blipFill>
+        <p:spPr>
+          <a:xfrm>
+            <a:off x="0" y="834303"/>
+            <a:ext cx="6543675" cy="4524375"/>
+          </a:xfrm>
+          <a:prstGeom prst="rect">
+            <a:avLst/>
+          </a:prstGeom>
+        </p:spPr>
+      </p:pic>
+      <p:pic>
+        <p:nvPicPr>
+          <p:cNvPr id="5" name="그림 4">
+            <a:extLst>
+              <a:ext uri="{FF2B5EF4-FFF2-40B4-BE49-F238E27FC236}">
+                <a16:creationId xmlns:a16="http://schemas.microsoft.com/office/drawing/2014/main" id="{DAC3C5BF-DF0F-3AEE-C53F-3ACE3744EB0E}"/>
+              </a:ext>
+            </a:extLst>
+          </p:cNvPr>
+          <p:cNvPicPr>
+            <a:picLocks noChangeAspect="1"/>
+          </p:cNvPicPr>
+          <p:nvPr/>
+        </p:nvPicPr>
+        <p:blipFill>
+          <a:blip r:embed="rId3"/>
+          <a:stretch>
+            <a:fillRect/>
+          </a:stretch>
+        </p:blipFill>
+        <p:spPr>
+          <a:xfrm>
+            <a:off x="6391275" y="1662483"/>
+            <a:ext cx="5800725" cy="3248025"/>
+          </a:xfrm>
+          <a:prstGeom prst="rect">
+            <a:avLst/>
+          </a:prstGeom>
+        </p:spPr>
+      </p:pic>
     </p:spTree>
     <p:extLst>
       <p:ext uri="{BB962C8B-B14F-4D97-AF65-F5344CB8AC3E}">
-        <p14:creationId xmlns:p14="http://schemas.microsoft.com/office/powerpoint/2010/main" val="689541781"/>
+        <p14:creationId xmlns:p14="http://schemas.microsoft.com/office/powerpoint/2010/main" val="2153754491"/>
       </p:ext>
     </p:extLst>
   </p:cSld>
@@ -4894,10 +4759,10 @@
       </p:grpSpPr>
       <p:pic>
         <p:nvPicPr>
-          <p:cNvPr id="5" name="그림 4">
-            <a:extLst>
-              <a:ext uri="{FF2B5EF4-FFF2-40B4-BE49-F238E27FC236}">
-                <a16:creationId xmlns:a16="http://schemas.microsoft.com/office/drawing/2014/main" id="{8091A294-A7FA-C11A-3AA7-E84F9D541FB7}"/>
+          <p:cNvPr id="3" name="그림 2">
+            <a:extLst>
+              <a:ext uri="{FF2B5EF4-FFF2-40B4-BE49-F238E27FC236}">
+                <a16:creationId xmlns:a16="http://schemas.microsoft.com/office/drawing/2014/main" id="{11CA9135-4ABF-95DA-C308-D4BC597F6BA4}"/>
               </a:ext>
             </a:extLst>
           </p:cNvPr>
@@ -4914,8 +4779,38 @@
         </p:blipFill>
         <p:spPr>
           <a:xfrm>
-            <a:off x="2362200" y="1123950"/>
-            <a:ext cx="7467600" cy="4610100"/>
+            <a:off x="176027" y="1038534"/>
+            <a:ext cx="6496050" cy="4543425"/>
+          </a:xfrm>
+          <a:prstGeom prst="rect">
+            <a:avLst/>
+          </a:prstGeom>
+        </p:spPr>
+      </p:pic>
+      <p:pic>
+        <p:nvPicPr>
+          <p:cNvPr id="5" name="그림 4">
+            <a:extLst>
+              <a:ext uri="{FF2B5EF4-FFF2-40B4-BE49-F238E27FC236}">
+                <a16:creationId xmlns:a16="http://schemas.microsoft.com/office/drawing/2014/main" id="{37465BE0-3F51-FC3A-284B-BC3BCA1E1973}"/>
+              </a:ext>
+            </a:extLst>
+          </p:cNvPr>
+          <p:cNvPicPr>
+            <a:picLocks noChangeAspect="1"/>
+          </p:cNvPicPr>
+          <p:nvPr/>
+        </p:nvPicPr>
+        <p:blipFill>
+          <a:blip r:embed="rId3"/>
+          <a:stretch>
+            <a:fillRect/>
+          </a:stretch>
+        </p:blipFill>
+        <p:spPr>
+          <a:xfrm>
+            <a:off x="6615298" y="857558"/>
+            <a:ext cx="5400675" cy="4905375"/>
           </a:xfrm>
           <a:prstGeom prst="rect">
             <a:avLst/>
@@ -4925,7 +4820,7 @@
     </p:spTree>
     <p:extLst>
       <p:ext uri="{BB962C8B-B14F-4D97-AF65-F5344CB8AC3E}">
-        <p14:creationId xmlns:p14="http://schemas.microsoft.com/office/powerpoint/2010/main" val="431007319"/>
+        <p14:creationId xmlns:p14="http://schemas.microsoft.com/office/powerpoint/2010/main" val="2411256488"/>
       </p:ext>
     </p:extLst>
   </p:cSld>
@@ -4957,7 +4852,7 @@
           <p:cNvPr id="3" name="그림 2">
             <a:extLst>
               <a:ext uri="{FF2B5EF4-FFF2-40B4-BE49-F238E27FC236}">
-                <a16:creationId xmlns:a16="http://schemas.microsoft.com/office/drawing/2014/main" id="{722B99A1-04D2-7ADF-98FE-CF7216AB4E2E}"/>
+                <a16:creationId xmlns:a16="http://schemas.microsoft.com/office/drawing/2014/main" id="{DE33A67D-CD28-8053-B9F0-920EA4086538}"/>
               </a:ext>
             </a:extLst>
           </p:cNvPr>
@@ -4974,8 +4869,8 @@
         </p:blipFill>
         <p:spPr>
           <a:xfrm>
-            <a:off x="2595562" y="990600"/>
-            <a:ext cx="7000875" cy="4876800"/>
+            <a:off x="2767012" y="995362"/>
+            <a:ext cx="6657975" cy="4867275"/>
           </a:xfrm>
           <a:prstGeom prst="rect">
             <a:avLst/>
@@ -4985,7 +4880,7 @@
     </p:spTree>
     <p:extLst>
       <p:ext uri="{BB962C8B-B14F-4D97-AF65-F5344CB8AC3E}">
-        <p14:creationId xmlns:p14="http://schemas.microsoft.com/office/powerpoint/2010/main" val="2555125669"/>
+        <p14:creationId xmlns:p14="http://schemas.microsoft.com/office/powerpoint/2010/main" val="2305597726"/>
       </p:ext>
     </p:extLst>
   </p:cSld>
@@ -5017,7 +4912,7 @@
           <p:cNvPr id="3" name="그림 2">
             <a:extLst>
               <a:ext uri="{FF2B5EF4-FFF2-40B4-BE49-F238E27FC236}">
-                <a16:creationId xmlns:a16="http://schemas.microsoft.com/office/drawing/2014/main" id="{DB2752E3-431D-74D0-9B3B-5B6928688B21}"/>
+                <a16:creationId xmlns:a16="http://schemas.microsoft.com/office/drawing/2014/main" id="{06F25265-FCCD-FB50-11FD-C8884D6E87CD}"/>
               </a:ext>
             </a:extLst>
           </p:cNvPr>
@@ -5034,8 +4929,8 @@
         </p:blipFill>
         <p:spPr>
           <a:xfrm>
-            <a:off x="2786062" y="828675"/>
-            <a:ext cx="6619875" cy="5200650"/>
+            <a:off x="2728912" y="985837"/>
+            <a:ext cx="6734175" cy="4886325"/>
           </a:xfrm>
           <a:prstGeom prst="rect">
             <a:avLst/>
@@ -5045,7 +4940,7 @@
     </p:spTree>
     <p:extLst>
       <p:ext uri="{BB962C8B-B14F-4D97-AF65-F5344CB8AC3E}">
-        <p14:creationId xmlns:p14="http://schemas.microsoft.com/office/powerpoint/2010/main" val="362157702"/>
+        <p14:creationId xmlns:p14="http://schemas.microsoft.com/office/powerpoint/2010/main" val="3365802486"/>
       </p:ext>
     </p:extLst>
   </p:cSld>
@@ -5077,7 +4972,7 @@
           <p:cNvPr id="3" name="그림 2">
             <a:extLst>
               <a:ext uri="{FF2B5EF4-FFF2-40B4-BE49-F238E27FC236}">
-                <a16:creationId xmlns:a16="http://schemas.microsoft.com/office/drawing/2014/main" id="{63F07927-45B8-4E70-9B39-5562BE7FB8A8}"/>
+                <a16:creationId xmlns:a16="http://schemas.microsoft.com/office/drawing/2014/main" id="{9840CFD0-5C00-B654-B216-588FEF8BD7BA}"/>
               </a:ext>
             </a:extLst>
           </p:cNvPr>
@@ -5094,8 +4989,8 @@
         </p:blipFill>
         <p:spPr>
           <a:xfrm>
-            <a:off x="3133725" y="1090612"/>
-            <a:ext cx="5924550" cy="4676775"/>
+            <a:off x="3119437" y="1257300"/>
+            <a:ext cx="5953125" cy="4343400"/>
           </a:xfrm>
           <a:prstGeom prst="rect">
             <a:avLst/>
@@ -5105,7 +5000,7 @@
     </p:spTree>
     <p:extLst>
       <p:ext uri="{BB962C8B-B14F-4D97-AF65-F5344CB8AC3E}">
-        <p14:creationId xmlns:p14="http://schemas.microsoft.com/office/powerpoint/2010/main" val="171160837"/>
+        <p14:creationId xmlns:p14="http://schemas.microsoft.com/office/powerpoint/2010/main" val="2882643047"/>
       </p:ext>
     </p:extLst>
   </p:cSld>
@@ -5137,7 +5032,7 @@
           <p:cNvPr id="3" name="그림 2">
             <a:extLst>
               <a:ext uri="{FF2B5EF4-FFF2-40B4-BE49-F238E27FC236}">
-                <a16:creationId xmlns:a16="http://schemas.microsoft.com/office/drawing/2014/main" id="{E76B9057-EEC8-0B57-BA02-37BF17E3D690}"/>
+                <a16:creationId xmlns:a16="http://schemas.microsoft.com/office/drawing/2014/main" id="{4E215B82-E5D9-E682-FBFC-2DEA109DACEE}"/>
               </a:ext>
             </a:extLst>
           </p:cNvPr>
@@ -5154,8 +5049,8 @@
         </p:blipFill>
         <p:spPr>
           <a:xfrm>
-            <a:off x="2543175" y="990600"/>
-            <a:ext cx="7105650" cy="4876800"/>
+            <a:off x="2676525" y="1052512"/>
+            <a:ext cx="6838950" cy="4752975"/>
           </a:xfrm>
           <a:prstGeom prst="rect">
             <a:avLst/>
@@ -5165,7 +5060,7 @@
     </p:spTree>
     <p:extLst>
       <p:ext uri="{BB962C8B-B14F-4D97-AF65-F5344CB8AC3E}">
-        <p14:creationId xmlns:p14="http://schemas.microsoft.com/office/powerpoint/2010/main" val="614989378"/>
+        <p14:creationId xmlns:p14="http://schemas.microsoft.com/office/powerpoint/2010/main" val="1804338723"/>
       </p:ext>
     </p:extLst>
   </p:cSld>
@@ -5487,7 +5382,7 @@
           <p:cNvPr id="3" name="그림 2">
             <a:extLst>
               <a:ext uri="{FF2B5EF4-FFF2-40B4-BE49-F238E27FC236}">
-                <a16:creationId xmlns:a16="http://schemas.microsoft.com/office/drawing/2014/main" id="{D62B99F0-A5A1-1AE6-FA56-7AE59E48A157}"/>
+                <a16:creationId xmlns:a16="http://schemas.microsoft.com/office/drawing/2014/main" id="{3C17CFEA-BC68-6CED-4EA9-97849175D680}"/>
               </a:ext>
             </a:extLst>
           </p:cNvPr>
@@ -5504,8 +5399,8 @@
         </p:blipFill>
         <p:spPr>
           <a:xfrm>
-            <a:off x="2695575" y="1000125"/>
-            <a:ext cx="6800850" cy="4857750"/>
+            <a:off x="3419475" y="1071562"/>
+            <a:ext cx="5353050" cy="4714875"/>
           </a:xfrm>
           <a:prstGeom prst="rect">
             <a:avLst/>
@@ -5515,7 +5410,7 @@
     </p:spTree>
     <p:extLst>
       <p:ext uri="{BB962C8B-B14F-4D97-AF65-F5344CB8AC3E}">
-        <p14:creationId xmlns:p14="http://schemas.microsoft.com/office/powerpoint/2010/main" val="3985065081"/>
+        <p14:creationId xmlns:p14="http://schemas.microsoft.com/office/powerpoint/2010/main" val="1640617648"/>
       </p:ext>
     </p:extLst>
   </p:cSld>
@@ -5547,7 +5442,7 @@
           <p:cNvPr id="3" name="그림 2">
             <a:extLst>
               <a:ext uri="{FF2B5EF4-FFF2-40B4-BE49-F238E27FC236}">
-                <a16:creationId xmlns:a16="http://schemas.microsoft.com/office/drawing/2014/main" id="{4DF74AC7-B380-84F9-44AA-8D31FDE49848}"/>
+                <a16:creationId xmlns:a16="http://schemas.microsoft.com/office/drawing/2014/main" id="{D92780BA-2FF8-283A-CD3E-D79FEE641C84}"/>
               </a:ext>
             </a:extLst>
           </p:cNvPr>
@@ -5564,8 +5459,8 @@
         </p:blipFill>
         <p:spPr>
           <a:xfrm>
-            <a:off x="2481262" y="852487"/>
-            <a:ext cx="7229475" cy="5153025"/>
+            <a:off x="3700462" y="857250"/>
+            <a:ext cx="4791075" cy="5143500"/>
           </a:xfrm>
           <a:prstGeom prst="rect">
             <a:avLst/>
@@ -5575,7 +5470,7 @@
     </p:spTree>
     <p:extLst>
       <p:ext uri="{BB962C8B-B14F-4D97-AF65-F5344CB8AC3E}">
-        <p14:creationId xmlns:p14="http://schemas.microsoft.com/office/powerpoint/2010/main" val="126600485"/>
+        <p14:creationId xmlns:p14="http://schemas.microsoft.com/office/powerpoint/2010/main" val="2829901995"/>
       </p:ext>
     </p:extLst>
   </p:cSld>
@@ -5602,10 +5497,40 @@
           <a:chExt cx="0" cy="0"/>
         </a:xfrm>
       </p:grpSpPr>
+      <p:pic>
+        <p:nvPicPr>
+          <p:cNvPr id="3" name="그림 2">
+            <a:extLst>
+              <a:ext uri="{FF2B5EF4-FFF2-40B4-BE49-F238E27FC236}">
+                <a16:creationId xmlns:a16="http://schemas.microsoft.com/office/drawing/2014/main" id="{4C57D79A-2A7A-9314-04C5-A96F9F80AAC1}"/>
+              </a:ext>
+            </a:extLst>
+          </p:cNvPr>
+          <p:cNvPicPr>
+            <a:picLocks noChangeAspect="1"/>
+          </p:cNvPicPr>
+          <p:nvPr/>
+        </p:nvPicPr>
+        <p:blipFill>
+          <a:blip r:embed="rId2"/>
+          <a:stretch>
+            <a:fillRect/>
+          </a:stretch>
+        </p:blipFill>
+        <p:spPr>
+          <a:xfrm>
+            <a:off x="3214687" y="1200150"/>
+            <a:ext cx="5762625" cy="4457700"/>
+          </a:xfrm>
+          <a:prstGeom prst="rect">
+            <a:avLst/>
+          </a:prstGeom>
+        </p:spPr>
+      </p:pic>
     </p:spTree>
     <p:extLst>
       <p:ext uri="{BB962C8B-B14F-4D97-AF65-F5344CB8AC3E}">
-        <p14:creationId xmlns:p14="http://schemas.microsoft.com/office/powerpoint/2010/main" val="1603570604"/>
+        <p14:creationId xmlns:p14="http://schemas.microsoft.com/office/powerpoint/2010/main" val="792440868"/>
       </p:ext>
     </p:extLst>
   </p:cSld>
@@ -5632,490 +5557,40 @@
           <a:chExt cx="0" cy="0"/>
         </a:xfrm>
       </p:grpSpPr>
-      <p:grpSp>
-        <p:nvGrpSpPr>
-          <p:cNvPr id="13" name="그룹 12">
-            <a:extLst>
-              <a:ext uri="{FF2B5EF4-FFF2-40B4-BE49-F238E27FC236}">
-                <a16:creationId xmlns:a16="http://schemas.microsoft.com/office/drawing/2014/main" id="{0AE9BBBB-8385-F969-BF13-BF84B7042698}"/>
-              </a:ext>
-            </a:extLst>
-          </p:cNvPr>
-          <p:cNvGrpSpPr/>
+      <p:pic>
+        <p:nvPicPr>
+          <p:cNvPr id="3" name="그림 2">
+            <a:extLst>
+              <a:ext uri="{FF2B5EF4-FFF2-40B4-BE49-F238E27FC236}">
+                <a16:creationId xmlns:a16="http://schemas.microsoft.com/office/drawing/2014/main" id="{8009DDAD-B69A-F68C-463F-7E8E6DF29451}"/>
+              </a:ext>
+            </a:extLst>
+          </p:cNvPr>
+          <p:cNvPicPr>
+            <a:picLocks noChangeAspect="1"/>
+          </p:cNvPicPr>
           <p:nvPr/>
-        </p:nvGrpSpPr>
-        <p:grpSpPr>
-          <a:xfrm>
-            <a:off x="1291937" y="1108851"/>
-            <a:ext cx="9290160" cy="2640240"/>
-            <a:chOff x="1291937" y="1108851"/>
-            <a:chExt cx="9290160" cy="2640240"/>
-          </a:xfrm>
-        </p:grpSpPr>
-        <mc:AlternateContent xmlns:mc="http://schemas.openxmlformats.org/markup-compatibility/2006" xmlns:p14="http://schemas.microsoft.com/office/powerpoint/2010/main">
-          <mc:Choice Requires="p14">
-            <p:contentPart p14:bwMode="auto" r:id="rId2">
-              <p14:nvContentPartPr>
-                <p14:cNvPr id="3" name="잉크 2">
-                  <a:extLst>
-                    <a:ext uri="{FF2B5EF4-FFF2-40B4-BE49-F238E27FC236}">
-                      <a16:creationId xmlns:a16="http://schemas.microsoft.com/office/drawing/2014/main" id="{8736A125-3799-F82F-A2D5-3D894FFA6F0B}"/>
-                    </a:ext>
-                  </a:extLst>
-                </p14:cNvPr>
-                <p14:cNvContentPartPr/>
-                <p14:nvPr/>
-              </p14:nvContentPartPr>
-              <p14:xfrm>
-                <a:off x="1291937" y="1108851"/>
-                <a:ext cx="2638800" cy="2640240"/>
-              </p14:xfrm>
-            </p:contentPart>
-          </mc:Choice>
-          <mc:Fallback xmlns="">
-            <p:pic>
-              <p:nvPicPr>
-                <p:cNvPr id="3" name="잉크 2">
-                  <a:extLst>
-                    <a:ext uri="{FF2B5EF4-FFF2-40B4-BE49-F238E27FC236}">
-                      <a16:creationId xmlns:a16="http://schemas.microsoft.com/office/drawing/2014/main" id="{8736A125-3799-F82F-A2D5-3D894FFA6F0B}"/>
-                    </a:ext>
-                  </a:extLst>
-                </p:cNvPr>
-                <p:cNvPicPr/>
-                <p:nvPr/>
-              </p:nvPicPr>
-              <p:blipFill>
-                <a:blip r:embed="rId3"/>
-                <a:stretch>
-                  <a:fillRect/>
-                </a:stretch>
-              </p:blipFill>
-              <p:spPr>
-                <a:xfrm>
-                  <a:off x="1285817" y="1102731"/>
-                  <a:ext cx="2651040" cy="2652480"/>
-                </a:xfrm>
-                <a:prstGeom prst="rect">
-                  <a:avLst/>
-                </a:prstGeom>
-              </p:spPr>
-            </p:pic>
-          </mc:Fallback>
-        </mc:AlternateContent>
-        <mc:AlternateContent xmlns:mc="http://schemas.openxmlformats.org/markup-compatibility/2006" xmlns:p14="http://schemas.microsoft.com/office/powerpoint/2010/main">
-          <mc:Choice Requires="p14">
-            <p:contentPart p14:bwMode="auto" r:id="rId4">
-              <p14:nvContentPartPr>
-                <p14:cNvPr id="4" name="잉크 3">
-                  <a:extLst>
-                    <a:ext uri="{FF2B5EF4-FFF2-40B4-BE49-F238E27FC236}">
-                      <a16:creationId xmlns:a16="http://schemas.microsoft.com/office/drawing/2014/main" id="{DC953EFE-B106-15FF-70A0-24FDFEF4F1F6}"/>
-                    </a:ext>
-                  </a:extLst>
-                </p14:cNvPr>
-                <p14:cNvContentPartPr/>
-                <p14:nvPr/>
-              </p14:nvContentPartPr>
-              <p14:xfrm>
-                <a:off x="5600057" y="1724451"/>
-                <a:ext cx="906840" cy="1157400"/>
-              </p14:xfrm>
-            </p:contentPart>
-          </mc:Choice>
-          <mc:Fallback xmlns="">
-            <p:pic>
-              <p:nvPicPr>
-                <p:cNvPr id="4" name="잉크 3">
-                  <a:extLst>
-                    <a:ext uri="{FF2B5EF4-FFF2-40B4-BE49-F238E27FC236}">
-                      <a16:creationId xmlns:a16="http://schemas.microsoft.com/office/drawing/2014/main" id="{DC953EFE-B106-15FF-70A0-24FDFEF4F1F6}"/>
-                    </a:ext>
-                  </a:extLst>
-                </p:cNvPr>
-                <p:cNvPicPr/>
-                <p:nvPr/>
-              </p:nvPicPr>
-              <p:blipFill>
-                <a:blip r:embed="rId5"/>
-                <a:stretch>
-                  <a:fillRect/>
-                </a:stretch>
-              </p:blipFill>
-              <p:spPr>
-                <a:xfrm>
-                  <a:off x="5593937" y="1718331"/>
-                  <a:ext cx="919080" cy="1169640"/>
-                </a:xfrm>
-                <a:prstGeom prst="rect">
-                  <a:avLst/>
-                </a:prstGeom>
-              </p:spPr>
-            </p:pic>
-          </mc:Fallback>
-        </mc:AlternateContent>
-        <mc:AlternateContent xmlns:mc="http://schemas.openxmlformats.org/markup-compatibility/2006" xmlns:p14="http://schemas.microsoft.com/office/powerpoint/2010/main">
-          <mc:Choice Requires="p14">
-            <p:contentPart p14:bwMode="auto" r:id="rId6">
-              <p14:nvContentPartPr>
-                <p14:cNvPr id="5" name="잉크 4">
-                  <a:extLst>
-                    <a:ext uri="{FF2B5EF4-FFF2-40B4-BE49-F238E27FC236}">
-                      <a16:creationId xmlns:a16="http://schemas.microsoft.com/office/drawing/2014/main" id="{745B7714-4277-1632-7C80-FFFF159E8F0A}"/>
-                    </a:ext>
-                  </a:extLst>
-                </p14:cNvPr>
-                <p14:cNvContentPartPr/>
-                <p14:nvPr/>
-              </p14:nvContentPartPr>
-              <p14:xfrm>
-                <a:off x="6171377" y="2335731"/>
-                <a:ext cx="757440" cy="162000"/>
-              </p14:xfrm>
-            </p:contentPart>
-          </mc:Choice>
-          <mc:Fallback xmlns="">
-            <p:pic>
-              <p:nvPicPr>
-                <p:cNvPr id="5" name="잉크 4">
-                  <a:extLst>
-                    <a:ext uri="{FF2B5EF4-FFF2-40B4-BE49-F238E27FC236}">
-                      <a16:creationId xmlns:a16="http://schemas.microsoft.com/office/drawing/2014/main" id="{745B7714-4277-1632-7C80-FFFF159E8F0A}"/>
-                    </a:ext>
-                  </a:extLst>
-                </p:cNvPr>
-                <p:cNvPicPr/>
-                <p:nvPr/>
-              </p:nvPicPr>
-              <p:blipFill>
-                <a:blip r:embed="rId7"/>
-                <a:stretch>
-                  <a:fillRect/>
-                </a:stretch>
-              </p:blipFill>
-              <p:spPr>
-                <a:xfrm>
-                  <a:off x="6165257" y="2329611"/>
-                  <a:ext cx="769680" cy="174240"/>
-                </a:xfrm>
-                <a:prstGeom prst="rect">
-                  <a:avLst/>
-                </a:prstGeom>
-              </p:spPr>
-            </p:pic>
-          </mc:Fallback>
-        </mc:AlternateContent>
-        <mc:AlternateContent xmlns:mc="http://schemas.openxmlformats.org/markup-compatibility/2006" xmlns:p14="http://schemas.microsoft.com/office/powerpoint/2010/main">
-          <mc:Choice Requires="p14">
-            <p:contentPart p14:bwMode="auto" r:id="rId8">
-              <p14:nvContentPartPr>
-                <p14:cNvPr id="6" name="잉크 5">
-                  <a:extLst>
-                    <a:ext uri="{FF2B5EF4-FFF2-40B4-BE49-F238E27FC236}">
-                      <a16:creationId xmlns:a16="http://schemas.microsoft.com/office/drawing/2014/main" id="{C7D12407-7BC0-27F6-AA6D-247463BF24F8}"/>
-                    </a:ext>
-                  </a:extLst>
-                </p14:cNvPr>
-                <p14:cNvContentPartPr/>
-                <p14:nvPr/>
-              </p14:nvContentPartPr>
-              <p14:xfrm>
-                <a:off x="5894177" y="3116211"/>
-                <a:ext cx="1332720" cy="529560"/>
-              </p14:xfrm>
-            </p:contentPart>
-          </mc:Choice>
-          <mc:Fallback xmlns="">
-            <p:pic>
-              <p:nvPicPr>
-                <p:cNvPr id="6" name="잉크 5">
-                  <a:extLst>
-                    <a:ext uri="{FF2B5EF4-FFF2-40B4-BE49-F238E27FC236}">
-                      <a16:creationId xmlns:a16="http://schemas.microsoft.com/office/drawing/2014/main" id="{C7D12407-7BC0-27F6-AA6D-247463BF24F8}"/>
-                    </a:ext>
-                  </a:extLst>
-                </p:cNvPr>
-                <p:cNvPicPr/>
-                <p:nvPr/>
-              </p:nvPicPr>
-              <p:blipFill>
-                <a:blip r:embed="rId9"/>
-                <a:stretch>
-                  <a:fillRect/>
-                </a:stretch>
-              </p:blipFill>
-              <p:spPr>
-                <a:xfrm>
-                  <a:off x="5888057" y="3110091"/>
-                  <a:ext cx="1344960" cy="541800"/>
-                </a:xfrm>
-                <a:prstGeom prst="rect">
-                  <a:avLst/>
-                </a:prstGeom>
-              </p:spPr>
-            </p:pic>
-          </mc:Fallback>
-        </mc:AlternateContent>
-        <mc:AlternateContent xmlns:mc="http://schemas.openxmlformats.org/markup-compatibility/2006" xmlns:p14="http://schemas.microsoft.com/office/powerpoint/2010/main">
-          <mc:Choice Requires="p14">
-            <p:contentPart p14:bwMode="auto" r:id="rId10">
-              <p14:nvContentPartPr>
-                <p14:cNvPr id="7" name="잉크 6">
-                  <a:extLst>
-                    <a:ext uri="{FF2B5EF4-FFF2-40B4-BE49-F238E27FC236}">
-                      <a16:creationId xmlns:a16="http://schemas.microsoft.com/office/drawing/2014/main" id="{5FA6D897-A688-A225-CD0E-4248031150B3}"/>
-                    </a:ext>
-                  </a:extLst>
-                </p14:cNvPr>
-                <p14:cNvContentPartPr/>
-                <p14:nvPr/>
-              </p14:nvContentPartPr>
-              <p14:xfrm>
-                <a:off x="5829017" y="2875011"/>
-                <a:ext cx="1041840" cy="178200"/>
-              </p14:xfrm>
-            </p:contentPart>
-          </mc:Choice>
-          <mc:Fallback xmlns="">
-            <p:pic>
-              <p:nvPicPr>
-                <p:cNvPr id="7" name="잉크 6">
-                  <a:extLst>
-                    <a:ext uri="{FF2B5EF4-FFF2-40B4-BE49-F238E27FC236}">
-                      <a16:creationId xmlns:a16="http://schemas.microsoft.com/office/drawing/2014/main" id="{5FA6D897-A688-A225-CD0E-4248031150B3}"/>
-                    </a:ext>
-                  </a:extLst>
-                </p:cNvPr>
-                <p:cNvPicPr/>
-                <p:nvPr/>
-              </p:nvPicPr>
-              <p:blipFill>
-                <a:blip r:embed="rId11"/>
-                <a:stretch>
-                  <a:fillRect/>
-                </a:stretch>
-              </p:blipFill>
-              <p:spPr>
-                <a:xfrm>
-                  <a:off x="5822897" y="2868891"/>
-                  <a:ext cx="1054080" cy="190440"/>
-                </a:xfrm>
-                <a:prstGeom prst="rect">
-                  <a:avLst/>
-                </a:prstGeom>
-              </p:spPr>
-            </p:pic>
-          </mc:Fallback>
-        </mc:AlternateContent>
-        <mc:AlternateContent xmlns:mc="http://schemas.openxmlformats.org/markup-compatibility/2006" xmlns:p14="http://schemas.microsoft.com/office/powerpoint/2010/main">
-          <mc:Choice Requires="p14">
-            <p:contentPart p14:bwMode="auto" r:id="rId12">
-              <p14:nvContentPartPr>
-                <p14:cNvPr id="8" name="잉크 7">
-                  <a:extLst>
-                    <a:ext uri="{FF2B5EF4-FFF2-40B4-BE49-F238E27FC236}">
-                      <a16:creationId xmlns:a16="http://schemas.microsoft.com/office/drawing/2014/main" id="{2199A884-5C5D-CB5B-7C24-9923C783A7AD}"/>
-                    </a:ext>
-                  </a:extLst>
-                </p14:cNvPr>
-                <p14:cNvContentPartPr/>
-                <p14:nvPr/>
-              </p14:nvContentPartPr>
-              <p14:xfrm>
-                <a:off x="7254977" y="2007051"/>
-                <a:ext cx="1618920" cy="1202400"/>
-              </p14:xfrm>
-            </p:contentPart>
-          </mc:Choice>
-          <mc:Fallback xmlns="">
-            <p:pic>
-              <p:nvPicPr>
-                <p:cNvPr id="8" name="잉크 7">
-                  <a:extLst>
-                    <a:ext uri="{FF2B5EF4-FFF2-40B4-BE49-F238E27FC236}">
-                      <a16:creationId xmlns:a16="http://schemas.microsoft.com/office/drawing/2014/main" id="{2199A884-5C5D-CB5B-7C24-9923C783A7AD}"/>
-                    </a:ext>
-                  </a:extLst>
-                </p:cNvPr>
-                <p:cNvPicPr/>
-                <p:nvPr/>
-              </p:nvPicPr>
-              <p:blipFill>
-                <a:blip r:embed="rId13"/>
-                <a:stretch>
-                  <a:fillRect/>
-                </a:stretch>
-              </p:blipFill>
-              <p:spPr>
-                <a:xfrm>
-                  <a:off x="7248857" y="2000931"/>
-                  <a:ext cx="1631160" cy="1214640"/>
-                </a:xfrm>
-                <a:prstGeom prst="rect">
-                  <a:avLst/>
-                </a:prstGeom>
-              </p:spPr>
-            </p:pic>
-          </mc:Fallback>
-        </mc:AlternateContent>
-        <mc:AlternateContent xmlns:mc="http://schemas.openxmlformats.org/markup-compatibility/2006" xmlns:p14="http://schemas.microsoft.com/office/powerpoint/2010/main">
-          <mc:Choice Requires="p14">
-            <p:contentPart p14:bwMode="auto" r:id="rId14">
-              <p14:nvContentPartPr>
-                <p14:cNvPr id="9" name="잉크 8">
-                  <a:extLst>
-                    <a:ext uri="{FF2B5EF4-FFF2-40B4-BE49-F238E27FC236}">
-                      <a16:creationId xmlns:a16="http://schemas.microsoft.com/office/drawing/2014/main" id="{79DE26ED-DD48-4A79-BFCE-28101EB38771}"/>
-                    </a:ext>
-                  </a:extLst>
-                </p14:cNvPr>
-                <p14:cNvContentPartPr/>
-                <p14:nvPr/>
-              </p14:nvContentPartPr>
-              <p14:xfrm>
-                <a:off x="7412657" y="2049171"/>
-                <a:ext cx="407880" cy="89640"/>
-              </p14:xfrm>
-            </p:contentPart>
-          </mc:Choice>
-          <mc:Fallback xmlns="">
-            <p:pic>
-              <p:nvPicPr>
-                <p:cNvPr id="9" name="잉크 8">
-                  <a:extLst>
-                    <a:ext uri="{FF2B5EF4-FFF2-40B4-BE49-F238E27FC236}">
-                      <a16:creationId xmlns:a16="http://schemas.microsoft.com/office/drawing/2014/main" id="{79DE26ED-DD48-4A79-BFCE-28101EB38771}"/>
-                    </a:ext>
-                  </a:extLst>
-                </p:cNvPr>
-                <p:cNvPicPr/>
-                <p:nvPr/>
-              </p:nvPicPr>
-              <p:blipFill>
-                <a:blip r:embed="rId15"/>
-                <a:stretch>
-                  <a:fillRect/>
-                </a:stretch>
-              </p:blipFill>
-              <p:spPr>
-                <a:xfrm>
-                  <a:off x="7406537" y="2043051"/>
-                  <a:ext cx="420120" cy="101880"/>
-                </a:xfrm>
-                <a:prstGeom prst="rect">
-                  <a:avLst/>
-                </a:prstGeom>
-              </p:spPr>
-            </p:pic>
-          </mc:Fallback>
-        </mc:AlternateContent>
-        <mc:AlternateContent xmlns:mc="http://schemas.openxmlformats.org/markup-compatibility/2006" xmlns:p14="http://schemas.microsoft.com/office/powerpoint/2010/main">
-          <mc:Choice Requires="p14">
-            <p:contentPart p14:bwMode="auto" r:id="rId16">
-              <p14:nvContentPartPr>
-                <p14:cNvPr id="10" name="잉크 9">
-                  <a:extLst>
-                    <a:ext uri="{FF2B5EF4-FFF2-40B4-BE49-F238E27FC236}">
-                      <a16:creationId xmlns:a16="http://schemas.microsoft.com/office/drawing/2014/main" id="{9F5A7807-4916-6AA0-2A52-4B9BBC468B0D}"/>
-                    </a:ext>
-                  </a:extLst>
-                </p14:cNvPr>
-                <p14:cNvContentPartPr/>
-                <p14:nvPr/>
-              </p14:nvContentPartPr>
-              <p14:xfrm>
-                <a:off x="9539537" y="2057091"/>
-                <a:ext cx="176040" cy="821880"/>
-              </p14:xfrm>
-            </p:contentPart>
-          </mc:Choice>
-          <mc:Fallback xmlns="">
-            <p:pic>
-              <p:nvPicPr>
-                <p:cNvPr id="10" name="잉크 9">
-                  <a:extLst>
-                    <a:ext uri="{FF2B5EF4-FFF2-40B4-BE49-F238E27FC236}">
-                      <a16:creationId xmlns:a16="http://schemas.microsoft.com/office/drawing/2014/main" id="{9F5A7807-4916-6AA0-2A52-4B9BBC468B0D}"/>
-                    </a:ext>
-                  </a:extLst>
-                </p:cNvPr>
-                <p:cNvPicPr/>
-                <p:nvPr/>
-              </p:nvPicPr>
-              <p:blipFill>
-                <a:blip r:embed="rId17"/>
-                <a:stretch>
-                  <a:fillRect/>
-                </a:stretch>
-              </p:blipFill>
-              <p:spPr>
-                <a:xfrm>
-                  <a:off x="9533417" y="2050971"/>
-                  <a:ext cx="188280" cy="834120"/>
-                </a:xfrm>
-                <a:prstGeom prst="rect">
-                  <a:avLst/>
-                </a:prstGeom>
-              </p:spPr>
-            </p:pic>
-          </mc:Fallback>
-        </mc:AlternateContent>
-        <mc:AlternateContent xmlns:mc="http://schemas.openxmlformats.org/markup-compatibility/2006" xmlns:p14="http://schemas.microsoft.com/office/powerpoint/2010/main">
-          <mc:Choice Requires="p14">
-            <p:contentPart p14:bwMode="auto" r:id="rId18">
-              <p14:nvContentPartPr>
-                <p14:cNvPr id="11" name="잉크 10">
-                  <a:extLst>
-                    <a:ext uri="{FF2B5EF4-FFF2-40B4-BE49-F238E27FC236}">
-                      <a16:creationId xmlns:a16="http://schemas.microsoft.com/office/drawing/2014/main" id="{E8397041-FC7F-E9B3-4C69-B5DF81177AE0}"/>
-                    </a:ext>
-                  </a:extLst>
-                </p14:cNvPr>
-                <p14:cNvContentPartPr/>
-                <p14:nvPr/>
-              </p14:nvContentPartPr>
-              <p14:xfrm>
-                <a:off x="9159377" y="2187771"/>
-                <a:ext cx="1422720" cy="1011240"/>
-              </p14:xfrm>
-            </p:contentPart>
-          </mc:Choice>
-          <mc:Fallback xmlns="">
-            <p:pic>
-              <p:nvPicPr>
-                <p:cNvPr id="11" name="잉크 10">
-                  <a:extLst>
-                    <a:ext uri="{FF2B5EF4-FFF2-40B4-BE49-F238E27FC236}">
-                      <a16:creationId xmlns:a16="http://schemas.microsoft.com/office/drawing/2014/main" id="{E8397041-FC7F-E9B3-4C69-B5DF81177AE0}"/>
-                    </a:ext>
-                  </a:extLst>
-                </p:cNvPr>
-                <p:cNvPicPr/>
-                <p:nvPr/>
-              </p:nvPicPr>
-              <p:blipFill>
-                <a:blip r:embed="rId19"/>
-                <a:stretch>
-                  <a:fillRect/>
-                </a:stretch>
-              </p:blipFill>
-              <p:spPr>
-                <a:xfrm>
-                  <a:off x="9153257" y="2181651"/>
-                  <a:ext cx="1434960" cy="1023480"/>
-                </a:xfrm>
-                <a:prstGeom prst="rect">
-                  <a:avLst/>
-                </a:prstGeom>
-              </p:spPr>
-            </p:pic>
-          </mc:Fallback>
-        </mc:AlternateContent>
-      </p:grpSp>
+        </p:nvPicPr>
+        <p:blipFill>
+          <a:blip r:embed="rId2"/>
+          <a:stretch>
+            <a:fillRect/>
+          </a:stretch>
+        </p:blipFill>
+        <p:spPr>
+          <a:xfrm>
+            <a:off x="2776537" y="1042987"/>
+            <a:ext cx="6638925" cy="4772025"/>
+          </a:xfrm>
+          <a:prstGeom prst="rect">
+            <a:avLst/>
+          </a:prstGeom>
+        </p:spPr>
+      </p:pic>
     </p:spTree>
     <p:extLst>
       <p:ext uri="{BB962C8B-B14F-4D97-AF65-F5344CB8AC3E}">
-        <p14:creationId xmlns:p14="http://schemas.microsoft.com/office/powerpoint/2010/main" val="4234085007"/>
+        <p14:creationId xmlns:p14="http://schemas.microsoft.com/office/powerpoint/2010/main" val="1453987731"/>
       </p:ext>
     </p:extLst>
   </p:cSld>
@@ -6126,6 +5601,666 @@
 </file>
 
 <file path=ppt/slides/slide34.xml><?xml version="1.0" encoding="utf-8"?>
+<p:sld xmlns:a="http://schemas.openxmlformats.org/drawingml/2006/main" xmlns:r="http://schemas.openxmlformats.org/officeDocument/2006/relationships" xmlns:p="http://schemas.openxmlformats.org/presentationml/2006/main">
+  <p:cSld>
+    <p:spTree>
+      <p:nvGrpSpPr>
+        <p:cNvPr id="1" name=""/>
+        <p:cNvGrpSpPr/>
+        <p:nvPr/>
+      </p:nvGrpSpPr>
+      <p:grpSpPr>
+        <a:xfrm>
+          <a:off x="0" y="0"/>
+          <a:ext cx="0" cy="0"/>
+          <a:chOff x="0" y="0"/>
+          <a:chExt cx="0" cy="0"/>
+        </a:xfrm>
+      </p:grpSpPr>
+      <p:pic>
+        <p:nvPicPr>
+          <p:cNvPr id="3" name="그림 2">
+            <a:extLst>
+              <a:ext uri="{FF2B5EF4-FFF2-40B4-BE49-F238E27FC236}">
+                <a16:creationId xmlns:a16="http://schemas.microsoft.com/office/drawing/2014/main" id="{DA8D1B9D-D875-4740-1434-85C9E9AF63A8}"/>
+              </a:ext>
+            </a:extLst>
+          </p:cNvPr>
+          <p:cNvPicPr>
+            <a:picLocks noChangeAspect="1"/>
+          </p:cNvPicPr>
+          <p:nvPr/>
+        </p:nvPicPr>
+        <p:blipFill>
+          <a:blip r:embed="rId2"/>
+          <a:stretch>
+            <a:fillRect/>
+          </a:stretch>
+        </p:blipFill>
+        <p:spPr>
+          <a:xfrm>
+            <a:off x="2562225" y="1504950"/>
+            <a:ext cx="7067550" cy="3848100"/>
+          </a:xfrm>
+          <a:prstGeom prst="rect">
+            <a:avLst/>
+          </a:prstGeom>
+        </p:spPr>
+      </p:pic>
+    </p:spTree>
+    <p:extLst>
+      <p:ext uri="{BB962C8B-B14F-4D97-AF65-F5344CB8AC3E}">
+        <p14:creationId xmlns:p14="http://schemas.microsoft.com/office/powerpoint/2010/main" val="2965019715"/>
+      </p:ext>
+    </p:extLst>
+  </p:cSld>
+  <p:clrMapOvr>
+    <a:masterClrMapping/>
+  </p:clrMapOvr>
+</p:sld>
+</file>
+
+<file path=ppt/slides/slide35.xml><?xml version="1.0" encoding="utf-8"?>
+<p:sld xmlns:a="http://schemas.openxmlformats.org/drawingml/2006/main" xmlns:r="http://schemas.openxmlformats.org/officeDocument/2006/relationships" xmlns:p="http://schemas.openxmlformats.org/presentationml/2006/main">
+  <p:cSld>
+    <p:spTree>
+      <p:nvGrpSpPr>
+        <p:cNvPr id="1" name=""/>
+        <p:cNvGrpSpPr/>
+        <p:nvPr/>
+      </p:nvGrpSpPr>
+      <p:grpSpPr>
+        <a:xfrm>
+          <a:off x="0" y="0"/>
+          <a:ext cx="0" cy="0"/>
+          <a:chOff x="0" y="0"/>
+          <a:chExt cx="0" cy="0"/>
+        </a:xfrm>
+      </p:grpSpPr>
+      <p:pic>
+        <p:nvPicPr>
+          <p:cNvPr id="3" name="그림 2">
+            <a:extLst>
+              <a:ext uri="{FF2B5EF4-FFF2-40B4-BE49-F238E27FC236}">
+                <a16:creationId xmlns:a16="http://schemas.microsoft.com/office/drawing/2014/main" id="{BE18221B-08BD-3B24-02CA-6EF8FBC7D0C7}"/>
+              </a:ext>
+            </a:extLst>
+          </p:cNvPr>
+          <p:cNvPicPr>
+            <a:picLocks noChangeAspect="1"/>
+          </p:cNvPicPr>
+          <p:nvPr/>
+        </p:nvPicPr>
+        <p:blipFill>
+          <a:blip r:embed="rId2"/>
+          <a:stretch>
+            <a:fillRect/>
+          </a:stretch>
+        </p:blipFill>
+        <p:spPr>
+          <a:xfrm>
+            <a:off x="2286000" y="962025"/>
+            <a:ext cx="7620000" cy="4933950"/>
+          </a:xfrm>
+          <a:prstGeom prst="rect">
+            <a:avLst/>
+          </a:prstGeom>
+        </p:spPr>
+      </p:pic>
+    </p:spTree>
+    <p:extLst>
+      <p:ext uri="{BB962C8B-B14F-4D97-AF65-F5344CB8AC3E}">
+        <p14:creationId xmlns:p14="http://schemas.microsoft.com/office/powerpoint/2010/main" val="1959426649"/>
+      </p:ext>
+    </p:extLst>
+  </p:cSld>
+  <p:clrMapOvr>
+    <a:masterClrMapping/>
+  </p:clrMapOvr>
+</p:sld>
+</file>
+
+<file path=ppt/slides/slide36.xml><?xml version="1.0" encoding="utf-8"?>
+<p:sld xmlns:a="http://schemas.openxmlformats.org/drawingml/2006/main" xmlns:r="http://schemas.openxmlformats.org/officeDocument/2006/relationships" xmlns:p="http://schemas.openxmlformats.org/presentationml/2006/main">
+  <p:cSld>
+    <p:spTree>
+      <p:nvGrpSpPr>
+        <p:cNvPr id="1" name=""/>
+        <p:cNvGrpSpPr/>
+        <p:nvPr/>
+      </p:nvGrpSpPr>
+      <p:grpSpPr>
+        <a:xfrm>
+          <a:off x="0" y="0"/>
+          <a:ext cx="0" cy="0"/>
+          <a:chOff x="0" y="0"/>
+          <a:chExt cx="0" cy="0"/>
+        </a:xfrm>
+      </p:grpSpPr>
+    </p:spTree>
+    <p:extLst>
+      <p:ext uri="{BB962C8B-B14F-4D97-AF65-F5344CB8AC3E}">
+        <p14:creationId xmlns:p14="http://schemas.microsoft.com/office/powerpoint/2010/main" val="3362235853"/>
+      </p:ext>
+    </p:extLst>
+  </p:cSld>
+  <p:clrMapOvr>
+    <a:masterClrMapping/>
+  </p:clrMapOvr>
+</p:sld>
+</file>
+
+<file path=ppt/slides/slide37.xml><?xml version="1.0" encoding="utf-8"?>
+<p:sld xmlns:a="http://schemas.openxmlformats.org/drawingml/2006/main" xmlns:r="http://schemas.openxmlformats.org/officeDocument/2006/relationships" xmlns:p="http://schemas.openxmlformats.org/presentationml/2006/main">
+  <p:cSld>
+    <p:spTree>
+      <p:nvGrpSpPr>
+        <p:cNvPr id="1" name=""/>
+        <p:cNvGrpSpPr/>
+        <p:nvPr/>
+      </p:nvGrpSpPr>
+      <p:grpSpPr>
+        <a:xfrm>
+          <a:off x="0" y="0"/>
+          <a:ext cx="0" cy="0"/>
+          <a:chOff x="0" y="0"/>
+          <a:chExt cx="0" cy="0"/>
+        </a:xfrm>
+      </p:grpSpPr>
+      <p:pic>
+        <p:nvPicPr>
+          <p:cNvPr id="5" name="그림 4">
+            <a:extLst>
+              <a:ext uri="{FF2B5EF4-FFF2-40B4-BE49-F238E27FC236}">
+                <a16:creationId xmlns:a16="http://schemas.microsoft.com/office/drawing/2014/main" id="{8091A294-A7FA-C11A-3AA7-E84F9D541FB7}"/>
+              </a:ext>
+            </a:extLst>
+          </p:cNvPr>
+          <p:cNvPicPr>
+            <a:picLocks noChangeAspect="1"/>
+          </p:cNvPicPr>
+          <p:nvPr/>
+        </p:nvPicPr>
+        <p:blipFill>
+          <a:blip r:embed="rId2"/>
+          <a:stretch>
+            <a:fillRect/>
+          </a:stretch>
+        </p:blipFill>
+        <p:spPr>
+          <a:xfrm>
+            <a:off x="2362200" y="1123950"/>
+            <a:ext cx="7467600" cy="4610100"/>
+          </a:xfrm>
+          <a:prstGeom prst="rect">
+            <a:avLst/>
+          </a:prstGeom>
+        </p:spPr>
+      </p:pic>
+    </p:spTree>
+    <p:extLst>
+      <p:ext uri="{BB962C8B-B14F-4D97-AF65-F5344CB8AC3E}">
+        <p14:creationId xmlns:p14="http://schemas.microsoft.com/office/powerpoint/2010/main" val="431007319"/>
+      </p:ext>
+    </p:extLst>
+  </p:cSld>
+  <p:clrMapOvr>
+    <a:masterClrMapping/>
+  </p:clrMapOvr>
+</p:sld>
+</file>
+
+<file path=ppt/slides/slide38.xml><?xml version="1.0" encoding="utf-8"?>
+<p:sld xmlns:a="http://schemas.openxmlformats.org/drawingml/2006/main" xmlns:r="http://schemas.openxmlformats.org/officeDocument/2006/relationships" xmlns:p="http://schemas.openxmlformats.org/presentationml/2006/main">
+  <p:cSld>
+    <p:spTree>
+      <p:nvGrpSpPr>
+        <p:cNvPr id="1" name=""/>
+        <p:cNvGrpSpPr/>
+        <p:nvPr/>
+      </p:nvGrpSpPr>
+      <p:grpSpPr>
+        <a:xfrm>
+          <a:off x="0" y="0"/>
+          <a:ext cx="0" cy="0"/>
+          <a:chOff x="0" y="0"/>
+          <a:chExt cx="0" cy="0"/>
+        </a:xfrm>
+      </p:grpSpPr>
+      <p:pic>
+        <p:nvPicPr>
+          <p:cNvPr id="3" name="그림 2">
+            <a:extLst>
+              <a:ext uri="{FF2B5EF4-FFF2-40B4-BE49-F238E27FC236}">
+                <a16:creationId xmlns:a16="http://schemas.microsoft.com/office/drawing/2014/main" id="{722B99A1-04D2-7ADF-98FE-CF7216AB4E2E}"/>
+              </a:ext>
+            </a:extLst>
+          </p:cNvPr>
+          <p:cNvPicPr>
+            <a:picLocks noChangeAspect="1"/>
+          </p:cNvPicPr>
+          <p:nvPr/>
+        </p:nvPicPr>
+        <p:blipFill>
+          <a:blip r:embed="rId2"/>
+          <a:stretch>
+            <a:fillRect/>
+          </a:stretch>
+        </p:blipFill>
+        <p:spPr>
+          <a:xfrm>
+            <a:off x="2595562" y="990600"/>
+            <a:ext cx="7000875" cy="4876800"/>
+          </a:xfrm>
+          <a:prstGeom prst="rect">
+            <a:avLst/>
+          </a:prstGeom>
+        </p:spPr>
+      </p:pic>
+    </p:spTree>
+    <p:extLst>
+      <p:ext uri="{BB962C8B-B14F-4D97-AF65-F5344CB8AC3E}">
+        <p14:creationId xmlns:p14="http://schemas.microsoft.com/office/powerpoint/2010/main" val="2555125669"/>
+      </p:ext>
+    </p:extLst>
+  </p:cSld>
+  <p:clrMapOvr>
+    <a:masterClrMapping/>
+  </p:clrMapOvr>
+</p:sld>
+</file>
+
+<file path=ppt/slides/slide39.xml><?xml version="1.0" encoding="utf-8"?>
+<p:sld xmlns:a="http://schemas.openxmlformats.org/drawingml/2006/main" xmlns:r="http://schemas.openxmlformats.org/officeDocument/2006/relationships" xmlns:p="http://schemas.openxmlformats.org/presentationml/2006/main">
+  <p:cSld>
+    <p:spTree>
+      <p:nvGrpSpPr>
+        <p:cNvPr id="1" name=""/>
+        <p:cNvGrpSpPr/>
+        <p:nvPr/>
+      </p:nvGrpSpPr>
+      <p:grpSpPr>
+        <a:xfrm>
+          <a:off x="0" y="0"/>
+          <a:ext cx="0" cy="0"/>
+          <a:chOff x="0" y="0"/>
+          <a:chExt cx="0" cy="0"/>
+        </a:xfrm>
+      </p:grpSpPr>
+      <p:pic>
+        <p:nvPicPr>
+          <p:cNvPr id="3" name="그림 2">
+            <a:extLst>
+              <a:ext uri="{FF2B5EF4-FFF2-40B4-BE49-F238E27FC236}">
+                <a16:creationId xmlns:a16="http://schemas.microsoft.com/office/drawing/2014/main" id="{DB2752E3-431D-74D0-9B3B-5B6928688B21}"/>
+              </a:ext>
+            </a:extLst>
+          </p:cNvPr>
+          <p:cNvPicPr>
+            <a:picLocks noChangeAspect="1"/>
+          </p:cNvPicPr>
+          <p:nvPr/>
+        </p:nvPicPr>
+        <p:blipFill>
+          <a:blip r:embed="rId2"/>
+          <a:stretch>
+            <a:fillRect/>
+          </a:stretch>
+        </p:blipFill>
+        <p:spPr>
+          <a:xfrm>
+            <a:off x="2786062" y="828675"/>
+            <a:ext cx="6619875" cy="5200650"/>
+          </a:xfrm>
+          <a:prstGeom prst="rect">
+            <a:avLst/>
+          </a:prstGeom>
+        </p:spPr>
+      </p:pic>
+    </p:spTree>
+    <p:extLst>
+      <p:ext uri="{BB962C8B-B14F-4D97-AF65-F5344CB8AC3E}">
+        <p14:creationId xmlns:p14="http://schemas.microsoft.com/office/powerpoint/2010/main" val="362157702"/>
+      </p:ext>
+    </p:extLst>
+  </p:cSld>
+  <p:clrMapOvr>
+    <a:masterClrMapping/>
+  </p:clrMapOvr>
+</p:sld>
+</file>
+
+<file path=ppt/slides/slide4.xml><?xml version="1.0" encoding="utf-8"?>
+<p:sld xmlns:a="http://schemas.openxmlformats.org/drawingml/2006/main" xmlns:r="http://schemas.openxmlformats.org/officeDocument/2006/relationships" xmlns:p="http://schemas.openxmlformats.org/presentationml/2006/main">
+  <p:cSld>
+    <p:spTree>
+      <p:nvGrpSpPr>
+        <p:cNvPr id="1" name=""/>
+        <p:cNvGrpSpPr/>
+        <p:nvPr/>
+      </p:nvGrpSpPr>
+      <p:grpSpPr>
+        <a:xfrm>
+          <a:off x="0" y="0"/>
+          <a:ext cx="0" cy="0"/>
+          <a:chOff x="0" y="0"/>
+          <a:chExt cx="0" cy="0"/>
+        </a:xfrm>
+      </p:grpSpPr>
+      <p:pic>
+        <p:nvPicPr>
+          <p:cNvPr id="2" name="그림 1">
+            <a:extLst>
+              <a:ext uri="{FF2B5EF4-FFF2-40B4-BE49-F238E27FC236}">
+                <a16:creationId xmlns:a16="http://schemas.microsoft.com/office/drawing/2014/main" id="{ACF7480B-8839-46B1-ADD0-7460F9C3E28E}"/>
+              </a:ext>
+            </a:extLst>
+          </p:cNvPr>
+          <p:cNvPicPr>
+            <a:picLocks noChangeAspect="1"/>
+          </p:cNvPicPr>
+          <p:nvPr/>
+        </p:nvPicPr>
+        <p:blipFill>
+          <a:blip r:embed="rId2"/>
+          <a:stretch>
+            <a:fillRect/>
+          </a:stretch>
+        </p:blipFill>
+        <p:spPr>
+          <a:xfrm>
+            <a:off x="6541244" y="628936"/>
+            <a:ext cx="4056802" cy="5231722"/>
+          </a:xfrm>
+          <a:prstGeom prst="rect">
+            <a:avLst/>
+          </a:prstGeom>
+        </p:spPr>
+      </p:pic>
+      <p:pic>
+        <p:nvPicPr>
+          <p:cNvPr id="3" name="그림 2">
+            <a:extLst>
+              <a:ext uri="{FF2B5EF4-FFF2-40B4-BE49-F238E27FC236}">
+                <a16:creationId xmlns:a16="http://schemas.microsoft.com/office/drawing/2014/main" id="{CC798C5A-3EA7-4E88-A201-58D3A96C417B}"/>
+              </a:ext>
+            </a:extLst>
+          </p:cNvPr>
+          <p:cNvPicPr>
+            <a:picLocks noChangeAspect="1"/>
+          </p:cNvPicPr>
+          <p:nvPr/>
+        </p:nvPicPr>
+        <p:blipFill>
+          <a:blip r:embed="rId3"/>
+          <a:stretch>
+            <a:fillRect/>
+          </a:stretch>
+        </p:blipFill>
+        <p:spPr>
+          <a:xfrm>
+            <a:off x="1368633" y="628936"/>
+            <a:ext cx="3937885" cy="5048277"/>
+          </a:xfrm>
+          <a:prstGeom prst="rect">
+            <a:avLst/>
+          </a:prstGeom>
+        </p:spPr>
+      </p:pic>
+    </p:spTree>
+    <p:extLst>
+      <p:ext uri="{BB962C8B-B14F-4D97-AF65-F5344CB8AC3E}">
+        <p14:creationId xmlns:p14="http://schemas.microsoft.com/office/powerpoint/2010/main" val="571402028"/>
+      </p:ext>
+    </p:extLst>
+  </p:cSld>
+  <p:clrMapOvr>
+    <a:masterClrMapping/>
+  </p:clrMapOvr>
+</p:sld>
+</file>
+
+<file path=ppt/slides/slide40.xml><?xml version="1.0" encoding="utf-8"?>
+<p:sld xmlns:a="http://schemas.openxmlformats.org/drawingml/2006/main" xmlns:r="http://schemas.openxmlformats.org/officeDocument/2006/relationships" xmlns:p="http://schemas.openxmlformats.org/presentationml/2006/main">
+  <p:cSld>
+    <p:spTree>
+      <p:nvGrpSpPr>
+        <p:cNvPr id="1" name=""/>
+        <p:cNvGrpSpPr/>
+        <p:nvPr/>
+      </p:nvGrpSpPr>
+      <p:grpSpPr>
+        <a:xfrm>
+          <a:off x="0" y="0"/>
+          <a:ext cx="0" cy="0"/>
+          <a:chOff x="0" y="0"/>
+          <a:chExt cx="0" cy="0"/>
+        </a:xfrm>
+      </p:grpSpPr>
+      <p:pic>
+        <p:nvPicPr>
+          <p:cNvPr id="3" name="그림 2">
+            <a:extLst>
+              <a:ext uri="{FF2B5EF4-FFF2-40B4-BE49-F238E27FC236}">
+                <a16:creationId xmlns:a16="http://schemas.microsoft.com/office/drawing/2014/main" id="{63F07927-45B8-4E70-9B39-5562BE7FB8A8}"/>
+              </a:ext>
+            </a:extLst>
+          </p:cNvPr>
+          <p:cNvPicPr>
+            <a:picLocks noChangeAspect="1"/>
+          </p:cNvPicPr>
+          <p:nvPr/>
+        </p:nvPicPr>
+        <p:blipFill>
+          <a:blip r:embed="rId2"/>
+          <a:stretch>
+            <a:fillRect/>
+          </a:stretch>
+        </p:blipFill>
+        <p:spPr>
+          <a:xfrm>
+            <a:off x="3133725" y="1090612"/>
+            <a:ext cx="5924550" cy="4676775"/>
+          </a:xfrm>
+          <a:prstGeom prst="rect">
+            <a:avLst/>
+          </a:prstGeom>
+        </p:spPr>
+      </p:pic>
+    </p:spTree>
+    <p:extLst>
+      <p:ext uri="{BB962C8B-B14F-4D97-AF65-F5344CB8AC3E}">
+        <p14:creationId xmlns:p14="http://schemas.microsoft.com/office/powerpoint/2010/main" val="171160837"/>
+      </p:ext>
+    </p:extLst>
+  </p:cSld>
+  <p:clrMapOvr>
+    <a:masterClrMapping/>
+  </p:clrMapOvr>
+</p:sld>
+</file>
+
+<file path=ppt/slides/slide41.xml><?xml version="1.0" encoding="utf-8"?>
+<p:sld xmlns:a="http://schemas.openxmlformats.org/drawingml/2006/main" xmlns:r="http://schemas.openxmlformats.org/officeDocument/2006/relationships" xmlns:p="http://schemas.openxmlformats.org/presentationml/2006/main">
+  <p:cSld>
+    <p:spTree>
+      <p:nvGrpSpPr>
+        <p:cNvPr id="1" name=""/>
+        <p:cNvGrpSpPr/>
+        <p:nvPr/>
+      </p:nvGrpSpPr>
+      <p:grpSpPr>
+        <a:xfrm>
+          <a:off x="0" y="0"/>
+          <a:ext cx="0" cy="0"/>
+          <a:chOff x="0" y="0"/>
+          <a:chExt cx="0" cy="0"/>
+        </a:xfrm>
+      </p:grpSpPr>
+      <p:pic>
+        <p:nvPicPr>
+          <p:cNvPr id="3" name="그림 2">
+            <a:extLst>
+              <a:ext uri="{FF2B5EF4-FFF2-40B4-BE49-F238E27FC236}">
+                <a16:creationId xmlns:a16="http://schemas.microsoft.com/office/drawing/2014/main" id="{E76B9057-EEC8-0B57-BA02-37BF17E3D690}"/>
+              </a:ext>
+            </a:extLst>
+          </p:cNvPr>
+          <p:cNvPicPr>
+            <a:picLocks noChangeAspect="1"/>
+          </p:cNvPicPr>
+          <p:nvPr/>
+        </p:nvPicPr>
+        <p:blipFill>
+          <a:blip r:embed="rId2"/>
+          <a:stretch>
+            <a:fillRect/>
+          </a:stretch>
+        </p:blipFill>
+        <p:spPr>
+          <a:xfrm>
+            <a:off x="2543175" y="990600"/>
+            <a:ext cx="7105650" cy="4876800"/>
+          </a:xfrm>
+          <a:prstGeom prst="rect">
+            <a:avLst/>
+          </a:prstGeom>
+        </p:spPr>
+      </p:pic>
+    </p:spTree>
+    <p:extLst>
+      <p:ext uri="{BB962C8B-B14F-4D97-AF65-F5344CB8AC3E}">
+        <p14:creationId xmlns:p14="http://schemas.microsoft.com/office/powerpoint/2010/main" val="614989378"/>
+      </p:ext>
+    </p:extLst>
+  </p:cSld>
+  <p:clrMapOvr>
+    <a:masterClrMapping/>
+  </p:clrMapOvr>
+</p:sld>
+</file>
+
+<file path=ppt/slides/slide42.xml><?xml version="1.0" encoding="utf-8"?>
+<p:sld xmlns:a="http://schemas.openxmlformats.org/drawingml/2006/main" xmlns:r="http://schemas.openxmlformats.org/officeDocument/2006/relationships" xmlns:p="http://schemas.openxmlformats.org/presentationml/2006/main">
+  <p:cSld>
+    <p:spTree>
+      <p:nvGrpSpPr>
+        <p:cNvPr id="1" name=""/>
+        <p:cNvGrpSpPr/>
+        <p:nvPr/>
+      </p:nvGrpSpPr>
+      <p:grpSpPr>
+        <a:xfrm>
+          <a:off x="0" y="0"/>
+          <a:ext cx="0" cy="0"/>
+          <a:chOff x="0" y="0"/>
+          <a:chExt cx="0" cy="0"/>
+        </a:xfrm>
+      </p:grpSpPr>
+      <p:pic>
+        <p:nvPicPr>
+          <p:cNvPr id="3" name="그림 2">
+            <a:extLst>
+              <a:ext uri="{FF2B5EF4-FFF2-40B4-BE49-F238E27FC236}">
+                <a16:creationId xmlns:a16="http://schemas.microsoft.com/office/drawing/2014/main" id="{D62B99F0-A5A1-1AE6-FA56-7AE59E48A157}"/>
+              </a:ext>
+            </a:extLst>
+          </p:cNvPr>
+          <p:cNvPicPr>
+            <a:picLocks noChangeAspect="1"/>
+          </p:cNvPicPr>
+          <p:nvPr/>
+        </p:nvPicPr>
+        <p:blipFill>
+          <a:blip r:embed="rId2"/>
+          <a:stretch>
+            <a:fillRect/>
+          </a:stretch>
+        </p:blipFill>
+        <p:spPr>
+          <a:xfrm>
+            <a:off x="2695575" y="1000125"/>
+            <a:ext cx="6800850" cy="4857750"/>
+          </a:xfrm>
+          <a:prstGeom prst="rect">
+            <a:avLst/>
+          </a:prstGeom>
+        </p:spPr>
+      </p:pic>
+    </p:spTree>
+    <p:extLst>
+      <p:ext uri="{BB962C8B-B14F-4D97-AF65-F5344CB8AC3E}">
+        <p14:creationId xmlns:p14="http://schemas.microsoft.com/office/powerpoint/2010/main" val="3985065081"/>
+      </p:ext>
+    </p:extLst>
+  </p:cSld>
+  <p:clrMapOvr>
+    <a:masterClrMapping/>
+  </p:clrMapOvr>
+</p:sld>
+</file>
+
+<file path=ppt/slides/slide43.xml><?xml version="1.0" encoding="utf-8"?>
+<p:sld xmlns:a="http://schemas.openxmlformats.org/drawingml/2006/main" xmlns:r="http://schemas.openxmlformats.org/officeDocument/2006/relationships" xmlns:p="http://schemas.openxmlformats.org/presentationml/2006/main">
+  <p:cSld>
+    <p:spTree>
+      <p:nvGrpSpPr>
+        <p:cNvPr id="1" name=""/>
+        <p:cNvGrpSpPr/>
+        <p:nvPr/>
+      </p:nvGrpSpPr>
+      <p:grpSpPr>
+        <a:xfrm>
+          <a:off x="0" y="0"/>
+          <a:ext cx="0" cy="0"/>
+          <a:chOff x="0" y="0"/>
+          <a:chExt cx="0" cy="0"/>
+        </a:xfrm>
+      </p:grpSpPr>
+      <p:pic>
+        <p:nvPicPr>
+          <p:cNvPr id="3" name="그림 2">
+            <a:extLst>
+              <a:ext uri="{FF2B5EF4-FFF2-40B4-BE49-F238E27FC236}">
+                <a16:creationId xmlns:a16="http://schemas.microsoft.com/office/drawing/2014/main" id="{4DF74AC7-B380-84F9-44AA-8D31FDE49848}"/>
+              </a:ext>
+            </a:extLst>
+          </p:cNvPr>
+          <p:cNvPicPr>
+            <a:picLocks noChangeAspect="1"/>
+          </p:cNvPicPr>
+          <p:nvPr/>
+        </p:nvPicPr>
+        <p:blipFill>
+          <a:blip r:embed="rId2"/>
+          <a:stretch>
+            <a:fillRect/>
+          </a:stretch>
+        </p:blipFill>
+        <p:spPr>
+          <a:xfrm>
+            <a:off x="2481262" y="852487"/>
+            <a:ext cx="7229475" cy="5153025"/>
+          </a:xfrm>
+          <a:prstGeom prst="rect">
+            <a:avLst/>
+          </a:prstGeom>
+        </p:spPr>
+      </p:pic>
+    </p:spTree>
+    <p:extLst>
+      <p:ext uri="{BB962C8B-B14F-4D97-AF65-F5344CB8AC3E}">
+        <p14:creationId xmlns:p14="http://schemas.microsoft.com/office/powerpoint/2010/main" val="126600485"/>
+      </p:ext>
+    </p:extLst>
+  </p:cSld>
+  <p:clrMapOvr>
+    <a:masterClrMapping/>
+  </p:clrMapOvr>
+</p:sld>
+</file>
+
+<file path=ppt/slides/slide44.xml><?xml version="1.0" encoding="utf-8"?>
 <p:sld xmlns:a="http://schemas.openxmlformats.org/drawingml/2006/main" xmlns:r="http://schemas.openxmlformats.org/officeDocument/2006/relationships" xmlns:p="http://schemas.openxmlformats.org/presentationml/2006/main">
   <p:cSld>
     <p:spTree>
@@ -6236,7 +6371,7 @@
 </p:sld>
 </file>
 
-<file path=ppt/slides/slide35.xml><?xml version="1.0" encoding="utf-8"?>
+<file path=ppt/slides/slide45.xml><?xml version="1.0" encoding="utf-8"?>
 <p:sld xmlns:a="http://schemas.openxmlformats.org/drawingml/2006/main" xmlns:r="http://schemas.openxmlformats.org/officeDocument/2006/relationships" xmlns:p="http://schemas.openxmlformats.org/presentationml/2006/main">
   <p:cSld>
     <p:spTree>
@@ -6296,127 +6431,7 @@
 </p:sld>
 </file>
 
-<file path=ppt/slides/slide36.xml><?xml version="1.0" encoding="utf-8"?>
-<p:sld xmlns:a="http://schemas.openxmlformats.org/drawingml/2006/main" xmlns:r="http://schemas.openxmlformats.org/officeDocument/2006/relationships" xmlns:p="http://schemas.openxmlformats.org/presentationml/2006/main">
-  <p:cSld>
-    <p:spTree>
-      <p:nvGrpSpPr>
-        <p:cNvPr id="1" name=""/>
-        <p:cNvGrpSpPr/>
-        <p:nvPr/>
-      </p:nvGrpSpPr>
-      <p:grpSpPr>
-        <a:xfrm>
-          <a:off x="0" y="0"/>
-          <a:ext cx="0" cy="0"/>
-          <a:chOff x="0" y="0"/>
-          <a:chExt cx="0" cy="0"/>
-        </a:xfrm>
-      </p:grpSpPr>
-    </p:spTree>
-    <p:extLst>
-      <p:ext uri="{BB962C8B-B14F-4D97-AF65-F5344CB8AC3E}">
-        <p14:creationId xmlns:p14="http://schemas.microsoft.com/office/powerpoint/2010/main" val="3400830138"/>
-      </p:ext>
-    </p:extLst>
-  </p:cSld>
-  <p:clrMapOvr>
-    <a:masterClrMapping/>
-  </p:clrMapOvr>
-</p:sld>
-</file>
-
-<file path=ppt/slides/slide37.xml><?xml version="1.0" encoding="utf-8"?>
-<p:sld xmlns:a="http://schemas.openxmlformats.org/drawingml/2006/main" xmlns:r="http://schemas.openxmlformats.org/officeDocument/2006/relationships" xmlns:p="http://schemas.openxmlformats.org/presentationml/2006/main">
-  <p:cSld>
-    <p:spTree>
-      <p:nvGrpSpPr>
-        <p:cNvPr id="1" name=""/>
-        <p:cNvGrpSpPr/>
-        <p:nvPr/>
-      </p:nvGrpSpPr>
-      <p:grpSpPr>
-        <a:xfrm>
-          <a:off x="0" y="0"/>
-          <a:ext cx="0" cy="0"/>
-          <a:chOff x="0" y="0"/>
-          <a:chExt cx="0" cy="0"/>
-        </a:xfrm>
-      </p:grpSpPr>
-    </p:spTree>
-    <p:extLst>
-      <p:ext uri="{BB962C8B-B14F-4D97-AF65-F5344CB8AC3E}">
-        <p14:creationId xmlns:p14="http://schemas.microsoft.com/office/powerpoint/2010/main" val="3889002464"/>
-      </p:ext>
-    </p:extLst>
-  </p:cSld>
-  <p:clrMapOvr>
-    <a:masterClrMapping/>
-  </p:clrMapOvr>
-</p:sld>
-</file>
-
-<file path=ppt/slides/slide38.xml><?xml version="1.0" encoding="utf-8"?>
-<p:sld xmlns:a="http://schemas.openxmlformats.org/drawingml/2006/main" xmlns:r="http://schemas.openxmlformats.org/officeDocument/2006/relationships" xmlns:p="http://schemas.openxmlformats.org/presentationml/2006/main">
-  <p:cSld>
-    <p:spTree>
-      <p:nvGrpSpPr>
-        <p:cNvPr id="1" name=""/>
-        <p:cNvGrpSpPr/>
-        <p:nvPr/>
-      </p:nvGrpSpPr>
-      <p:grpSpPr>
-        <a:xfrm>
-          <a:off x="0" y="0"/>
-          <a:ext cx="0" cy="0"/>
-          <a:chOff x="0" y="0"/>
-          <a:chExt cx="0" cy="0"/>
-        </a:xfrm>
-      </p:grpSpPr>
-    </p:spTree>
-    <p:extLst>
-      <p:ext uri="{BB962C8B-B14F-4D97-AF65-F5344CB8AC3E}">
-        <p14:creationId xmlns:p14="http://schemas.microsoft.com/office/powerpoint/2010/main" val="250666844"/>
-      </p:ext>
-    </p:extLst>
-  </p:cSld>
-  <p:clrMapOvr>
-    <a:masterClrMapping/>
-  </p:clrMapOvr>
-</p:sld>
-</file>
-
-<file path=ppt/slides/slide39.xml><?xml version="1.0" encoding="utf-8"?>
-<p:sld xmlns:a="http://schemas.openxmlformats.org/drawingml/2006/main" xmlns:r="http://schemas.openxmlformats.org/officeDocument/2006/relationships" xmlns:p="http://schemas.openxmlformats.org/presentationml/2006/main">
-  <p:cSld>
-    <p:spTree>
-      <p:nvGrpSpPr>
-        <p:cNvPr id="1" name=""/>
-        <p:cNvGrpSpPr/>
-        <p:nvPr/>
-      </p:nvGrpSpPr>
-      <p:grpSpPr>
-        <a:xfrm>
-          <a:off x="0" y="0"/>
-          <a:ext cx="0" cy="0"/>
-          <a:chOff x="0" y="0"/>
-          <a:chExt cx="0" cy="0"/>
-        </a:xfrm>
-      </p:grpSpPr>
-    </p:spTree>
-    <p:extLst>
-      <p:ext uri="{BB962C8B-B14F-4D97-AF65-F5344CB8AC3E}">
-        <p14:creationId xmlns:p14="http://schemas.microsoft.com/office/powerpoint/2010/main" val="1987484214"/>
-      </p:ext>
-    </p:extLst>
-  </p:cSld>
-  <p:clrMapOvr>
-    <a:masterClrMapping/>
-  </p:clrMapOvr>
-</p:sld>
-</file>
-
-<file path=ppt/slides/slide4.xml><?xml version="1.0" encoding="utf-8"?>
+<file path=ppt/slides/slide46.xml><?xml version="1.0" encoding="utf-8"?>
 <p:sld xmlns:a="http://schemas.openxmlformats.org/drawingml/2006/main" xmlns:r="http://schemas.openxmlformats.org/officeDocument/2006/relationships" xmlns:p="http://schemas.openxmlformats.org/presentationml/2006/main">
   <p:cSld>
     <p:spTree>
@@ -6435,10 +6450,10 @@
       </p:grpSpPr>
       <p:pic>
         <p:nvPicPr>
-          <p:cNvPr id="2" name="그림 1">
-            <a:extLst>
-              <a:ext uri="{FF2B5EF4-FFF2-40B4-BE49-F238E27FC236}">
-                <a16:creationId xmlns:a16="http://schemas.microsoft.com/office/drawing/2014/main" id="{ACF7480B-8839-46B1-ADD0-7460F9C3E28E}"/>
+          <p:cNvPr id="3" name="그림 2">
+            <a:extLst>
+              <a:ext uri="{FF2B5EF4-FFF2-40B4-BE49-F238E27FC236}">
+                <a16:creationId xmlns:a16="http://schemas.microsoft.com/office/drawing/2014/main" id="{1EC2939C-1F27-4F8E-2720-D372733F82BB}"/>
               </a:ext>
             </a:extLst>
           </p:cNvPr>
@@ -6455,20 +6470,50 @@
         </p:blipFill>
         <p:spPr>
           <a:xfrm>
-            <a:off x="6541244" y="628936"/>
-            <a:ext cx="4056802" cy="5231722"/>
+            <a:off x="2790825" y="957262"/>
+            <a:ext cx="6610350" cy="4943475"/>
           </a:xfrm>
           <a:prstGeom prst="rect">
             <a:avLst/>
           </a:prstGeom>
         </p:spPr>
       </p:pic>
+    </p:spTree>
+    <p:extLst>
+      <p:ext uri="{BB962C8B-B14F-4D97-AF65-F5344CB8AC3E}">
+        <p14:creationId xmlns:p14="http://schemas.microsoft.com/office/powerpoint/2010/main" val="3400830138"/>
+      </p:ext>
+    </p:extLst>
+  </p:cSld>
+  <p:clrMapOvr>
+    <a:masterClrMapping/>
+  </p:clrMapOvr>
+</p:sld>
+</file>
+
+<file path=ppt/slides/slide47.xml><?xml version="1.0" encoding="utf-8"?>
+<p:sld xmlns:a="http://schemas.openxmlformats.org/drawingml/2006/main" xmlns:r="http://schemas.openxmlformats.org/officeDocument/2006/relationships" xmlns:p="http://schemas.openxmlformats.org/presentationml/2006/main">
+  <p:cSld>
+    <p:spTree>
+      <p:nvGrpSpPr>
+        <p:cNvPr id="1" name=""/>
+        <p:cNvGrpSpPr/>
+        <p:nvPr/>
+      </p:nvGrpSpPr>
+      <p:grpSpPr>
+        <a:xfrm>
+          <a:off x="0" y="0"/>
+          <a:ext cx="0" cy="0"/>
+          <a:chOff x="0" y="0"/>
+          <a:chExt cx="0" cy="0"/>
+        </a:xfrm>
+      </p:grpSpPr>
       <p:pic>
         <p:nvPicPr>
           <p:cNvPr id="3" name="그림 2">
             <a:extLst>
               <a:ext uri="{FF2B5EF4-FFF2-40B4-BE49-F238E27FC236}">
-                <a16:creationId xmlns:a16="http://schemas.microsoft.com/office/drawing/2014/main" id="{CC798C5A-3EA7-4E88-A201-58D3A96C417B}"/>
+                <a16:creationId xmlns:a16="http://schemas.microsoft.com/office/drawing/2014/main" id="{B2865C47-6779-601C-2246-CCE7928671F9}"/>
               </a:ext>
             </a:extLst>
           </p:cNvPr>
@@ -6478,15 +6523,15 @@
           <p:nvPr/>
         </p:nvPicPr>
         <p:blipFill>
-          <a:blip r:embed="rId3"/>
+          <a:blip r:embed="rId2"/>
           <a:stretch>
             <a:fillRect/>
           </a:stretch>
         </p:blipFill>
         <p:spPr>
           <a:xfrm>
-            <a:off x="1368633" y="628936"/>
-            <a:ext cx="3937885" cy="5048277"/>
+            <a:off x="2490787" y="1176337"/>
+            <a:ext cx="7210425" cy="4505325"/>
           </a:xfrm>
           <a:prstGeom prst="rect">
             <a:avLst/>
@@ -6496,7 +6541,127 @@
     </p:spTree>
     <p:extLst>
       <p:ext uri="{BB962C8B-B14F-4D97-AF65-F5344CB8AC3E}">
-        <p14:creationId xmlns:p14="http://schemas.microsoft.com/office/powerpoint/2010/main" val="571402028"/>
+        <p14:creationId xmlns:p14="http://schemas.microsoft.com/office/powerpoint/2010/main" val="3889002464"/>
+      </p:ext>
+    </p:extLst>
+  </p:cSld>
+  <p:clrMapOvr>
+    <a:masterClrMapping/>
+  </p:clrMapOvr>
+</p:sld>
+</file>
+
+<file path=ppt/slides/slide48.xml><?xml version="1.0" encoding="utf-8"?>
+<p:sld xmlns:a="http://schemas.openxmlformats.org/drawingml/2006/main" xmlns:r="http://schemas.openxmlformats.org/officeDocument/2006/relationships" xmlns:p="http://schemas.openxmlformats.org/presentationml/2006/main">
+  <p:cSld>
+    <p:spTree>
+      <p:nvGrpSpPr>
+        <p:cNvPr id="1" name=""/>
+        <p:cNvGrpSpPr/>
+        <p:nvPr/>
+      </p:nvGrpSpPr>
+      <p:grpSpPr>
+        <a:xfrm>
+          <a:off x="0" y="0"/>
+          <a:ext cx="0" cy="0"/>
+          <a:chOff x="0" y="0"/>
+          <a:chExt cx="0" cy="0"/>
+        </a:xfrm>
+      </p:grpSpPr>
+      <p:pic>
+        <p:nvPicPr>
+          <p:cNvPr id="3" name="그림 2">
+            <a:extLst>
+              <a:ext uri="{FF2B5EF4-FFF2-40B4-BE49-F238E27FC236}">
+                <a16:creationId xmlns:a16="http://schemas.microsoft.com/office/drawing/2014/main" id="{31B2FDA9-0F24-5E15-32DF-890CD603D0F7}"/>
+              </a:ext>
+            </a:extLst>
+          </p:cNvPr>
+          <p:cNvPicPr>
+            <a:picLocks noChangeAspect="1"/>
+          </p:cNvPicPr>
+          <p:nvPr/>
+        </p:nvPicPr>
+        <p:blipFill>
+          <a:blip r:embed="rId2"/>
+          <a:stretch>
+            <a:fillRect/>
+          </a:stretch>
+        </p:blipFill>
+        <p:spPr>
+          <a:xfrm>
+            <a:off x="2871787" y="1090612"/>
+            <a:ext cx="6448425" cy="4676775"/>
+          </a:xfrm>
+          <a:prstGeom prst="rect">
+            <a:avLst/>
+          </a:prstGeom>
+        </p:spPr>
+      </p:pic>
+    </p:spTree>
+    <p:extLst>
+      <p:ext uri="{BB962C8B-B14F-4D97-AF65-F5344CB8AC3E}">
+        <p14:creationId xmlns:p14="http://schemas.microsoft.com/office/powerpoint/2010/main" val="250666844"/>
+      </p:ext>
+    </p:extLst>
+  </p:cSld>
+  <p:clrMapOvr>
+    <a:masterClrMapping/>
+  </p:clrMapOvr>
+</p:sld>
+</file>
+
+<file path=ppt/slides/slide49.xml><?xml version="1.0" encoding="utf-8"?>
+<p:sld xmlns:a="http://schemas.openxmlformats.org/drawingml/2006/main" xmlns:r="http://schemas.openxmlformats.org/officeDocument/2006/relationships" xmlns:p="http://schemas.openxmlformats.org/presentationml/2006/main">
+  <p:cSld>
+    <p:spTree>
+      <p:nvGrpSpPr>
+        <p:cNvPr id="1" name=""/>
+        <p:cNvGrpSpPr/>
+        <p:nvPr/>
+      </p:nvGrpSpPr>
+      <p:grpSpPr>
+        <a:xfrm>
+          <a:off x="0" y="0"/>
+          <a:ext cx="0" cy="0"/>
+          <a:chOff x="0" y="0"/>
+          <a:chExt cx="0" cy="0"/>
+        </a:xfrm>
+      </p:grpSpPr>
+      <p:pic>
+        <p:nvPicPr>
+          <p:cNvPr id="3" name="그림 2">
+            <a:extLst>
+              <a:ext uri="{FF2B5EF4-FFF2-40B4-BE49-F238E27FC236}">
+                <a16:creationId xmlns:a16="http://schemas.microsoft.com/office/drawing/2014/main" id="{AC350CD5-0274-9B2A-4AE0-833ECBA7DE4B}"/>
+              </a:ext>
+            </a:extLst>
+          </p:cNvPr>
+          <p:cNvPicPr>
+            <a:picLocks noChangeAspect="1"/>
+          </p:cNvPicPr>
+          <p:nvPr/>
+        </p:nvPicPr>
+        <p:blipFill>
+          <a:blip r:embed="rId2"/>
+          <a:stretch>
+            <a:fillRect/>
+          </a:stretch>
+        </p:blipFill>
+        <p:spPr>
+          <a:xfrm>
+            <a:off x="2652712" y="1009650"/>
+            <a:ext cx="6886575" cy="4838700"/>
+          </a:xfrm>
+          <a:prstGeom prst="rect">
+            <a:avLst/>
+          </a:prstGeom>
+        </p:spPr>
+      </p:pic>
+    </p:spTree>
+    <p:extLst>
+      <p:ext uri="{BB962C8B-B14F-4D97-AF65-F5344CB8AC3E}">
+        <p14:creationId xmlns:p14="http://schemas.microsoft.com/office/powerpoint/2010/main" val="1987484214"/>
       </p:ext>
     </p:extLst>
   </p:cSld>
@@ -6557,6 +6722,426 @@
     <p:extLst>
       <p:ext uri="{BB962C8B-B14F-4D97-AF65-F5344CB8AC3E}">
         <p14:creationId xmlns:p14="http://schemas.microsoft.com/office/powerpoint/2010/main" val="2594342457"/>
+      </p:ext>
+    </p:extLst>
+  </p:cSld>
+  <p:clrMapOvr>
+    <a:masterClrMapping/>
+  </p:clrMapOvr>
+</p:sld>
+</file>
+
+<file path=ppt/slides/slide50.xml><?xml version="1.0" encoding="utf-8"?>
+<p:sld xmlns:a="http://schemas.openxmlformats.org/drawingml/2006/main" xmlns:r="http://schemas.openxmlformats.org/officeDocument/2006/relationships" xmlns:p="http://schemas.openxmlformats.org/presentationml/2006/main">
+  <p:cSld>
+    <p:spTree>
+      <p:nvGrpSpPr>
+        <p:cNvPr id="1" name=""/>
+        <p:cNvGrpSpPr/>
+        <p:nvPr/>
+      </p:nvGrpSpPr>
+      <p:grpSpPr>
+        <a:xfrm>
+          <a:off x="0" y="0"/>
+          <a:ext cx="0" cy="0"/>
+          <a:chOff x="0" y="0"/>
+          <a:chExt cx="0" cy="0"/>
+        </a:xfrm>
+      </p:grpSpPr>
+      <p:pic>
+        <p:nvPicPr>
+          <p:cNvPr id="3" name="그림 2">
+            <a:extLst>
+              <a:ext uri="{FF2B5EF4-FFF2-40B4-BE49-F238E27FC236}">
+                <a16:creationId xmlns:a16="http://schemas.microsoft.com/office/drawing/2014/main" id="{EF4B7908-84FE-FDE6-01AF-ADEA1E5BA5FB}"/>
+              </a:ext>
+            </a:extLst>
+          </p:cNvPr>
+          <p:cNvPicPr>
+            <a:picLocks noChangeAspect="1"/>
+          </p:cNvPicPr>
+          <p:nvPr/>
+        </p:nvPicPr>
+        <p:blipFill>
+          <a:blip r:embed="rId2"/>
+          <a:stretch>
+            <a:fillRect/>
+          </a:stretch>
+        </p:blipFill>
+        <p:spPr>
+          <a:xfrm>
+            <a:off x="0" y="1086715"/>
+            <a:ext cx="6667500" cy="4343400"/>
+          </a:xfrm>
+          <a:prstGeom prst="rect">
+            <a:avLst/>
+          </a:prstGeom>
+        </p:spPr>
+      </p:pic>
+      <p:pic>
+        <p:nvPicPr>
+          <p:cNvPr id="5" name="그림 4">
+            <a:extLst>
+              <a:ext uri="{FF2B5EF4-FFF2-40B4-BE49-F238E27FC236}">
+                <a16:creationId xmlns:a16="http://schemas.microsoft.com/office/drawing/2014/main" id="{3E4DCDF8-F54D-0CD5-BA62-71676F900571}"/>
+              </a:ext>
+            </a:extLst>
+          </p:cNvPr>
+          <p:cNvPicPr>
+            <a:picLocks noChangeAspect="1"/>
+          </p:cNvPicPr>
+          <p:nvPr/>
+        </p:nvPicPr>
+        <p:blipFill>
+          <a:blip r:embed="rId3"/>
+          <a:stretch>
+            <a:fillRect/>
+          </a:stretch>
+        </p:blipFill>
+        <p:spPr>
+          <a:xfrm>
+            <a:off x="5800725" y="1086715"/>
+            <a:ext cx="6076950" cy="4019550"/>
+          </a:xfrm>
+          <a:prstGeom prst="rect">
+            <a:avLst/>
+          </a:prstGeom>
+        </p:spPr>
+      </p:pic>
+    </p:spTree>
+    <p:extLst>
+      <p:ext uri="{BB962C8B-B14F-4D97-AF65-F5344CB8AC3E}">
+        <p14:creationId xmlns:p14="http://schemas.microsoft.com/office/powerpoint/2010/main" val="1603570604"/>
+      </p:ext>
+    </p:extLst>
+  </p:cSld>
+  <p:clrMapOvr>
+    <a:masterClrMapping/>
+  </p:clrMapOvr>
+</p:sld>
+</file>
+
+<file path=ppt/slides/slide51.xml><?xml version="1.0" encoding="utf-8"?>
+<p:sld xmlns:a="http://schemas.openxmlformats.org/drawingml/2006/main" xmlns:r="http://schemas.openxmlformats.org/officeDocument/2006/relationships" xmlns:p="http://schemas.openxmlformats.org/presentationml/2006/main">
+  <p:cSld>
+    <p:spTree>
+      <p:nvGrpSpPr>
+        <p:cNvPr id="1" name=""/>
+        <p:cNvGrpSpPr/>
+        <p:nvPr/>
+      </p:nvGrpSpPr>
+      <p:grpSpPr>
+        <a:xfrm>
+          <a:off x="0" y="0"/>
+          <a:ext cx="0" cy="0"/>
+          <a:chOff x="0" y="0"/>
+          <a:chExt cx="0" cy="0"/>
+        </a:xfrm>
+      </p:grpSpPr>
+      <p:pic>
+        <p:nvPicPr>
+          <p:cNvPr id="3" name="그림 2">
+            <a:extLst>
+              <a:ext uri="{FF2B5EF4-FFF2-40B4-BE49-F238E27FC236}">
+                <a16:creationId xmlns:a16="http://schemas.microsoft.com/office/drawing/2014/main" id="{CABE2AD0-5E03-1789-C478-1AFA1ACE1EFB}"/>
+              </a:ext>
+            </a:extLst>
+          </p:cNvPr>
+          <p:cNvPicPr>
+            <a:picLocks noChangeAspect="1"/>
+          </p:cNvPicPr>
+          <p:nvPr/>
+        </p:nvPicPr>
+        <p:blipFill>
+          <a:blip r:embed="rId2"/>
+          <a:stretch>
+            <a:fillRect/>
+          </a:stretch>
+        </p:blipFill>
+        <p:spPr>
+          <a:xfrm>
+            <a:off x="86653" y="796018"/>
+            <a:ext cx="5819775" cy="4743450"/>
+          </a:xfrm>
+          <a:prstGeom prst="rect">
+            <a:avLst/>
+          </a:prstGeom>
+        </p:spPr>
+      </p:pic>
+      <p:pic>
+        <p:nvPicPr>
+          <p:cNvPr id="5" name="그림 4">
+            <a:extLst>
+              <a:ext uri="{FF2B5EF4-FFF2-40B4-BE49-F238E27FC236}">
+                <a16:creationId xmlns:a16="http://schemas.microsoft.com/office/drawing/2014/main" id="{10177DF0-FAE1-EE89-C10A-AA08AB9EC365}"/>
+              </a:ext>
+            </a:extLst>
+          </p:cNvPr>
+          <p:cNvPicPr>
+            <a:picLocks noChangeAspect="1"/>
+          </p:cNvPicPr>
+          <p:nvPr/>
+        </p:nvPicPr>
+        <p:blipFill>
+          <a:blip r:embed="rId3"/>
+          <a:stretch>
+            <a:fillRect/>
+          </a:stretch>
+        </p:blipFill>
+        <p:spPr>
+          <a:xfrm>
+            <a:off x="6285574" y="1976747"/>
+            <a:ext cx="4772025" cy="2667000"/>
+          </a:xfrm>
+          <a:prstGeom prst="rect">
+            <a:avLst/>
+          </a:prstGeom>
+        </p:spPr>
+      </p:pic>
+    </p:spTree>
+    <p:extLst>
+      <p:ext uri="{BB962C8B-B14F-4D97-AF65-F5344CB8AC3E}">
+        <p14:creationId xmlns:p14="http://schemas.microsoft.com/office/powerpoint/2010/main" val="3041965768"/>
+      </p:ext>
+    </p:extLst>
+  </p:cSld>
+  <p:clrMapOvr>
+    <a:masterClrMapping/>
+  </p:clrMapOvr>
+</p:sld>
+</file>
+
+<file path=ppt/slides/slide52.xml><?xml version="1.0" encoding="utf-8"?>
+<p:sld xmlns:a="http://schemas.openxmlformats.org/drawingml/2006/main" xmlns:r="http://schemas.openxmlformats.org/officeDocument/2006/relationships" xmlns:p="http://schemas.openxmlformats.org/presentationml/2006/main">
+  <p:cSld>
+    <p:spTree>
+      <p:nvGrpSpPr>
+        <p:cNvPr id="1" name=""/>
+        <p:cNvGrpSpPr/>
+        <p:nvPr/>
+      </p:nvGrpSpPr>
+      <p:grpSpPr>
+        <a:xfrm>
+          <a:off x="0" y="0"/>
+          <a:ext cx="0" cy="0"/>
+          <a:chOff x="0" y="0"/>
+          <a:chExt cx="0" cy="0"/>
+        </a:xfrm>
+      </p:grpSpPr>
+      <p:pic>
+        <p:nvPicPr>
+          <p:cNvPr id="3" name="그림 2">
+            <a:extLst>
+              <a:ext uri="{FF2B5EF4-FFF2-40B4-BE49-F238E27FC236}">
+                <a16:creationId xmlns:a16="http://schemas.microsoft.com/office/drawing/2014/main" id="{B7FB21DC-9EFE-5B8E-96B0-82368634658D}"/>
+              </a:ext>
+            </a:extLst>
+          </p:cNvPr>
+          <p:cNvPicPr>
+            <a:picLocks noChangeAspect="1"/>
+          </p:cNvPicPr>
+          <p:nvPr/>
+        </p:nvPicPr>
+        <p:blipFill>
+          <a:blip r:embed="rId2"/>
+          <a:stretch>
+            <a:fillRect/>
+          </a:stretch>
+        </p:blipFill>
+        <p:spPr>
+          <a:xfrm>
+            <a:off x="402833" y="1104900"/>
+            <a:ext cx="7419975" cy="4648200"/>
+          </a:xfrm>
+          <a:prstGeom prst="rect">
+            <a:avLst/>
+          </a:prstGeom>
+        </p:spPr>
+      </p:pic>
+    </p:spTree>
+    <p:extLst>
+      <p:ext uri="{BB962C8B-B14F-4D97-AF65-F5344CB8AC3E}">
+        <p14:creationId xmlns:p14="http://schemas.microsoft.com/office/powerpoint/2010/main" val="4204818626"/>
+      </p:ext>
+    </p:extLst>
+  </p:cSld>
+  <p:clrMapOvr>
+    <a:masterClrMapping/>
+  </p:clrMapOvr>
+</p:sld>
+</file>
+
+<file path=ppt/slides/slide53.xml><?xml version="1.0" encoding="utf-8"?>
+<p:sld xmlns:a="http://schemas.openxmlformats.org/drawingml/2006/main" xmlns:r="http://schemas.openxmlformats.org/officeDocument/2006/relationships" xmlns:p="http://schemas.openxmlformats.org/presentationml/2006/main">
+  <p:cSld>
+    <p:spTree>
+      <p:nvGrpSpPr>
+        <p:cNvPr id="1" name=""/>
+        <p:cNvGrpSpPr/>
+        <p:nvPr/>
+      </p:nvGrpSpPr>
+      <p:grpSpPr>
+        <a:xfrm>
+          <a:off x="0" y="0"/>
+          <a:ext cx="0" cy="0"/>
+          <a:chOff x="0" y="0"/>
+          <a:chExt cx="0" cy="0"/>
+        </a:xfrm>
+      </p:grpSpPr>
+      <p:pic>
+        <p:nvPicPr>
+          <p:cNvPr id="3" name="그림 2">
+            <a:extLst>
+              <a:ext uri="{FF2B5EF4-FFF2-40B4-BE49-F238E27FC236}">
+                <a16:creationId xmlns:a16="http://schemas.microsoft.com/office/drawing/2014/main" id="{1A88BA58-4A18-CF44-1A8D-516D01C85596}"/>
+              </a:ext>
+            </a:extLst>
+          </p:cNvPr>
+          <p:cNvPicPr>
+            <a:picLocks noChangeAspect="1"/>
+          </p:cNvPicPr>
+          <p:nvPr/>
+        </p:nvPicPr>
+        <p:blipFill>
+          <a:blip r:embed="rId2"/>
+          <a:stretch>
+            <a:fillRect/>
+          </a:stretch>
+        </p:blipFill>
+        <p:spPr>
+          <a:xfrm>
+            <a:off x="334612" y="128958"/>
+            <a:ext cx="6915150" cy="2657475"/>
+          </a:xfrm>
+          <a:prstGeom prst="rect">
+            <a:avLst/>
+          </a:prstGeom>
+        </p:spPr>
+      </p:pic>
+      <p:pic>
+        <p:nvPicPr>
+          <p:cNvPr id="5" name="그림 4">
+            <a:extLst>
+              <a:ext uri="{FF2B5EF4-FFF2-40B4-BE49-F238E27FC236}">
+                <a16:creationId xmlns:a16="http://schemas.microsoft.com/office/drawing/2014/main" id="{781365C4-693B-219D-9565-46C0BC2A71AE}"/>
+              </a:ext>
+            </a:extLst>
+          </p:cNvPr>
+          <p:cNvPicPr>
+            <a:picLocks noChangeAspect="1"/>
+          </p:cNvPicPr>
+          <p:nvPr/>
+        </p:nvPicPr>
+        <p:blipFill>
+          <a:blip r:embed="rId3"/>
+          <a:stretch>
+            <a:fillRect/>
+          </a:stretch>
+        </p:blipFill>
+        <p:spPr>
+          <a:xfrm>
+            <a:off x="1145288" y="2786433"/>
+            <a:ext cx="6315075" cy="3714750"/>
+          </a:xfrm>
+          <a:prstGeom prst="rect">
+            <a:avLst/>
+          </a:prstGeom>
+        </p:spPr>
+      </p:pic>
+    </p:spTree>
+    <p:extLst>
+      <p:ext uri="{BB962C8B-B14F-4D97-AF65-F5344CB8AC3E}">
+        <p14:creationId xmlns:p14="http://schemas.microsoft.com/office/powerpoint/2010/main" val="824235207"/>
+      </p:ext>
+    </p:extLst>
+  </p:cSld>
+  <p:clrMapOvr>
+    <a:masterClrMapping/>
+  </p:clrMapOvr>
+</p:sld>
+</file>
+
+<file path=ppt/slides/slide54.xml><?xml version="1.0" encoding="utf-8"?>
+<p:sld xmlns:a="http://schemas.openxmlformats.org/drawingml/2006/main" xmlns:r="http://schemas.openxmlformats.org/officeDocument/2006/relationships" xmlns:p="http://schemas.openxmlformats.org/presentationml/2006/main">
+  <p:cSld>
+    <p:spTree>
+      <p:nvGrpSpPr>
+        <p:cNvPr id="1" name=""/>
+        <p:cNvGrpSpPr/>
+        <p:nvPr/>
+      </p:nvGrpSpPr>
+      <p:grpSpPr>
+        <a:xfrm>
+          <a:off x="0" y="0"/>
+          <a:ext cx="0" cy="0"/>
+          <a:chOff x="0" y="0"/>
+          <a:chExt cx="0" cy="0"/>
+        </a:xfrm>
+      </p:grpSpPr>
+      <p:pic>
+        <p:nvPicPr>
+          <p:cNvPr id="3" name="그림 2">
+            <a:extLst>
+              <a:ext uri="{FF2B5EF4-FFF2-40B4-BE49-F238E27FC236}">
+                <a16:creationId xmlns:a16="http://schemas.microsoft.com/office/drawing/2014/main" id="{41279A63-F77C-3869-D352-9B6D5B9F3B16}"/>
+              </a:ext>
+            </a:extLst>
+          </p:cNvPr>
+          <p:cNvPicPr>
+            <a:picLocks noChangeAspect="1"/>
+          </p:cNvPicPr>
+          <p:nvPr/>
+        </p:nvPicPr>
+        <p:blipFill>
+          <a:blip r:embed="rId2"/>
+          <a:stretch>
+            <a:fillRect/>
+          </a:stretch>
+        </p:blipFill>
+        <p:spPr>
+          <a:xfrm>
+            <a:off x="3019425" y="862012"/>
+            <a:ext cx="6153150" cy="5133975"/>
+          </a:xfrm>
+          <a:prstGeom prst="rect">
+            <a:avLst/>
+          </a:prstGeom>
+        </p:spPr>
+      </p:pic>
+    </p:spTree>
+    <p:extLst>
+      <p:ext uri="{BB962C8B-B14F-4D97-AF65-F5344CB8AC3E}">
+        <p14:creationId xmlns:p14="http://schemas.microsoft.com/office/powerpoint/2010/main" val="651093556"/>
+      </p:ext>
+    </p:extLst>
+  </p:cSld>
+  <p:clrMapOvr>
+    <a:masterClrMapping/>
+  </p:clrMapOvr>
+</p:sld>
+</file>
+
+<file path=ppt/slides/slide55.xml><?xml version="1.0" encoding="utf-8"?>
+<p:sld xmlns:a="http://schemas.openxmlformats.org/drawingml/2006/main" xmlns:r="http://schemas.openxmlformats.org/officeDocument/2006/relationships" xmlns:p="http://schemas.openxmlformats.org/presentationml/2006/main">
+  <p:cSld>
+    <p:spTree>
+      <p:nvGrpSpPr>
+        <p:cNvPr id="1" name=""/>
+        <p:cNvGrpSpPr/>
+        <p:nvPr/>
+      </p:nvGrpSpPr>
+      <p:grpSpPr>
+        <a:xfrm>
+          <a:off x="0" y="0"/>
+          <a:ext cx="0" cy="0"/>
+          <a:chOff x="0" y="0"/>
+          <a:chExt cx="0" cy="0"/>
+        </a:xfrm>
+      </p:grpSpPr>
+    </p:spTree>
+    <p:extLst>
+      <p:ext uri="{BB962C8B-B14F-4D97-AF65-F5344CB8AC3E}">
+        <p14:creationId xmlns:p14="http://schemas.microsoft.com/office/powerpoint/2010/main" val="1153107778"/>
       </p:ext>
     </p:extLst>
   </p:cSld>
